--- a/presentation_deck.pptx
+++ b/presentation_deck.pptx
@@ -4,6 +4,9 @@
   <p:sldMasterIdLst>
     <p:sldMasterId id="2147483648" r:id="rId1"/>
   </p:sldMasterIdLst>
+  <p:notesMasterIdLst>
+    <p:notesMasterId r:id="rId18"/>
+  </p:notesMasterIdLst>
   <p:sldIdLst>
     <p:sldId id="256" r:id="rId2"/>
     <p:sldId id="257" r:id="rId3"/>
@@ -13,12 +16,14 @@
     <p:sldId id="261" r:id="rId7"/>
     <p:sldId id="262" r:id="rId8"/>
     <p:sldId id="263" r:id="rId9"/>
-    <p:sldId id="264" r:id="rId10"/>
-    <p:sldId id="265" r:id="rId11"/>
-    <p:sldId id="266" r:id="rId12"/>
-    <p:sldId id="267" r:id="rId13"/>
-    <p:sldId id="268" r:id="rId14"/>
-    <p:sldId id="269" r:id="rId15"/>
+    <p:sldId id="270" r:id="rId10"/>
+    <p:sldId id="264" r:id="rId11"/>
+    <p:sldId id="265" r:id="rId12"/>
+    <p:sldId id="266" r:id="rId13"/>
+    <p:sldId id="271" r:id="rId14"/>
+    <p:sldId id="267" r:id="rId15"/>
+    <p:sldId id="268" r:id="rId16"/>
+    <p:sldId id="269" r:id="rId17"/>
   </p:sldIdLst>
   <p:sldSz cx="12192000" cy="6858000"/>
   <p:notesSz cx="6858000" cy="9144000"/>
@@ -136,6 +141,446 @@
 </p:presentation>
 </file>
 
+<file path=ppt/notesMasters/notesMaster1.xml><?xml version="1.0" encoding="utf-8"?>
+<p:notesMaster xmlns:a="http://schemas.openxmlformats.org/drawingml/2006/main" xmlns:r="http://schemas.openxmlformats.org/officeDocument/2006/relationships" xmlns:p="http://schemas.openxmlformats.org/presentationml/2006/main">
+  <p:cSld>
+    <p:bg>
+      <p:bgRef idx="1001">
+        <a:schemeClr val="bg1"/>
+      </p:bgRef>
+    </p:bg>
+    <p:spTree>
+      <p:nvGrpSpPr>
+        <p:cNvPr id="1" name=""/>
+        <p:cNvGrpSpPr/>
+        <p:nvPr/>
+      </p:nvGrpSpPr>
+      <p:grpSpPr>
+        <a:xfrm>
+          <a:off x="0" y="0"/>
+          <a:ext cx="0" cy="0"/>
+          <a:chOff x="0" y="0"/>
+          <a:chExt cx="0" cy="0"/>
+        </a:xfrm>
+      </p:grpSpPr>
+      <p:sp>
+        <p:nvSpPr>
+          <p:cNvPr id="2" name="Header Placeholder 1"/>
+          <p:cNvSpPr>
+            <a:spLocks noGrp="1"/>
+          </p:cNvSpPr>
+          <p:nvPr>
+            <p:ph type="hdr" sz="quarter"/>
+          </p:nvPr>
+        </p:nvSpPr>
+        <p:spPr>
+          <a:xfrm>
+            <a:off x="0" y="0"/>
+            <a:ext cx="2971800" cy="458788"/>
+          </a:xfrm>
+          <a:prstGeom prst="rect">
+            <a:avLst/>
+          </a:prstGeom>
+        </p:spPr>
+        <p:txBody>
+          <a:bodyPr vert="horz" lIns="91440" tIns="45720" rIns="91440" bIns="45720" rtlCol="0"/>
+          <a:lstStyle>
+            <a:lvl1pPr algn="l">
+              <a:defRPr sz="1200"/>
+            </a:lvl1pPr>
+          </a:lstStyle>
+          <a:p>
+            <a:endParaRPr lang="en-US"/>
+          </a:p>
+        </p:txBody>
+      </p:sp>
+      <p:sp>
+        <p:nvSpPr>
+          <p:cNvPr id="3" name="Date Placeholder 2"/>
+          <p:cNvSpPr>
+            <a:spLocks noGrp="1"/>
+          </p:cNvSpPr>
+          <p:nvPr>
+            <p:ph type="dt" idx="1"/>
+          </p:nvPr>
+        </p:nvSpPr>
+        <p:spPr>
+          <a:xfrm>
+            <a:off x="3884613" y="0"/>
+            <a:ext cx="2971800" cy="458788"/>
+          </a:xfrm>
+          <a:prstGeom prst="rect">
+            <a:avLst/>
+          </a:prstGeom>
+        </p:spPr>
+        <p:txBody>
+          <a:bodyPr vert="horz" lIns="91440" tIns="45720" rIns="91440" bIns="45720" rtlCol="0"/>
+          <a:lstStyle>
+            <a:lvl1pPr algn="r">
+              <a:defRPr sz="1200"/>
+            </a:lvl1pPr>
+          </a:lstStyle>
+          <a:p>
+            <a:fld id="{CE044062-EEFA-4728-909F-3F88DFC931BD}" type="datetimeFigureOut">
+              <a:rPr lang="en-US" smtClean="0"/>
+              <a:t>4/3/2026</a:t>
+            </a:fld>
+            <a:endParaRPr lang="en-US"/>
+          </a:p>
+        </p:txBody>
+      </p:sp>
+      <p:sp>
+        <p:nvSpPr>
+          <p:cNvPr id="4" name="Slide Image Placeholder 3"/>
+          <p:cNvSpPr>
+            <a:spLocks noGrp="1" noRot="1" noChangeAspect="1"/>
+          </p:cNvSpPr>
+          <p:nvPr>
+            <p:ph type="sldImg" idx="2"/>
+          </p:nvPr>
+        </p:nvSpPr>
+        <p:spPr>
+          <a:xfrm>
+            <a:off x="685800" y="1143000"/>
+            <a:ext cx="5486400" cy="3086100"/>
+          </a:xfrm>
+          <a:prstGeom prst="rect">
+            <a:avLst/>
+          </a:prstGeom>
+          <a:noFill/>
+          <a:ln w="12700">
+            <a:solidFill>
+              <a:prstClr val="black"/>
+            </a:solidFill>
+          </a:ln>
+        </p:spPr>
+        <p:txBody>
+          <a:bodyPr vert="horz" lIns="91440" tIns="45720" rIns="91440" bIns="45720" rtlCol="0" anchor="ctr"/>
+          <a:lstStyle/>
+          <a:p>
+            <a:endParaRPr lang="en-US"/>
+          </a:p>
+        </p:txBody>
+      </p:sp>
+      <p:sp>
+        <p:nvSpPr>
+          <p:cNvPr id="5" name="Notes Placeholder 4"/>
+          <p:cNvSpPr>
+            <a:spLocks noGrp="1"/>
+          </p:cNvSpPr>
+          <p:nvPr>
+            <p:ph type="body" sz="quarter" idx="3"/>
+          </p:nvPr>
+        </p:nvSpPr>
+        <p:spPr>
+          <a:xfrm>
+            <a:off x="685800" y="4400550"/>
+            <a:ext cx="5486400" cy="3600450"/>
+          </a:xfrm>
+          <a:prstGeom prst="rect">
+            <a:avLst/>
+          </a:prstGeom>
+        </p:spPr>
+        <p:txBody>
+          <a:bodyPr vert="horz" lIns="91440" tIns="45720" rIns="91440" bIns="45720" rtlCol="0"/>
+          <a:lstStyle/>
+          <a:p>
+            <a:pPr lvl="0"/>
+            <a:r>
+              <a:rPr lang="en-US"/>
+              <a:t>Click to edit Master text styles</a:t>
+            </a:r>
+          </a:p>
+          <a:p>
+            <a:pPr lvl="1"/>
+            <a:r>
+              <a:rPr lang="en-US"/>
+              <a:t>Second level</a:t>
+            </a:r>
+          </a:p>
+          <a:p>
+            <a:pPr lvl="2"/>
+            <a:r>
+              <a:rPr lang="en-US"/>
+              <a:t>Third level</a:t>
+            </a:r>
+          </a:p>
+          <a:p>
+            <a:pPr lvl="3"/>
+            <a:r>
+              <a:rPr lang="en-US"/>
+              <a:t>Fourth level</a:t>
+            </a:r>
+          </a:p>
+          <a:p>
+            <a:pPr lvl="4"/>
+            <a:r>
+              <a:rPr lang="en-US"/>
+              <a:t>Fifth level</a:t>
+            </a:r>
+          </a:p>
+        </p:txBody>
+      </p:sp>
+      <p:sp>
+        <p:nvSpPr>
+          <p:cNvPr id="6" name="Footer Placeholder 5"/>
+          <p:cNvSpPr>
+            <a:spLocks noGrp="1"/>
+          </p:cNvSpPr>
+          <p:nvPr>
+            <p:ph type="ftr" sz="quarter" idx="4"/>
+          </p:nvPr>
+        </p:nvSpPr>
+        <p:spPr>
+          <a:xfrm>
+            <a:off x="0" y="8685213"/>
+            <a:ext cx="2971800" cy="458787"/>
+          </a:xfrm>
+          <a:prstGeom prst="rect">
+            <a:avLst/>
+          </a:prstGeom>
+        </p:spPr>
+        <p:txBody>
+          <a:bodyPr vert="horz" lIns="91440" tIns="45720" rIns="91440" bIns="45720" rtlCol="0" anchor="b"/>
+          <a:lstStyle>
+            <a:lvl1pPr algn="l">
+              <a:defRPr sz="1200"/>
+            </a:lvl1pPr>
+          </a:lstStyle>
+          <a:p>
+            <a:endParaRPr lang="en-US"/>
+          </a:p>
+        </p:txBody>
+      </p:sp>
+      <p:sp>
+        <p:nvSpPr>
+          <p:cNvPr id="7" name="Slide Number Placeholder 6"/>
+          <p:cNvSpPr>
+            <a:spLocks noGrp="1"/>
+          </p:cNvSpPr>
+          <p:nvPr>
+            <p:ph type="sldNum" sz="quarter" idx="5"/>
+          </p:nvPr>
+        </p:nvSpPr>
+        <p:spPr>
+          <a:xfrm>
+            <a:off x="3884613" y="8685213"/>
+            <a:ext cx="2971800" cy="458787"/>
+          </a:xfrm>
+          <a:prstGeom prst="rect">
+            <a:avLst/>
+          </a:prstGeom>
+        </p:spPr>
+        <p:txBody>
+          <a:bodyPr vert="horz" lIns="91440" tIns="45720" rIns="91440" bIns="45720" rtlCol="0" anchor="b"/>
+          <a:lstStyle>
+            <a:lvl1pPr algn="r">
+              <a:defRPr sz="1200"/>
+            </a:lvl1pPr>
+          </a:lstStyle>
+          <a:p>
+            <a:fld id="{E0848C20-210E-4ED9-820B-EFDF076EEA5F}" type="slidenum">
+              <a:rPr lang="en-US" smtClean="0"/>
+              <a:t>‹#›</a:t>
+            </a:fld>
+            <a:endParaRPr lang="en-US"/>
+          </a:p>
+        </p:txBody>
+      </p:sp>
+    </p:spTree>
+    <p:extLst>
+      <p:ext uri="{BB962C8B-B14F-4D97-AF65-F5344CB8AC3E}">
+        <p14:creationId xmlns:p14="http://schemas.microsoft.com/office/powerpoint/2010/main" val="4121100230"/>
+      </p:ext>
+    </p:extLst>
+  </p:cSld>
+  <p:clrMap bg1="lt1" tx1="dk1" bg2="lt2" tx2="dk2" accent1="accent1" accent2="accent2" accent3="accent3" accent4="accent4" accent5="accent5" accent6="accent6" hlink="hlink" folHlink="folHlink"/>
+  <p:notesStyle>
+    <a:lvl1pPr marL="0" algn="l" defTabSz="914400" rtl="0" eaLnBrk="1" latinLnBrk="0" hangingPunct="1">
+      <a:defRPr sz="1200" kern="1200">
+        <a:solidFill>
+          <a:schemeClr val="tx1"/>
+        </a:solidFill>
+        <a:latin typeface="+mn-lt"/>
+        <a:ea typeface="+mn-ea"/>
+        <a:cs typeface="+mn-cs"/>
+      </a:defRPr>
+    </a:lvl1pPr>
+    <a:lvl2pPr marL="457200" algn="l" defTabSz="914400" rtl="0" eaLnBrk="1" latinLnBrk="0" hangingPunct="1">
+      <a:defRPr sz="1200" kern="1200">
+        <a:solidFill>
+          <a:schemeClr val="tx1"/>
+        </a:solidFill>
+        <a:latin typeface="+mn-lt"/>
+        <a:ea typeface="+mn-ea"/>
+        <a:cs typeface="+mn-cs"/>
+      </a:defRPr>
+    </a:lvl2pPr>
+    <a:lvl3pPr marL="914400" algn="l" defTabSz="914400" rtl="0" eaLnBrk="1" latinLnBrk="0" hangingPunct="1">
+      <a:defRPr sz="1200" kern="1200">
+        <a:solidFill>
+          <a:schemeClr val="tx1"/>
+        </a:solidFill>
+        <a:latin typeface="+mn-lt"/>
+        <a:ea typeface="+mn-ea"/>
+        <a:cs typeface="+mn-cs"/>
+      </a:defRPr>
+    </a:lvl3pPr>
+    <a:lvl4pPr marL="1371600" algn="l" defTabSz="914400" rtl="0" eaLnBrk="1" latinLnBrk="0" hangingPunct="1">
+      <a:defRPr sz="1200" kern="1200">
+        <a:solidFill>
+          <a:schemeClr val="tx1"/>
+        </a:solidFill>
+        <a:latin typeface="+mn-lt"/>
+        <a:ea typeface="+mn-ea"/>
+        <a:cs typeface="+mn-cs"/>
+      </a:defRPr>
+    </a:lvl4pPr>
+    <a:lvl5pPr marL="1828800" algn="l" defTabSz="914400" rtl="0" eaLnBrk="1" latinLnBrk="0" hangingPunct="1">
+      <a:defRPr sz="1200" kern="1200">
+        <a:solidFill>
+          <a:schemeClr val="tx1"/>
+        </a:solidFill>
+        <a:latin typeface="+mn-lt"/>
+        <a:ea typeface="+mn-ea"/>
+        <a:cs typeface="+mn-cs"/>
+      </a:defRPr>
+    </a:lvl5pPr>
+    <a:lvl6pPr marL="2286000" algn="l" defTabSz="914400" rtl="0" eaLnBrk="1" latinLnBrk="0" hangingPunct="1">
+      <a:defRPr sz="1200" kern="1200">
+        <a:solidFill>
+          <a:schemeClr val="tx1"/>
+        </a:solidFill>
+        <a:latin typeface="+mn-lt"/>
+        <a:ea typeface="+mn-ea"/>
+        <a:cs typeface="+mn-cs"/>
+      </a:defRPr>
+    </a:lvl6pPr>
+    <a:lvl7pPr marL="2743200" algn="l" defTabSz="914400" rtl="0" eaLnBrk="1" latinLnBrk="0" hangingPunct="1">
+      <a:defRPr sz="1200" kern="1200">
+        <a:solidFill>
+          <a:schemeClr val="tx1"/>
+        </a:solidFill>
+        <a:latin typeface="+mn-lt"/>
+        <a:ea typeface="+mn-ea"/>
+        <a:cs typeface="+mn-cs"/>
+      </a:defRPr>
+    </a:lvl7pPr>
+    <a:lvl8pPr marL="3200400" algn="l" defTabSz="914400" rtl="0" eaLnBrk="1" latinLnBrk="0" hangingPunct="1">
+      <a:defRPr sz="1200" kern="1200">
+        <a:solidFill>
+          <a:schemeClr val="tx1"/>
+        </a:solidFill>
+        <a:latin typeface="+mn-lt"/>
+        <a:ea typeface="+mn-ea"/>
+        <a:cs typeface="+mn-cs"/>
+      </a:defRPr>
+    </a:lvl8pPr>
+    <a:lvl9pPr marL="3657600" algn="l" defTabSz="914400" rtl="0" eaLnBrk="1" latinLnBrk="0" hangingPunct="1">
+      <a:defRPr sz="1200" kern="1200">
+        <a:solidFill>
+          <a:schemeClr val="tx1"/>
+        </a:solidFill>
+        <a:latin typeface="+mn-lt"/>
+        <a:ea typeface="+mn-ea"/>
+        <a:cs typeface="+mn-cs"/>
+      </a:defRPr>
+    </a:lvl9pPr>
+  </p:notesStyle>
+</p:notesMaster>
+</file>
+
+<file path=ppt/notesSlides/notesSlide1.xml><?xml version="1.0" encoding="utf-8"?>
+<p:notes xmlns:a="http://schemas.openxmlformats.org/drawingml/2006/main" xmlns:r="http://schemas.openxmlformats.org/officeDocument/2006/relationships" xmlns:p="http://schemas.openxmlformats.org/presentationml/2006/main">
+  <p:cSld>
+    <p:spTree>
+      <p:nvGrpSpPr>
+        <p:cNvPr id="1" name=""/>
+        <p:cNvGrpSpPr/>
+        <p:nvPr/>
+      </p:nvGrpSpPr>
+      <p:grpSpPr>
+        <a:xfrm>
+          <a:off x="0" y="0"/>
+          <a:ext cx="0" cy="0"/>
+          <a:chOff x="0" y="0"/>
+          <a:chExt cx="0" cy="0"/>
+        </a:xfrm>
+      </p:grpSpPr>
+      <p:sp>
+        <p:nvSpPr>
+          <p:cNvPr id="2" name="Slide Image Placeholder 1"/>
+          <p:cNvSpPr>
+            <a:spLocks noGrp="1" noRot="1" noChangeAspect="1"/>
+          </p:cNvSpPr>
+          <p:nvPr>
+            <p:ph type="sldImg"/>
+          </p:nvPr>
+        </p:nvSpPr>
+        <p:spPr/>
+        <p:txBody>
+          <a:bodyPr/>
+          <a:lstStyle/>
+          <a:p>
+            <a:endParaRPr lang="en-US"/>
+          </a:p>
+        </p:txBody>
+      </p:sp>
+      <p:sp>
+        <p:nvSpPr>
+          <p:cNvPr id="3" name="Notes Placeholder 2"/>
+          <p:cNvSpPr>
+            <a:spLocks noGrp="1"/>
+          </p:cNvSpPr>
+          <p:nvPr>
+            <p:ph type="body" idx="1"/>
+          </p:nvPr>
+        </p:nvSpPr>
+        <p:spPr/>
+        <p:txBody>
+          <a:bodyPr/>
+          <a:lstStyle/>
+          <a:p>
+            <a:endParaRPr lang="en-US" dirty="0"/>
+          </a:p>
+        </p:txBody>
+      </p:sp>
+      <p:sp>
+        <p:nvSpPr>
+          <p:cNvPr id="4" name="Slide Number Placeholder 3"/>
+          <p:cNvSpPr>
+            <a:spLocks noGrp="1"/>
+          </p:cNvSpPr>
+          <p:nvPr>
+            <p:ph type="sldNum" sz="quarter" idx="5"/>
+          </p:nvPr>
+        </p:nvSpPr>
+        <p:spPr/>
+        <p:txBody>
+          <a:bodyPr/>
+          <a:lstStyle/>
+          <a:p>
+            <a:fld id="{E0848C20-210E-4ED9-820B-EFDF076EEA5F}" type="slidenum">
+              <a:rPr lang="en-US" smtClean="0"/>
+              <a:t>5</a:t>
+            </a:fld>
+            <a:endParaRPr lang="en-US"/>
+          </a:p>
+        </p:txBody>
+      </p:sp>
+    </p:spTree>
+    <p:extLst>
+      <p:ext uri="{BB962C8B-B14F-4D97-AF65-F5344CB8AC3E}">
+        <p14:creationId xmlns:p14="http://schemas.microsoft.com/office/powerpoint/2010/main" val="1853602933"/>
+      </p:ext>
+    </p:extLst>
+  </p:cSld>
+  <p:clrMapOvr>
+    <a:masterClrMapping/>
+  </p:clrMapOvr>
+</p:notes>
+</file>
+
 <file path=ppt/slideLayouts/slideLayout1.xml><?xml version="1.0" encoding="utf-8"?>
 <p:sldLayout xmlns:a="http://schemas.openxmlformats.org/drawingml/2006/main" xmlns:r="http://schemas.openxmlformats.org/officeDocument/2006/relationships" xmlns:p="http://schemas.openxmlformats.org/presentationml/2006/main" type="title" preserve="1">
   <p:cSld name="Title Slide">
@@ -373,6 +818,18 @@
   <p:clrMapOvr>
     <a:masterClrMapping/>
   </p:clrMapOvr>
+  <mc:AlternateContent xmlns:mc="http://schemas.openxmlformats.org/markup-compatibility/2006" xmlns:p14="http://schemas.microsoft.com/office/powerpoint/2010/main">
+    <mc:Choice Requires="p14">
+      <p:transition spd="med" p14:dur="700">
+        <p:fade/>
+      </p:transition>
+    </mc:Choice>
+    <mc:Fallback xmlns="">
+      <p:transition spd="med">
+        <p:fade/>
+      </p:transition>
+    </mc:Fallback>
+  </mc:AlternateContent>
 </p:sldLayout>
 </file>
 
@@ -541,6 +998,18 @@
   <p:clrMapOvr>
     <a:masterClrMapping/>
   </p:clrMapOvr>
+  <mc:AlternateContent xmlns:mc="http://schemas.openxmlformats.org/markup-compatibility/2006" xmlns:p14="http://schemas.microsoft.com/office/powerpoint/2010/main">
+    <mc:Choice Requires="p14">
+      <p:transition spd="med" p14:dur="700">
+        <p:fade/>
+      </p:transition>
+    </mc:Choice>
+    <mc:Fallback xmlns="">
+      <p:transition spd="med">
+        <p:fade/>
+      </p:transition>
+    </mc:Fallback>
+  </mc:AlternateContent>
 </p:sldLayout>
 </file>
 
@@ -719,6 +1188,18 @@
   <p:clrMapOvr>
     <a:masterClrMapping/>
   </p:clrMapOvr>
+  <mc:AlternateContent xmlns:mc="http://schemas.openxmlformats.org/markup-compatibility/2006" xmlns:p14="http://schemas.microsoft.com/office/powerpoint/2010/main">
+    <mc:Choice Requires="p14">
+      <p:transition spd="med" p14:dur="700">
+        <p:fade/>
+      </p:transition>
+    </mc:Choice>
+    <mc:Fallback xmlns="">
+      <p:transition spd="med">
+        <p:fade/>
+      </p:transition>
+    </mc:Fallback>
+  </mc:AlternateContent>
 </p:sldLayout>
 </file>
 
@@ -887,6 +1368,18 @@
   <p:clrMapOvr>
     <a:masterClrMapping/>
   </p:clrMapOvr>
+  <mc:AlternateContent xmlns:mc="http://schemas.openxmlformats.org/markup-compatibility/2006" xmlns:p14="http://schemas.microsoft.com/office/powerpoint/2010/main">
+    <mc:Choice Requires="p14">
+      <p:transition spd="med" p14:dur="700">
+        <p:fade/>
+      </p:transition>
+    </mc:Choice>
+    <mc:Fallback xmlns="">
+      <p:transition spd="med">
+        <p:fade/>
+      </p:transition>
+    </mc:Fallback>
+  </mc:AlternateContent>
 </p:sldLayout>
 </file>
 
@@ -1132,6 +1625,18 @@
   <p:clrMapOvr>
     <a:masterClrMapping/>
   </p:clrMapOvr>
+  <mc:AlternateContent xmlns:mc="http://schemas.openxmlformats.org/markup-compatibility/2006" xmlns:p14="http://schemas.microsoft.com/office/powerpoint/2010/main">
+    <mc:Choice Requires="p14">
+      <p:transition spd="med" p14:dur="700">
+        <p:fade/>
+      </p:transition>
+    </mc:Choice>
+    <mc:Fallback xmlns="">
+      <p:transition spd="med">
+        <p:fade/>
+      </p:transition>
+    </mc:Fallback>
+  </mc:AlternateContent>
 </p:sldLayout>
 </file>
 
@@ -1417,6 +1922,18 @@
   <p:clrMapOvr>
     <a:masterClrMapping/>
   </p:clrMapOvr>
+  <mc:AlternateContent xmlns:mc="http://schemas.openxmlformats.org/markup-compatibility/2006" xmlns:p14="http://schemas.microsoft.com/office/powerpoint/2010/main">
+    <mc:Choice Requires="p14">
+      <p:transition spd="med" p14:dur="700">
+        <p:fade/>
+      </p:transition>
+    </mc:Choice>
+    <mc:Fallback xmlns="">
+      <p:transition spd="med">
+        <p:fade/>
+      </p:transition>
+    </mc:Fallback>
+  </mc:AlternateContent>
 </p:sldLayout>
 </file>
 
@@ -1836,6 +2353,18 @@
   <p:clrMapOvr>
     <a:masterClrMapping/>
   </p:clrMapOvr>
+  <mc:AlternateContent xmlns:mc="http://schemas.openxmlformats.org/markup-compatibility/2006" xmlns:p14="http://schemas.microsoft.com/office/powerpoint/2010/main">
+    <mc:Choice Requires="p14">
+      <p:transition spd="med" p14:dur="700">
+        <p:fade/>
+      </p:transition>
+    </mc:Choice>
+    <mc:Fallback xmlns="">
+      <p:transition spd="med">
+        <p:fade/>
+      </p:transition>
+    </mc:Fallback>
+  </mc:AlternateContent>
 </p:sldLayout>
 </file>
 
@@ -1953,6 +2482,18 @@
   <p:clrMapOvr>
     <a:masterClrMapping/>
   </p:clrMapOvr>
+  <mc:AlternateContent xmlns:mc="http://schemas.openxmlformats.org/markup-compatibility/2006" xmlns:p14="http://schemas.microsoft.com/office/powerpoint/2010/main">
+    <mc:Choice Requires="p14">
+      <p:transition spd="med" p14:dur="700">
+        <p:fade/>
+      </p:transition>
+    </mc:Choice>
+    <mc:Fallback xmlns="">
+      <p:transition spd="med">
+        <p:fade/>
+      </p:transition>
+    </mc:Fallback>
+  </mc:AlternateContent>
 </p:sldLayout>
 </file>
 
@@ -2048,6 +2589,18 @@
   <p:clrMapOvr>
     <a:masterClrMapping/>
   </p:clrMapOvr>
+  <mc:AlternateContent xmlns:mc="http://schemas.openxmlformats.org/markup-compatibility/2006" xmlns:p14="http://schemas.microsoft.com/office/powerpoint/2010/main">
+    <mc:Choice Requires="p14">
+      <p:transition spd="med" p14:dur="700">
+        <p:fade/>
+      </p:transition>
+    </mc:Choice>
+    <mc:Fallback xmlns="">
+      <p:transition spd="med">
+        <p:fade/>
+      </p:transition>
+    </mc:Fallback>
+  </mc:AlternateContent>
 </p:sldLayout>
 </file>
 
@@ -2323,6 +2876,18 @@
   <p:clrMapOvr>
     <a:masterClrMapping/>
   </p:clrMapOvr>
+  <mc:AlternateContent xmlns:mc="http://schemas.openxmlformats.org/markup-compatibility/2006" xmlns:p14="http://schemas.microsoft.com/office/powerpoint/2010/main">
+    <mc:Choice Requires="p14">
+      <p:transition spd="med" p14:dur="700">
+        <p:fade/>
+      </p:transition>
+    </mc:Choice>
+    <mc:Fallback xmlns="">
+      <p:transition spd="med">
+        <p:fade/>
+      </p:transition>
+    </mc:Fallback>
+  </mc:AlternateContent>
 </p:sldLayout>
 </file>
 
@@ -2575,6 +3140,18 @@
   <p:clrMapOvr>
     <a:masterClrMapping/>
   </p:clrMapOvr>
+  <mc:AlternateContent xmlns:mc="http://schemas.openxmlformats.org/markup-compatibility/2006" xmlns:p14="http://schemas.microsoft.com/office/powerpoint/2010/main">
+    <mc:Choice Requires="p14">
+      <p:transition spd="med" p14:dur="700">
+        <p:fade/>
+      </p:transition>
+    </mc:Choice>
+    <mc:Fallback xmlns="">
+      <p:transition spd="med">
+        <p:fade/>
+      </p:transition>
+    </mc:Fallback>
+  </mc:AlternateContent>
 </p:sldLayout>
 </file>
 
@@ -2833,6 +3410,18 @@
     <p:sldLayoutId id="2147483658" r:id="rId10"/>
     <p:sldLayoutId id="2147483659" r:id="rId11"/>
   </p:sldLayoutIdLst>
+  <mc:AlternateContent xmlns:mc="http://schemas.openxmlformats.org/markup-compatibility/2006" xmlns:p14="http://schemas.microsoft.com/office/powerpoint/2010/main">
+    <mc:Choice Requires="p14">
+      <p:transition spd="med" p14:dur="700">
+        <p:fade/>
+      </p:transition>
+    </mc:Choice>
+    <mc:Fallback xmlns="">
+      <p:transition spd="med">
+        <p:fade/>
+      </p:transition>
+    </mc:Fallback>
+  </mc:AlternateContent>
   <p:txStyles>
     <p:titleStyle>
       <a:lvl1pPr algn="ctr" defTabSz="457200" rtl="0" eaLnBrk="1" latinLnBrk="0" hangingPunct="1">
@@ -3327,6 +3916,18 @@
   <p:clrMapOvr>
     <a:masterClrMapping/>
   </p:clrMapOvr>
+  <mc:AlternateContent xmlns:mc="http://schemas.openxmlformats.org/markup-compatibility/2006" xmlns:p14="http://schemas.microsoft.com/office/powerpoint/2010/main">
+    <mc:Choice Requires="p14">
+      <p:transition spd="med" p14:dur="700">
+        <p:fade/>
+      </p:transition>
+    </mc:Choice>
+    <mc:Fallback xmlns="">
+      <p:transition spd="med">
+        <p:fade/>
+      </p:transition>
+    </mc:Fallback>
+  </mc:AlternateContent>
 </p:sld>
 </file>
 
@@ -3430,7 +4031,7 @@
               </a:defRPr>
             </a:pPr>
             <a:r>
-              <a:t>Production Readiness</a:t>
+              <a:t>Bonus: Fairness Metrics &amp; Remediation</a:t>
             </a:r>
           </a:p>
         </p:txBody>
@@ -3466,7 +4067,7 @@
               </a:defRPr>
             </a:pPr>
             <a:r>
-              <a:t>Built for maintainability, not just to pass the test</a:t>
+              <a:t>Quantitative equity measurement + actionable suggestions</a:t>
             </a:r>
           </a:p>
         </p:txBody>
@@ -3510,14 +4111,337 @@
       </p:sp>
       <p:sp>
         <p:nvSpPr>
-          <p:cNvPr id="6" name="Rounded Rectangle 5"/>
+          <p:cNvPr id="6" name="TextBox 5"/>
+          <p:cNvSpPr txBox="1"/>
+          <p:nvPr/>
+        </p:nvSpPr>
+        <p:spPr>
+          <a:xfrm>
+            <a:off x="731520" y="1463040"/>
+            <a:ext cx="5029200" cy="365760"/>
+          </a:xfrm>
+          <a:prstGeom prst="rect">
+            <a:avLst/>
+          </a:prstGeom>
+          <a:noFill/>
+        </p:spPr>
+        <p:txBody>
+          <a:bodyPr wrap="square">
+            <a:spAutoFit/>
+          </a:bodyPr>
+          <a:lstStyle/>
+          <a:p>
+            <a:pPr algn="l">
+              <a:defRPr sz="2000" b="1">
+                <a:solidFill>
+                  <a:srgbClr val="1A1A2E"/>
+                </a:solidFill>
+                <a:latin typeface="Calibri"/>
+              </a:defRPr>
+            </a:pPr>
+            <a:r>
+              <a:rPr dirty="0"/>
+              <a:t>Fairness Scoring</a:t>
+            </a:r>
+          </a:p>
+        </p:txBody>
+      </p:sp>
+      <p:sp>
+        <p:nvSpPr>
+          <p:cNvPr id="7" name="TextBox 6"/>
+          <p:cNvSpPr txBox="1"/>
+          <p:nvPr/>
+        </p:nvSpPr>
+        <p:spPr>
+          <a:xfrm>
+            <a:off x="731520" y="1920240"/>
+            <a:ext cx="5029200" cy="2743200"/>
+          </a:xfrm>
+          <a:prstGeom prst="rect">
+            <a:avLst/>
+          </a:prstGeom>
+          <a:noFill/>
+        </p:spPr>
+        <p:txBody>
+          <a:bodyPr wrap="square">
+            <a:spAutoFit/>
+          </a:bodyPr>
+          <a:lstStyle/>
+          <a:p>
+            <a:pPr>
+              <a:spcAft>
+                <a:spcPts val="650"/>
+              </a:spcAft>
+              <a:defRPr sz="1300">
+                <a:solidFill>
+                  <a:srgbClr val="1A1A2E"/>
+                </a:solidFill>
+                <a:latin typeface="Calibri"/>
+              </a:defRPr>
+            </a:pPr>
+            <a:r>
+              <a:rPr dirty="0"/>
+              <a:t>Gini coefficient: 0 = everyone equal, 1 = one person gets all</a:t>
+            </a:r>
+          </a:p>
+          <a:p>
+            <a:pPr>
+              <a:spcAft>
+                <a:spcPts val="650"/>
+              </a:spcAft>
+              <a:defRPr sz="1300">
+                <a:solidFill>
+                  <a:srgbClr val="1A1A2E"/>
+                </a:solidFill>
+                <a:latin typeface="Calibri"/>
+              </a:defRPr>
+            </a:pPr>
+            <a:r>
+              <a:rPr dirty="0"/>
+              <a:t>Night shift Gini: measures equity in unpopular shift distribution</a:t>
+            </a:r>
+          </a:p>
+          <a:p>
+            <a:pPr>
+              <a:spcAft>
+                <a:spcPts val="650"/>
+              </a:spcAft>
+              <a:defRPr sz="1300">
+                <a:solidFill>
+                  <a:srgbClr val="1A1A2E"/>
+                </a:solidFill>
+                <a:latin typeface="Calibri"/>
+              </a:defRPr>
+            </a:pPr>
+            <a:r>
+              <a:rPr dirty="0"/>
+              <a:t>Workload Gini: measures equity in total working days</a:t>
+            </a:r>
+          </a:p>
+          <a:p>
+            <a:pPr>
+              <a:spcAft>
+                <a:spcPts val="650"/>
+              </a:spcAft>
+              <a:defRPr sz="1300">
+                <a:solidFill>
+                  <a:srgbClr val="1A1A2E"/>
+                </a:solidFill>
+                <a:latin typeface="Calibri"/>
+              </a:defRPr>
+            </a:pPr>
+            <a:r>
+              <a:rPr dirty="0"/>
+              <a:t>Shift entropy (Shannon): diversity of shift assignments per agent</a:t>
+            </a:r>
+          </a:p>
+          <a:p>
+            <a:pPr>
+              <a:spcAft>
+                <a:spcPts val="650"/>
+              </a:spcAft>
+              <a:defRPr sz="1300">
+                <a:solidFill>
+                  <a:srgbClr val="1A1A2E"/>
+                </a:solidFill>
+                <a:latin typeface="Calibri"/>
+              </a:defRPr>
+            </a:pPr>
+            <a:r>
+              <a:rPr dirty="0"/>
+              <a:t>Composite score (0-100): 40% night + 30% workload + 30% variety</a:t>
+            </a:r>
+          </a:p>
+          <a:p>
+            <a:pPr>
+              <a:spcAft>
+                <a:spcPts val="650"/>
+              </a:spcAft>
+              <a:defRPr sz="1300">
+                <a:solidFill>
+                  <a:srgbClr val="1A1A2E"/>
+                </a:solidFill>
+                <a:latin typeface="Calibri"/>
+              </a:defRPr>
+            </a:pPr>
+            <a:r>
+              <a:rPr dirty="0"/>
+              <a:t>Letter grade: A (≥90) → F (&lt;60); sparsity-adjusted for realism</a:t>
+            </a:r>
+          </a:p>
+        </p:txBody>
+      </p:sp>
+      <p:sp>
+        <p:nvSpPr>
+          <p:cNvPr id="8" name="TextBox 7"/>
+          <p:cNvSpPr txBox="1"/>
+          <p:nvPr/>
+        </p:nvSpPr>
+        <p:spPr>
+          <a:xfrm>
+            <a:off x="6400800" y="1463040"/>
+            <a:ext cx="5029200" cy="365760"/>
+          </a:xfrm>
+          <a:prstGeom prst="rect">
+            <a:avLst/>
+          </a:prstGeom>
+          <a:noFill/>
+        </p:spPr>
+        <p:txBody>
+          <a:bodyPr wrap="square">
+            <a:spAutoFit/>
+          </a:bodyPr>
+          <a:lstStyle/>
+          <a:p>
+            <a:pPr algn="l">
+              <a:defRPr sz="2000" b="1">
+                <a:solidFill>
+                  <a:srgbClr val="1A1A2E"/>
+                </a:solidFill>
+                <a:latin typeface="Calibri"/>
+              </a:defRPr>
+            </a:pPr>
+            <a:r>
+              <a:t>Constraint Remediation</a:t>
+            </a:r>
+          </a:p>
+        </p:txBody>
+      </p:sp>
+      <p:sp>
+        <p:nvSpPr>
+          <p:cNvPr id="9" name="TextBox 8"/>
+          <p:cNvSpPr txBox="1"/>
+          <p:nvPr/>
+        </p:nvSpPr>
+        <p:spPr>
+          <a:xfrm>
+            <a:off x="6400800" y="1920240"/>
+            <a:ext cx="5029200" cy="2743200"/>
+          </a:xfrm>
+          <a:prstGeom prst="rect">
+            <a:avLst/>
+          </a:prstGeom>
+          <a:noFill/>
+        </p:spPr>
+        <p:txBody>
+          <a:bodyPr wrap="square">
+            <a:spAutoFit/>
+          </a:bodyPr>
+          <a:lstStyle/>
+          <a:p>
+            <a:pPr>
+              <a:spcAft>
+                <a:spcPts val="650"/>
+              </a:spcAft>
+              <a:defRPr sz="1300">
+                <a:solidFill>
+                  <a:srgbClr val="1A1A2E"/>
+                </a:solidFill>
+                <a:latin typeface="Calibri"/>
+              </a:defRPr>
+            </a:pPr>
+            <a:r>
+              <a:rPr dirty="0"/>
+              <a:t>Each violation type → specific, actionable suggestion</a:t>
+            </a:r>
+          </a:p>
+          <a:p>
+            <a:pPr>
+              <a:spcAft>
+                <a:spcPts val="650"/>
+              </a:spcAft>
+              <a:defRPr sz="1300">
+                <a:solidFill>
+                  <a:srgbClr val="1A1A2E"/>
+                </a:solidFill>
+                <a:latin typeface="Calibri"/>
+              </a:defRPr>
+            </a:pPr>
+            <a:r>
+              <a:rPr dirty="0"/>
+              <a:t>Grouped by category with affected days listed</a:t>
+            </a:r>
+          </a:p>
+          <a:p>
+            <a:pPr>
+              <a:spcAft>
+                <a:spcPts val="650"/>
+              </a:spcAft>
+              <a:defRPr sz="1300">
+                <a:solidFill>
+                  <a:srgbClr val="1A1A2E"/>
+                </a:solidFill>
+                <a:latin typeface="Calibri"/>
+              </a:defRPr>
+            </a:pPr>
+            <a:r>
+              <a:rPr dirty="0"/>
+              <a:t>e.g. "Move a senior from lower-demand shift" for staffing gaps</a:t>
+            </a:r>
+          </a:p>
+          <a:p>
+            <a:pPr>
+              <a:spcAft>
+                <a:spcPts val="650"/>
+              </a:spcAft>
+              <a:defRPr sz="1300">
+                <a:solidFill>
+                  <a:srgbClr val="1A1A2E"/>
+                </a:solidFill>
+                <a:latin typeface="Calibri"/>
+              </a:defRPr>
+            </a:pPr>
+            <a:r>
+              <a:rPr dirty="0"/>
+              <a:t>e.g. "Swap with agent having complementary pattern" for continuity</a:t>
+            </a:r>
+          </a:p>
+          <a:p>
+            <a:pPr>
+              <a:spcAft>
+                <a:spcPts val="650"/>
+              </a:spcAft>
+              <a:defRPr sz="1300">
+                <a:solidFill>
+                  <a:srgbClr val="1A1A2E"/>
+                </a:solidFill>
+                <a:latin typeface="Calibri"/>
+              </a:defRPr>
+            </a:pPr>
+            <a:r>
+              <a:rPr dirty="0"/>
+              <a:t>Dashboard shows expandable remediation per violation group</a:t>
+            </a:r>
+          </a:p>
+          <a:p>
+            <a:pPr>
+              <a:spcAft>
+                <a:spcPts val="650"/>
+              </a:spcAft>
+              <a:defRPr sz="1300">
+                <a:solidFill>
+                  <a:srgbClr val="1A1A2E"/>
+                </a:solidFill>
+                <a:latin typeface="Calibri"/>
+              </a:defRPr>
+            </a:pPr>
+            <a:r>
+              <a:rPr dirty="0"/>
+              <a:t>Enables managers to make informed manual adjustments</a:t>
+            </a:r>
+          </a:p>
+        </p:txBody>
+      </p:sp>
+      <p:sp>
+        <p:nvSpPr>
+          <p:cNvPr id="10" name="Rounded Rectangle 9"/>
           <p:cNvSpPr/>
           <p:nvPr/>
         </p:nvSpPr>
         <p:spPr>
           <a:xfrm>
-            <a:off x="548640" y="1463040"/>
-            <a:ext cx="5394960" cy="1280160"/>
+            <a:off x="548640" y="4937760"/>
+            <a:ext cx="10972800" cy="1097280"/>
           </a:xfrm>
           <a:prstGeom prst="roundRect">
             <a:avLst>
@@ -3525,7 +4449,7 @@
             </a:avLst>
           </a:prstGeom>
           <a:solidFill>
-            <a:srgbClr val="F5F5FA"/>
+            <a:srgbClr val="00C3F7"/>
           </a:solidFill>
           <a:ln>
             <a:noFill/>
@@ -3556,50 +4480,14 @@
       </p:sp>
       <p:sp>
         <p:nvSpPr>
-          <p:cNvPr id="7" name="TextBox 6"/>
-          <p:cNvSpPr txBox="1"/>
-          <p:nvPr/>
-        </p:nvSpPr>
-        <p:spPr>
-          <a:xfrm>
-            <a:off x="731520" y="1554480"/>
-            <a:ext cx="457200" cy="365760"/>
-          </a:xfrm>
-          <a:prstGeom prst="rect">
-            <a:avLst/>
-          </a:prstGeom>
-          <a:noFill/>
-        </p:spPr>
-        <p:txBody>
-          <a:bodyPr wrap="square">
-            <a:spAutoFit/>
-          </a:bodyPr>
-          <a:lstStyle/>
-          <a:p>
-            <a:pPr algn="ctr">
-              <a:defRPr sz="2000" b="0">
-                <a:solidFill>
-                  <a:srgbClr val="1A1A2E"/>
-                </a:solidFill>
-                <a:latin typeface="Calibri"/>
-              </a:defRPr>
-            </a:pPr>
-            <a:r>
-              <a:t>📦</a:t>
-            </a:r>
-          </a:p>
-        </p:txBody>
-      </p:sp>
-      <p:sp>
-        <p:nvSpPr>
-          <p:cNvPr id="8" name="TextBox 7"/>
-          <p:cNvSpPr txBox="1"/>
-          <p:nvPr/>
-        </p:nvSpPr>
-        <p:spPr>
-          <a:xfrm>
-            <a:off x="1097280" y="1554480"/>
-            <a:ext cx="4572000" cy="320040"/>
+          <p:cNvPr id="11" name="TextBox 10"/>
+          <p:cNvSpPr txBox="1"/>
+          <p:nvPr/>
+        </p:nvSpPr>
+        <p:spPr>
+          <a:xfrm>
+            <a:off x="731520" y="5029200"/>
+            <a:ext cx="10607040" cy="914400"/>
           </a:xfrm>
           <a:prstGeom prst="rect">
             <a:avLst/>
@@ -3613,821 +4501,19 @@
           <a:lstStyle/>
           <a:p>
             <a:pPr algn="l">
-              <a:defRPr sz="1500" b="1">
-                <a:solidFill>
-                  <a:srgbClr val="1A1A2E"/>
-                </a:solidFill>
-                <a:latin typeface="Calibri"/>
-              </a:defRPr>
-            </a:pPr>
-            <a:r>
-              <a:t>Modular Architecture</a:t>
-            </a:r>
-          </a:p>
-        </p:txBody>
-      </p:sp>
-      <p:sp>
-        <p:nvSpPr>
-          <p:cNvPr id="9" name="TextBox 8"/>
-          <p:cNvSpPr txBox="1"/>
-          <p:nvPr/>
-        </p:nvSpPr>
-        <p:spPr>
-          <a:xfrm>
-            <a:off x="1097280" y="1874520"/>
-            <a:ext cx="4572000" cy="777240"/>
-          </a:xfrm>
-          <a:prstGeom prst="rect">
-            <a:avLst/>
-          </a:prstGeom>
-          <a:noFill/>
-        </p:spPr>
-        <p:txBody>
-          <a:bodyPr wrap="square">
-            <a:spAutoFit/>
-          </a:bodyPr>
-          <a:lstStyle/>
-          <a:p>
-            <a:pPr algn="l">
-              <a:defRPr sz="1100" b="0">
-                <a:solidFill>
-                  <a:srgbClr val="1A1A2E"/>
-                </a:solidFill>
-                <a:latin typeface="Calibri"/>
-              </a:defRPr>
-            </a:pPr>
-            <a:r>
-              <a:t>Clean separation: forecasting / scheduling / evaluation. Each module testable independently. New constraints = new function, not rewrite.</a:t>
-            </a:r>
-          </a:p>
-        </p:txBody>
-      </p:sp>
-      <p:sp>
-        <p:nvSpPr>
-          <p:cNvPr id="10" name="Rounded Rectangle 9"/>
-          <p:cNvSpPr/>
-          <p:nvPr/>
-        </p:nvSpPr>
-        <p:spPr>
-          <a:xfrm>
-            <a:off x="6309359" y="1463040"/>
-            <a:ext cx="5394960" cy="1280160"/>
-          </a:xfrm>
-          <a:prstGeom prst="roundRect">
-            <a:avLst>
-              <a:gd name="adj" fmla="val 3000"/>
-            </a:avLst>
-          </a:prstGeom>
-          <a:solidFill>
-            <a:srgbClr val="F5F5FA"/>
-          </a:solidFill>
-          <a:ln>
-            <a:noFill/>
-          </a:ln>
-        </p:spPr>
-        <p:style>
-          <a:lnRef idx="1">
-            <a:schemeClr val="accent1"/>
-          </a:lnRef>
-          <a:fillRef idx="3">
-            <a:schemeClr val="accent1"/>
-          </a:fillRef>
-          <a:effectRef idx="2">
-            <a:schemeClr val="accent1"/>
-          </a:effectRef>
-          <a:fontRef idx="minor">
-            <a:schemeClr val="lt1"/>
-          </a:fontRef>
-        </p:style>
-        <p:txBody>
-          <a:bodyPr rtlCol="0" anchor="ctr"/>
-          <a:lstStyle/>
-          <a:p>
-            <a:pPr algn="ctr"/>
-            <a:endParaRPr/>
-          </a:p>
-        </p:txBody>
-      </p:sp>
-      <p:sp>
-        <p:nvSpPr>
-          <p:cNvPr id="11" name="TextBox 10"/>
-          <p:cNvSpPr txBox="1"/>
-          <p:nvPr/>
-        </p:nvSpPr>
-        <p:spPr>
-          <a:xfrm>
-            <a:off x="6492239" y="1554480"/>
-            <a:ext cx="457200" cy="365760"/>
-          </a:xfrm>
-          <a:prstGeom prst="rect">
-            <a:avLst/>
-          </a:prstGeom>
-          <a:noFill/>
-        </p:spPr>
-        <p:txBody>
-          <a:bodyPr wrap="square">
-            <a:spAutoFit/>
-          </a:bodyPr>
-          <a:lstStyle/>
-          <a:p>
-            <a:pPr algn="ctr">
-              <a:defRPr sz="2000" b="0">
-                <a:solidFill>
-                  <a:srgbClr val="1A1A2E"/>
-                </a:solidFill>
-                <a:latin typeface="Calibri"/>
-              </a:defRPr>
-            </a:pPr>
-            <a:r>
-              <a:t>⚙️</a:t>
-            </a:r>
-          </a:p>
-        </p:txBody>
-      </p:sp>
-      <p:sp>
-        <p:nvSpPr>
-          <p:cNvPr id="12" name="TextBox 11"/>
-          <p:cNvSpPr txBox="1"/>
-          <p:nvPr/>
-        </p:nvSpPr>
-        <p:spPr>
-          <a:xfrm>
-            <a:off x="6857999" y="1554480"/>
-            <a:ext cx="4572000" cy="320040"/>
-          </a:xfrm>
-          <a:prstGeom prst="rect">
-            <a:avLst/>
-          </a:prstGeom>
-          <a:noFill/>
-        </p:spPr>
-        <p:txBody>
-          <a:bodyPr wrap="square">
-            <a:spAutoFit/>
-          </a:bodyPr>
-          <a:lstStyle/>
-          <a:p>
-            <a:pPr algn="l">
-              <a:defRPr sz="1500" b="1">
-                <a:solidFill>
-                  <a:srgbClr val="1A1A2E"/>
-                </a:solidFill>
-                <a:latin typeface="Calibri"/>
-              </a:defRPr>
-            </a:pPr>
-            <a:r>
-              <a:t>Config-Driven</a:t>
-            </a:r>
-          </a:p>
-        </p:txBody>
-      </p:sp>
-      <p:sp>
-        <p:nvSpPr>
-          <p:cNvPr id="13" name="TextBox 12"/>
-          <p:cNvSpPr txBox="1"/>
-          <p:nvPr/>
-        </p:nvSpPr>
-        <p:spPr>
-          <a:xfrm>
-            <a:off x="6857999" y="1874520"/>
-            <a:ext cx="4572000" cy="777240"/>
-          </a:xfrm>
-          <a:prstGeom prst="rect">
-            <a:avLst/>
-          </a:prstGeom>
-          <a:noFill/>
-        </p:spPr>
-        <p:txBody>
-          <a:bodyPr wrap="square">
-            <a:spAutoFit/>
-          </a:bodyPr>
-          <a:lstStyle/>
-          <a:p>
-            <a:pPr algn="l">
-              <a:defRPr sz="1100" b="0">
-                <a:solidFill>
-                  <a:srgbClr val="1A1A2E"/>
-                </a:solidFill>
-                <a:latin typeface="Calibri"/>
-              </a:defRPr>
-            </a:pPr>
-            <a:r>
-              <a:t>SchedulingConfig dataclass: all business rules, weights, thresholds in one place. Dashboard sliders map directly to config. Zero magic numbers in logic.</a:t>
-            </a:r>
-          </a:p>
-        </p:txBody>
-      </p:sp>
-      <p:sp>
-        <p:nvSpPr>
-          <p:cNvPr id="14" name="Rounded Rectangle 13"/>
-          <p:cNvSpPr/>
-          <p:nvPr/>
-        </p:nvSpPr>
-        <p:spPr>
-          <a:xfrm>
-            <a:off x="548640" y="3017520"/>
-            <a:ext cx="5394960" cy="1280160"/>
-          </a:xfrm>
-          <a:prstGeom prst="roundRect">
-            <a:avLst>
-              <a:gd name="adj" fmla="val 3000"/>
-            </a:avLst>
-          </a:prstGeom>
-          <a:solidFill>
-            <a:srgbClr val="F5F5FA"/>
-          </a:solidFill>
-          <a:ln>
-            <a:noFill/>
-          </a:ln>
-        </p:spPr>
-        <p:style>
-          <a:lnRef idx="1">
-            <a:schemeClr val="accent1"/>
-          </a:lnRef>
-          <a:fillRef idx="3">
-            <a:schemeClr val="accent1"/>
-          </a:fillRef>
-          <a:effectRef idx="2">
-            <a:schemeClr val="accent1"/>
-          </a:effectRef>
-          <a:fontRef idx="minor">
-            <a:schemeClr val="lt1"/>
-          </a:fontRef>
-        </p:style>
-        <p:txBody>
-          <a:bodyPr rtlCol="0" anchor="ctr"/>
-          <a:lstStyle/>
-          <a:p>
-            <a:pPr algn="ctr"/>
-            <a:endParaRPr/>
-          </a:p>
-        </p:txBody>
-      </p:sp>
-      <p:sp>
-        <p:nvSpPr>
-          <p:cNvPr id="15" name="TextBox 14"/>
-          <p:cNvSpPr txBox="1"/>
-          <p:nvPr/>
-        </p:nvSpPr>
-        <p:spPr>
-          <a:xfrm>
-            <a:off x="731520" y="3108960"/>
-            <a:ext cx="457200" cy="365760"/>
-          </a:xfrm>
-          <a:prstGeom prst="rect">
-            <a:avLst/>
-          </a:prstGeom>
-          <a:noFill/>
-        </p:spPr>
-        <p:txBody>
-          <a:bodyPr wrap="square">
-            <a:spAutoFit/>
-          </a:bodyPr>
-          <a:lstStyle/>
-          <a:p>
-            <a:pPr algn="ctr">
-              <a:defRPr sz="2000" b="0">
-                <a:solidFill>
-                  <a:srgbClr val="1A1A2E"/>
-                </a:solidFill>
-                <a:latin typeface="Calibri"/>
-              </a:defRPr>
-            </a:pPr>
-            <a:r>
-              <a:t>✅</a:t>
-            </a:r>
-          </a:p>
-        </p:txBody>
-      </p:sp>
-      <p:sp>
-        <p:nvSpPr>
-          <p:cNvPr id="16" name="TextBox 15"/>
-          <p:cNvSpPr txBox="1"/>
-          <p:nvPr/>
-        </p:nvSpPr>
-        <p:spPr>
-          <a:xfrm>
-            <a:off x="1097280" y="3108960"/>
-            <a:ext cx="4572000" cy="320040"/>
-          </a:xfrm>
-          <a:prstGeom prst="rect">
-            <a:avLst/>
-          </a:prstGeom>
-          <a:noFill/>
-        </p:spPr>
-        <p:txBody>
-          <a:bodyPr wrap="square">
-            <a:spAutoFit/>
-          </a:bodyPr>
-          <a:lstStyle/>
-          <a:p>
-            <a:pPr algn="l">
-              <a:defRPr sz="1500" b="1">
-                <a:solidFill>
-                  <a:srgbClr val="1A1A2E"/>
-                </a:solidFill>
-                <a:latin typeface="Calibri"/>
-              </a:defRPr>
-            </a:pPr>
-            <a:r>
-              <a:t>Comprehensive Testing</a:t>
-            </a:r>
-          </a:p>
-        </p:txBody>
-      </p:sp>
-      <p:sp>
-        <p:nvSpPr>
-          <p:cNvPr id="17" name="TextBox 16"/>
-          <p:cNvSpPr txBox="1"/>
-          <p:nvPr/>
-        </p:nvSpPr>
-        <p:spPr>
-          <a:xfrm>
-            <a:off x="1097280" y="3429000"/>
-            <a:ext cx="4572000" cy="777240"/>
-          </a:xfrm>
-          <a:prstGeom prst="rect">
-            <a:avLst/>
-          </a:prstGeom>
-          <a:noFill/>
-        </p:spPr>
-        <p:txBody>
-          <a:bodyPr wrap="square">
-            <a:spAutoFit/>
-          </a:bodyPr>
-          <a:lstStyle/>
-          <a:p>
-            <a:pPr algn="l">
-              <a:defRPr sz="1100" b="0">
-                <a:solidFill>
-                  <a:srgbClr val="1A1A2E"/>
-                </a:solidFill>
-                <a:latin typeface="Calibri"/>
-              </a:defRPr>
-            </a:pPr>
-            <a:r>
-              <a:t>55+ pytest tests: data integrity (8), forecasting (11), scheduling (13), bonus features (26). Module + integration coverage.</a:t>
-            </a:r>
-          </a:p>
-        </p:txBody>
-      </p:sp>
-      <p:sp>
-        <p:nvSpPr>
-          <p:cNvPr id="18" name="Rounded Rectangle 17"/>
-          <p:cNvSpPr/>
-          <p:nvPr/>
-        </p:nvSpPr>
-        <p:spPr>
-          <a:xfrm>
-            <a:off x="6309359" y="3017520"/>
-            <a:ext cx="5394960" cy="1280160"/>
-          </a:xfrm>
-          <a:prstGeom prst="roundRect">
-            <a:avLst>
-              <a:gd name="adj" fmla="val 3000"/>
-            </a:avLst>
-          </a:prstGeom>
-          <a:solidFill>
-            <a:srgbClr val="F5F5FA"/>
-          </a:solidFill>
-          <a:ln>
-            <a:noFill/>
-          </a:ln>
-        </p:spPr>
-        <p:style>
-          <a:lnRef idx="1">
-            <a:schemeClr val="accent1"/>
-          </a:lnRef>
-          <a:fillRef idx="3">
-            <a:schemeClr val="accent1"/>
-          </a:fillRef>
-          <a:effectRef idx="2">
-            <a:schemeClr val="accent1"/>
-          </a:effectRef>
-          <a:fontRef idx="minor">
-            <a:schemeClr val="lt1"/>
-          </a:fontRef>
-        </p:style>
-        <p:txBody>
-          <a:bodyPr rtlCol="0" anchor="ctr"/>
-          <a:lstStyle/>
-          <a:p>
-            <a:pPr algn="ctr"/>
-            <a:endParaRPr/>
-          </a:p>
-        </p:txBody>
-      </p:sp>
-      <p:sp>
-        <p:nvSpPr>
-          <p:cNvPr id="19" name="TextBox 18"/>
-          <p:cNvSpPr txBox="1"/>
-          <p:nvPr/>
-        </p:nvSpPr>
-        <p:spPr>
-          <a:xfrm>
-            <a:off x="6492239" y="3108960"/>
-            <a:ext cx="457200" cy="365760"/>
-          </a:xfrm>
-          <a:prstGeom prst="rect">
-            <a:avLst/>
-          </a:prstGeom>
-          <a:noFill/>
-        </p:spPr>
-        <p:txBody>
-          <a:bodyPr wrap="square">
-            <a:spAutoFit/>
-          </a:bodyPr>
-          <a:lstStyle/>
-          <a:p>
-            <a:pPr algn="ctr">
-              <a:defRPr sz="2000" b="0">
-                <a:solidFill>
-                  <a:srgbClr val="1A1A2E"/>
-                </a:solidFill>
-                <a:latin typeface="Calibri"/>
-              </a:defRPr>
-            </a:pPr>
-            <a:r>
-              <a:t>🚀</a:t>
-            </a:r>
-          </a:p>
-        </p:txBody>
-      </p:sp>
-      <p:sp>
-        <p:nvSpPr>
-          <p:cNvPr id="20" name="TextBox 19"/>
-          <p:cNvSpPr txBox="1"/>
-          <p:nvPr/>
-        </p:nvSpPr>
-        <p:spPr>
-          <a:xfrm>
-            <a:off x="6857999" y="3108960"/>
-            <a:ext cx="4572000" cy="320040"/>
-          </a:xfrm>
-          <a:prstGeom prst="rect">
-            <a:avLst/>
-          </a:prstGeom>
-          <a:noFill/>
-        </p:spPr>
-        <p:txBody>
-          <a:bodyPr wrap="square">
-            <a:spAutoFit/>
-          </a:bodyPr>
-          <a:lstStyle/>
-          <a:p>
-            <a:pPr algn="l">
-              <a:defRPr sz="1500" b="1">
-                <a:solidFill>
-                  <a:srgbClr val="1A1A2E"/>
-                </a:solidFill>
-                <a:latin typeface="Calibri"/>
-              </a:defRPr>
-            </a:pPr>
-            <a:r>
-              <a:t>CI/CD Ready</a:t>
-            </a:r>
-          </a:p>
-        </p:txBody>
-      </p:sp>
-      <p:sp>
-        <p:nvSpPr>
-          <p:cNvPr id="21" name="TextBox 20"/>
-          <p:cNvSpPr txBox="1"/>
-          <p:nvPr/>
-        </p:nvSpPr>
-        <p:spPr>
-          <a:xfrm>
-            <a:off x="6857999" y="3429000"/>
-            <a:ext cx="4572000" cy="777240"/>
-          </a:xfrm>
-          <a:prstGeom prst="rect">
-            <a:avLst/>
-          </a:prstGeom>
-          <a:noFill/>
-        </p:spPr>
-        <p:txBody>
-          <a:bodyPr wrap="square">
-            <a:spAutoFit/>
-          </a:bodyPr>
-          <a:lstStyle/>
-          <a:p>
-            <a:pPr algn="l">
-              <a:defRPr sz="1100" b="0">
-                <a:solidFill>
-                  <a:srgbClr val="1A1A2E"/>
-                </a:solidFill>
-                <a:latin typeface="Calibri"/>
-              </a:defRPr>
-            </a:pPr>
-            <a:r>
-              <a:t>pyproject.toml with dependencies. Conventional commits (13 total). Tests run in &lt;5s (unit) + ~71s (integration pipeline). Git-clean repo.</a:t>
-            </a:r>
-          </a:p>
-        </p:txBody>
-      </p:sp>
-      <p:sp>
-        <p:nvSpPr>
-          <p:cNvPr id="22" name="Rounded Rectangle 21"/>
-          <p:cNvSpPr/>
-          <p:nvPr/>
-        </p:nvSpPr>
-        <p:spPr>
-          <a:xfrm>
-            <a:off x="548640" y="4572000"/>
-            <a:ext cx="5394960" cy="1280160"/>
-          </a:xfrm>
-          <a:prstGeom prst="roundRect">
-            <a:avLst>
-              <a:gd name="adj" fmla="val 3000"/>
-            </a:avLst>
-          </a:prstGeom>
-          <a:solidFill>
-            <a:srgbClr val="F5F5FA"/>
-          </a:solidFill>
-          <a:ln>
-            <a:noFill/>
-          </a:ln>
-        </p:spPr>
-        <p:style>
-          <a:lnRef idx="1">
-            <a:schemeClr val="accent1"/>
-          </a:lnRef>
-          <a:fillRef idx="3">
-            <a:schemeClr val="accent1"/>
-          </a:fillRef>
-          <a:effectRef idx="2">
-            <a:schemeClr val="accent1"/>
-          </a:effectRef>
-          <a:fontRef idx="minor">
-            <a:schemeClr val="lt1"/>
-          </a:fontRef>
-        </p:style>
-        <p:txBody>
-          <a:bodyPr rtlCol="0" anchor="ctr"/>
-          <a:lstStyle/>
-          <a:p>
-            <a:pPr algn="ctr"/>
-            <a:endParaRPr/>
-          </a:p>
-        </p:txBody>
-      </p:sp>
-      <p:sp>
-        <p:nvSpPr>
-          <p:cNvPr id="23" name="TextBox 22"/>
-          <p:cNvSpPr txBox="1"/>
-          <p:nvPr/>
-        </p:nvSpPr>
-        <p:spPr>
-          <a:xfrm>
-            <a:off x="731520" y="4663440"/>
-            <a:ext cx="457200" cy="365760"/>
-          </a:xfrm>
-          <a:prstGeom prst="rect">
-            <a:avLst/>
-          </a:prstGeom>
-          <a:noFill/>
-        </p:spPr>
-        <p:txBody>
-          <a:bodyPr wrap="square">
-            <a:spAutoFit/>
-          </a:bodyPr>
-          <a:lstStyle/>
-          <a:p>
-            <a:pPr algn="ctr">
-              <a:defRPr sz="2000" b="0">
-                <a:solidFill>
-                  <a:srgbClr val="1A1A2E"/>
-                </a:solidFill>
-                <a:latin typeface="Calibri"/>
-              </a:defRPr>
-            </a:pPr>
-            <a:r>
-              <a:t>🛡️</a:t>
-            </a:r>
-          </a:p>
-        </p:txBody>
-      </p:sp>
-      <p:sp>
-        <p:nvSpPr>
-          <p:cNvPr id="24" name="TextBox 23"/>
-          <p:cNvSpPr txBox="1"/>
-          <p:nvPr/>
-        </p:nvSpPr>
-        <p:spPr>
-          <a:xfrm>
-            <a:off x="1097280" y="4663440"/>
-            <a:ext cx="4572000" cy="320040"/>
-          </a:xfrm>
-          <a:prstGeom prst="rect">
-            <a:avLst/>
-          </a:prstGeom>
-          <a:noFill/>
-        </p:spPr>
-        <p:txBody>
-          <a:bodyPr wrap="square">
-            <a:spAutoFit/>
-          </a:bodyPr>
-          <a:lstStyle/>
-          <a:p>
-            <a:pPr algn="l">
-              <a:defRPr sz="1500" b="1">
-                <a:solidFill>
-                  <a:srgbClr val="1A1A2E"/>
-                </a:solidFill>
-                <a:latin typeface="Calibri"/>
-              </a:defRPr>
-            </a:pPr>
-            <a:r>
-              <a:t>Defensive Engineering</a:t>
-            </a:r>
-          </a:p>
-        </p:txBody>
-      </p:sp>
-      <p:sp>
-        <p:nvSpPr>
-          <p:cNvPr id="25" name="TextBox 24"/>
-          <p:cNvSpPr txBox="1"/>
-          <p:nvPr/>
-        </p:nvSpPr>
-        <p:spPr>
-          <a:xfrm>
-            <a:off x="1097280" y="4983480"/>
-            <a:ext cx="4572000" cy="777240"/>
-          </a:xfrm>
-          <a:prstGeom prst="rect">
-            <a:avLst/>
-          </a:prstGeom>
-          <a:noFill/>
-        </p:spPr>
-        <p:txBody>
-          <a:bodyPr wrap="square">
-            <a:spAutoFit/>
-          </a:bodyPr>
-          <a:lstStyle/>
-          <a:p>
-            <a:pPr algn="l">
-              <a:defRPr sz="1100" b="0">
-                <a:solidFill>
-                  <a:srgbClr val="1A1A2E"/>
-                </a:solidFill>
-                <a:latin typeface="Calibri"/>
-              </a:defRPr>
-            </a:pPr>
-            <a:r>
-              <a:t>Historical floors prevent model extrapolation. Feasibility caps for scarce agents. Windows encoding fix for cross-platform. Graceful degradation on solver timeout.</a:t>
-            </a:r>
-          </a:p>
-        </p:txBody>
-      </p:sp>
-      <p:sp>
-        <p:nvSpPr>
-          <p:cNvPr id="26" name="Rounded Rectangle 25"/>
-          <p:cNvSpPr/>
-          <p:nvPr/>
-        </p:nvSpPr>
-        <p:spPr>
-          <a:xfrm>
-            <a:off x="6309359" y="4572000"/>
-            <a:ext cx="5394960" cy="1280160"/>
-          </a:xfrm>
-          <a:prstGeom prst="roundRect">
-            <a:avLst>
-              <a:gd name="adj" fmla="val 3000"/>
-            </a:avLst>
-          </a:prstGeom>
-          <a:solidFill>
-            <a:srgbClr val="F5F5FA"/>
-          </a:solidFill>
-          <a:ln>
-            <a:noFill/>
-          </a:ln>
-        </p:spPr>
-        <p:style>
-          <a:lnRef idx="1">
-            <a:schemeClr val="accent1"/>
-          </a:lnRef>
-          <a:fillRef idx="3">
-            <a:schemeClr val="accent1"/>
-          </a:fillRef>
-          <a:effectRef idx="2">
-            <a:schemeClr val="accent1"/>
-          </a:effectRef>
-          <a:fontRef idx="minor">
-            <a:schemeClr val="lt1"/>
-          </a:fontRef>
-        </p:style>
-        <p:txBody>
-          <a:bodyPr rtlCol="0" anchor="ctr"/>
-          <a:lstStyle/>
-          <a:p>
-            <a:pPr algn="ctr"/>
-            <a:endParaRPr/>
-          </a:p>
-        </p:txBody>
-      </p:sp>
-      <p:sp>
-        <p:nvSpPr>
-          <p:cNvPr id="27" name="TextBox 26"/>
-          <p:cNvSpPr txBox="1"/>
-          <p:nvPr/>
-        </p:nvSpPr>
-        <p:spPr>
-          <a:xfrm>
-            <a:off x="6492239" y="4663440"/>
-            <a:ext cx="457200" cy="365760"/>
-          </a:xfrm>
-          <a:prstGeom prst="rect">
-            <a:avLst/>
-          </a:prstGeom>
-          <a:noFill/>
-        </p:spPr>
-        <p:txBody>
-          <a:bodyPr wrap="square">
-            <a:spAutoFit/>
-          </a:bodyPr>
-          <a:lstStyle/>
-          <a:p>
-            <a:pPr algn="ctr">
-              <a:defRPr sz="2000" b="0">
-                <a:solidFill>
-                  <a:srgbClr val="1A1A2E"/>
-                </a:solidFill>
-                <a:latin typeface="Calibri"/>
-              </a:defRPr>
-            </a:pPr>
-            <a:r>
-              <a:t>📊</a:t>
-            </a:r>
-          </a:p>
-        </p:txBody>
-      </p:sp>
-      <p:sp>
-        <p:nvSpPr>
-          <p:cNvPr id="28" name="TextBox 27"/>
-          <p:cNvSpPr txBox="1"/>
-          <p:nvPr/>
-        </p:nvSpPr>
-        <p:spPr>
-          <a:xfrm>
-            <a:off x="6857999" y="4663440"/>
-            <a:ext cx="4572000" cy="320040"/>
-          </a:xfrm>
-          <a:prstGeom prst="rect">
-            <a:avLst/>
-          </a:prstGeom>
-          <a:noFill/>
-        </p:spPr>
-        <p:txBody>
-          <a:bodyPr wrap="square">
-            <a:spAutoFit/>
-          </a:bodyPr>
-          <a:lstStyle/>
-          <a:p>
-            <a:pPr algn="l">
-              <a:defRPr sz="1500" b="1">
-                <a:solidFill>
-                  <a:srgbClr val="1A1A2E"/>
-                </a:solidFill>
-                <a:latin typeface="Calibri"/>
-              </a:defRPr>
-            </a:pPr>
-            <a:r>
-              <a:t>Interactive Dashboard</a:t>
-            </a:r>
-          </a:p>
-        </p:txBody>
-      </p:sp>
-      <p:sp>
-        <p:nvSpPr>
-          <p:cNvPr id="29" name="TextBox 28"/>
-          <p:cNvSpPr txBox="1"/>
-          <p:nvPr/>
-        </p:nvSpPr>
-        <p:spPr>
-          <a:xfrm>
-            <a:off x="6857999" y="4983480"/>
-            <a:ext cx="4572000" cy="777240"/>
-          </a:xfrm>
-          <a:prstGeom prst="rect">
-            <a:avLst/>
-          </a:prstGeom>
-          <a:noFill/>
-        </p:spPr>
-        <p:txBody>
-          <a:bodyPr wrap="square">
-            <a:spAutoFit/>
-          </a:bodyPr>
-          <a:lstStyle/>
-          <a:p>
-            <a:pPr algn="l">
-              <a:defRPr sz="1100" b="0">
-                <a:solidFill>
-                  <a:srgbClr val="1A1A2E"/>
-                </a:solidFill>
-                <a:latin typeface="Calibri"/>
-              </a:defRPr>
-            </a:pPr>
-            <a:r>
-              <a:t>7-tab Streamlit app: managers adjust parameters, see results, download CSV. Cached pipeline results for responsive interaction. No code changes needed.</a:t>
+              <a:defRPr sz="1300" b="0">
+                <a:solidFill>
+                  <a:srgbClr val="FFFFFF"/>
+                </a:solidFill>
+                <a:latin typeface="Calibri"/>
+              </a:defRPr>
+            </a:pPr>
+            <a:r>
+              <a:t>Why This Matters for Production</a:t>
+            </a:r>
+            <a:br/>
+            <a:r>
+              <a:t>→ Fairness metrics give managers visibility into equity issues before agent complaints. Remediation transforms a 'failed constraint' alert into a concrete action plan. Together, they close the feedback loop between automated scheduling and human oversight.</a:t>
             </a:r>
           </a:p>
         </p:txBody>
@@ -4437,6 +4523,18 @@
   <p:clrMapOvr>
     <a:masterClrMapping/>
   </p:clrMapOvr>
+  <mc:AlternateContent xmlns:mc="http://schemas.openxmlformats.org/markup-compatibility/2006" xmlns:p14="http://schemas.microsoft.com/office/powerpoint/2010/main">
+    <mc:Choice Requires="p14">
+      <p:transition spd="med" p14:dur="700">
+        <p:fade/>
+      </p:transition>
+    </mc:Choice>
+    <mc:Fallback xmlns="">
+      <p:transition spd="med">
+        <p:fade/>
+      </p:transition>
+    </mc:Fallback>
+  </mc:AlternateContent>
 </p:sld>
 </file>
 
@@ -4540,7 +4638,7 @@
               </a:defRPr>
             </a:pPr>
             <a:r>
-              <a:t>Interactive Dashboard</a:t>
+              <a:t>Production Readiness</a:t>
             </a:r>
           </a:p>
         </p:txBody>
@@ -4576,7 +4674,7 @@
               </a:defRPr>
             </a:pPr>
             <a:r>
-              <a:t>7 tabs: Forecast · Schedule · Summary · Constraints · Agents · Fairness · Preferences</a:t>
+              <a:t>Built for maintainability, not just to pass the test</a:t>
             </a:r>
           </a:p>
         </p:txBody>
@@ -4626,12 +4724,12 @@
         </p:nvSpPr>
         <p:spPr>
           <a:xfrm>
-            <a:off x="731520" y="1371600"/>
-            <a:ext cx="10698480" cy="4572000"/>
+            <a:off x="548640" y="1463040"/>
+            <a:ext cx="5394960" cy="1280160"/>
           </a:xfrm>
           <a:prstGeom prst="roundRect">
             <a:avLst>
-              <a:gd name="adj" fmla="val 2000"/>
+              <a:gd name="adj" fmla="val 3000"/>
             </a:avLst>
           </a:prstGeom>
           <a:solidFill>
@@ -4672,8 +4770,8 @@
         </p:nvSpPr>
         <p:spPr>
           <a:xfrm>
-            <a:off x="731520" y="3200400"/>
-            <a:ext cx="10698480" cy="731520"/>
+            <a:off x="731520" y="1554480"/>
+            <a:ext cx="457200" cy="365760"/>
           </a:xfrm>
           <a:prstGeom prst="rect">
             <a:avLst/>
@@ -4689,39 +4787,108 @@
             <a:pPr algn="ctr">
               <a:defRPr sz="2000" b="0">
                 <a:solidFill>
-                  <a:srgbClr val="8E8EA3"/>
-                </a:solidFill>
-                <a:latin typeface="Calibri"/>
-              </a:defRPr>
-            </a:pPr>
-            <a:r>
-              <a:t>[Insert Dashboard Screenshots Here]</a:t>
-            </a:r>
-            <a:br/>
-            <a:r>
-              <a:t>Run:  streamlit run app.py</a:t>
-            </a:r>
-          </a:p>
-        </p:txBody>
-      </p:sp>
-      <p:sp>
-        <p:nvSpPr>
-          <p:cNvPr id="8" name="Rounded Rectangle 7"/>
+                  <a:srgbClr val="1A1A2E"/>
+                </a:solidFill>
+                <a:latin typeface="Calibri"/>
+              </a:defRPr>
+            </a:pPr>
+            <a:r>
+              <a:t>📦</a:t>
+            </a:r>
+          </a:p>
+        </p:txBody>
+      </p:sp>
+      <p:sp>
+        <p:nvSpPr>
+          <p:cNvPr id="8" name="TextBox 7"/>
+          <p:cNvSpPr txBox="1"/>
+          <p:nvPr/>
+        </p:nvSpPr>
+        <p:spPr>
+          <a:xfrm>
+            <a:off x="1097280" y="1554480"/>
+            <a:ext cx="4572000" cy="320040"/>
+          </a:xfrm>
+          <a:prstGeom prst="rect">
+            <a:avLst/>
+          </a:prstGeom>
+          <a:noFill/>
+        </p:spPr>
+        <p:txBody>
+          <a:bodyPr wrap="square">
+            <a:spAutoFit/>
+          </a:bodyPr>
+          <a:lstStyle/>
+          <a:p>
+            <a:pPr algn="l">
+              <a:defRPr sz="1500" b="1">
+                <a:solidFill>
+                  <a:srgbClr val="1A1A2E"/>
+                </a:solidFill>
+                <a:latin typeface="Calibri"/>
+              </a:defRPr>
+            </a:pPr>
+            <a:r>
+              <a:t>Modular Architecture</a:t>
+            </a:r>
+          </a:p>
+        </p:txBody>
+      </p:sp>
+      <p:sp>
+        <p:nvSpPr>
+          <p:cNvPr id="9" name="TextBox 8"/>
+          <p:cNvSpPr txBox="1"/>
+          <p:nvPr/>
+        </p:nvSpPr>
+        <p:spPr>
+          <a:xfrm>
+            <a:off x="1097280" y="1874520"/>
+            <a:ext cx="4572000" cy="777240"/>
+          </a:xfrm>
+          <a:prstGeom prst="rect">
+            <a:avLst/>
+          </a:prstGeom>
+          <a:noFill/>
+        </p:spPr>
+        <p:txBody>
+          <a:bodyPr wrap="square">
+            <a:spAutoFit/>
+          </a:bodyPr>
+          <a:lstStyle/>
+          <a:p>
+            <a:pPr algn="l">
+              <a:defRPr sz="1100" b="0">
+                <a:solidFill>
+                  <a:srgbClr val="1A1A2E"/>
+                </a:solidFill>
+                <a:latin typeface="Calibri"/>
+              </a:defRPr>
+            </a:pPr>
+            <a:r>
+              <a:rPr dirty="0"/>
+              <a:t>Clean separation: forecasting / scheduling / evaluation. Each module testable independently. New constraints = new function, not rewrite.</a:t>
+            </a:r>
+          </a:p>
+        </p:txBody>
+      </p:sp>
+      <p:sp>
+        <p:nvSpPr>
+          <p:cNvPr id="10" name="Rounded Rectangle 9"/>
           <p:cNvSpPr/>
           <p:nvPr/>
         </p:nvSpPr>
         <p:spPr>
           <a:xfrm>
-            <a:off x="457200" y="6035040"/>
-            <a:ext cx="1463040" cy="365760"/>
+            <a:off x="6309359" y="1463040"/>
+            <a:ext cx="5394960" cy="1280160"/>
           </a:xfrm>
           <a:prstGeom prst="roundRect">
             <a:avLst>
-              <a:gd name="adj" fmla="val 10000"/>
+              <a:gd name="adj" fmla="val 3000"/>
             </a:avLst>
           </a:prstGeom>
           <a:solidFill>
-            <a:srgbClr val="00C3F7"/>
+            <a:srgbClr val="F5F5FA"/>
           </a:solidFill>
           <a:ln>
             <a:noFill/>
@@ -4752,14 +4919,14 @@
       </p:sp>
       <p:sp>
         <p:nvSpPr>
-          <p:cNvPr id="9" name="TextBox 8"/>
-          <p:cNvSpPr txBox="1"/>
-          <p:nvPr/>
-        </p:nvSpPr>
-        <p:spPr>
-          <a:xfrm>
-            <a:off x="457200" y="6053328"/>
-            <a:ext cx="1463040" cy="320040"/>
+          <p:cNvPr id="11" name="TextBox 10"/>
+          <p:cNvSpPr txBox="1"/>
+          <p:nvPr/>
+        </p:nvSpPr>
+        <p:spPr>
+          <a:xfrm>
+            <a:off x="6492239" y="1554480"/>
+            <a:ext cx="457200" cy="365760"/>
           </a:xfrm>
           <a:prstGeom prst="rect">
             <a:avLst/>
@@ -4773,37 +4940,110 @@
           <a:lstStyle/>
           <a:p>
             <a:pPr algn="ctr">
-              <a:defRPr sz="900" b="1">
-                <a:solidFill>
-                  <a:srgbClr val="FFFFFF"/>
-                </a:solidFill>
-                <a:latin typeface="Calibri"/>
-              </a:defRPr>
-            </a:pPr>
-            <a:r>
-              <a:t>Adjustable CSAT/wait targets</a:t>
-            </a:r>
-          </a:p>
-        </p:txBody>
-      </p:sp>
-      <p:sp>
-        <p:nvSpPr>
-          <p:cNvPr id="10" name="Rounded Rectangle 9"/>
+              <a:defRPr sz="2000" b="0">
+                <a:solidFill>
+                  <a:srgbClr val="1A1A2E"/>
+                </a:solidFill>
+                <a:latin typeface="Calibri"/>
+              </a:defRPr>
+            </a:pPr>
+            <a:r>
+              <a:t>⚙️</a:t>
+            </a:r>
+          </a:p>
+        </p:txBody>
+      </p:sp>
+      <p:sp>
+        <p:nvSpPr>
+          <p:cNvPr id="12" name="TextBox 11"/>
+          <p:cNvSpPr txBox="1"/>
+          <p:nvPr/>
+        </p:nvSpPr>
+        <p:spPr>
+          <a:xfrm>
+            <a:off x="6857999" y="1554480"/>
+            <a:ext cx="4572000" cy="320040"/>
+          </a:xfrm>
+          <a:prstGeom prst="rect">
+            <a:avLst/>
+          </a:prstGeom>
+          <a:noFill/>
+        </p:spPr>
+        <p:txBody>
+          <a:bodyPr wrap="square">
+            <a:spAutoFit/>
+          </a:bodyPr>
+          <a:lstStyle/>
+          <a:p>
+            <a:pPr algn="l">
+              <a:defRPr sz="1500" b="1">
+                <a:solidFill>
+                  <a:srgbClr val="1A1A2E"/>
+                </a:solidFill>
+                <a:latin typeface="Calibri"/>
+              </a:defRPr>
+            </a:pPr>
+            <a:r>
+              <a:t>Config-Driven</a:t>
+            </a:r>
+          </a:p>
+        </p:txBody>
+      </p:sp>
+      <p:sp>
+        <p:nvSpPr>
+          <p:cNvPr id="13" name="TextBox 12"/>
+          <p:cNvSpPr txBox="1"/>
+          <p:nvPr/>
+        </p:nvSpPr>
+        <p:spPr>
+          <a:xfrm>
+            <a:off x="6857999" y="1874520"/>
+            <a:ext cx="4572000" cy="777240"/>
+          </a:xfrm>
+          <a:prstGeom prst="rect">
+            <a:avLst/>
+          </a:prstGeom>
+          <a:noFill/>
+        </p:spPr>
+        <p:txBody>
+          <a:bodyPr wrap="square">
+            <a:spAutoFit/>
+          </a:bodyPr>
+          <a:lstStyle/>
+          <a:p>
+            <a:pPr algn="l">
+              <a:defRPr sz="1100" b="0">
+                <a:solidFill>
+                  <a:srgbClr val="1A1A2E"/>
+                </a:solidFill>
+                <a:latin typeface="Calibri"/>
+              </a:defRPr>
+            </a:pPr>
+            <a:r>
+              <a:rPr dirty="0"/>
+              <a:t>SchedulingConfig dataclass: all business rules, weights, thresholds in one place. Dashboard sliders map directly to config. Zero magic numbers in logic.</a:t>
+            </a:r>
+          </a:p>
+        </p:txBody>
+      </p:sp>
+      <p:sp>
+        <p:nvSpPr>
+          <p:cNvPr id="14" name="Rounded Rectangle 13"/>
           <p:cNvSpPr/>
           <p:nvPr/>
         </p:nvSpPr>
         <p:spPr>
           <a:xfrm>
-            <a:off x="2103120" y="6035040"/>
-            <a:ext cx="1463040" cy="365760"/>
+            <a:off x="548640" y="3017520"/>
+            <a:ext cx="5394960" cy="1280160"/>
           </a:xfrm>
           <a:prstGeom prst="roundRect">
             <a:avLst>
-              <a:gd name="adj" fmla="val 10000"/>
+              <a:gd name="adj" fmla="val 3000"/>
             </a:avLst>
           </a:prstGeom>
           <a:solidFill>
-            <a:srgbClr val="00C3F7"/>
+            <a:srgbClr val="F5F5FA"/>
           </a:solidFill>
           <a:ln>
             <a:noFill/>
@@ -4834,14 +5074,14 @@
       </p:sp>
       <p:sp>
         <p:nvSpPr>
-          <p:cNvPr id="11" name="TextBox 10"/>
-          <p:cNvSpPr txBox="1"/>
-          <p:nvPr/>
-        </p:nvSpPr>
-        <p:spPr>
-          <a:xfrm>
-            <a:off x="2103120" y="6053328"/>
-            <a:ext cx="1463040" cy="320040"/>
+          <p:cNvPr id="15" name="TextBox 14"/>
+          <p:cNvSpPr txBox="1"/>
+          <p:nvPr/>
+        </p:nvSpPr>
+        <p:spPr>
+          <a:xfrm>
+            <a:off x="731520" y="3108960"/>
+            <a:ext cx="457200" cy="365760"/>
           </a:xfrm>
           <a:prstGeom prst="rect">
             <a:avLst/>
@@ -4855,37 +5095,109 @@
           <a:lstStyle/>
           <a:p>
             <a:pPr algn="ctr">
-              <a:defRPr sz="900" b="1">
-                <a:solidFill>
-                  <a:srgbClr val="FFFFFF"/>
-                </a:solidFill>
-                <a:latin typeface="Calibri"/>
-              </a:defRPr>
-            </a:pPr>
-            <a:r>
-              <a:t>Calendar schedule view</a:t>
-            </a:r>
-          </a:p>
-        </p:txBody>
-      </p:sp>
-      <p:sp>
-        <p:nvSpPr>
-          <p:cNvPr id="12" name="Rounded Rectangle 11"/>
+              <a:defRPr sz="2000" b="0">
+                <a:solidFill>
+                  <a:srgbClr val="1A1A2E"/>
+                </a:solidFill>
+                <a:latin typeface="Calibri"/>
+              </a:defRPr>
+            </a:pPr>
+            <a:r>
+              <a:t>✅</a:t>
+            </a:r>
+          </a:p>
+        </p:txBody>
+      </p:sp>
+      <p:sp>
+        <p:nvSpPr>
+          <p:cNvPr id="16" name="TextBox 15"/>
+          <p:cNvSpPr txBox="1"/>
+          <p:nvPr/>
+        </p:nvSpPr>
+        <p:spPr>
+          <a:xfrm>
+            <a:off x="1097280" y="3108960"/>
+            <a:ext cx="4572000" cy="320040"/>
+          </a:xfrm>
+          <a:prstGeom prst="rect">
+            <a:avLst/>
+          </a:prstGeom>
+          <a:noFill/>
+        </p:spPr>
+        <p:txBody>
+          <a:bodyPr wrap="square">
+            <a:spAutoFit/>
+          </a:bodyPr>
+          <a:lstStyle/>
+          <a:p>
+            <a:pPr algn="l">
+              <a:defRPr sz="1500" b="1">
+                <a:solidFill>
+                  <a:srgbClr val="1A1A2E"/>
+                </a:solidFill>
+                <a:latin typeface="Calibri"/>
+              </a:defRPr>
+            </a:pPr>
+            <a:r>
+              <a:t>Comprehensive Testing</a:t>
+            </a:r>
+          </a:p>
+        </p:txBody>
+      </p:sp>
+      <p:sp>
+        <p:nvSpPr>
+          <p:cNvPr id="17" name="TextBox 16"/>
+          <p:cNvSpPr txBox="1"/>
+          <p:nvPr/>
+        </p:nvSpPr>
+        <p:spPr>
+          <a:xfrm>
+            <a:off x="1097280" y="3429000"/>
+            <a:ext cx="4572000" cy="777240"/>
+          </a:xfrm>
+          <a:prstGeom prst="rect">
+            <a:avLst/>
+          </a:prstGeom>
+          <a:noFill/>
+        </p:spPr>
+        <p:txBody>
+          <a:bodyPr wrap="square">
+            <a:spAutoFit/>
+          </a:bodyPr>
+          <a:lstStyle/>
+          <a:p>
+            <a:pPr algn="l">
+              <a:defRPr sz="1100" b="0">
+                <a:solidFill>
+                  <a:srgbClr val="1A1A2E"/>
+                </a:solidFill>
+                <a:latin typeface="Calibri"/>
+              </a:defRPr>
+            </a:pPr>
+            <a:r>
+              <a:t>55+ pytest tests: data integrity (8), forecasting (11), scheduling (13), bonus features (26). Module + integration coverage.</a:t>
+            </a:r>
+          </a:p>
+        </p:txBody>
+      </p:sp>
+      <p:sp>
+        <p:nvSpPr>
+          <p:cNvPr id="18" name="Rounded Rectangle 17"/>
           <p:cNvSpPr/>
           <p:nvPr/>
         </p:nvSpPr>
         <p:spPr>
           <a:xfrm>
-            <a:off x="3749039" y="6035040"/>
-            <a:ext cx="1463040" cy="365760"/>
+            <a:off x="6309359" y="3017520"/>
+            <a:ext cx="5394960" cy="1280160"/>
           </a:xfrm>
           <a:prstGeom prst="roundRect">
             <a:avLst>
-              <a:gd name="adj" fmla="val 10000"/>
+              <a:gd name="adj" fmla="val 3000"/>
             </a:avLst>
           </a:prstGeom>
           <a:solidFill>
-            <a:srgbClr val="00C3F7"/>
+            <a:srgbClr val="F5F5FA"/>
           </a:solidFill>
           <a:ln>
             <a:noFill/>
@@ -4916,14 +5228,14 @@
       </p:sp>
       <p:sp>
         <p:nvSpPr>
-          <p:cNvPr id="13" name="TextBox 12"/>
-          <p:cNvSpPr txBox="1"/>
-          <p:nvPr/>
-        </p:nvSpPr>
-        <p:spPr>
-          <a:xfrm>
-            <a:off x="3749039" y="6053328"/>
-            <a:ext cx="1463040" cy="320040"/>
+          <p:cNvPr id="19" name="TextBox 18"/>
+          <p:cNvSpPr txBox="1"/>
+          <p:nvPr/>
+        </p:nvSpPr>
+        <p:spPr>
+          <a:xfrm>
+            <a:off x="6492239" y="3108960"/>
+            <a:ext cx="457200" cy="365760"/>
           </a:xfrm>
           <a:prstGeom prst="rect">
             <a:avLst/>
@@ -4937,37 +5249,109 @@
           <a:lstStyle/>
           <a:p>
             <a:pPr algn="ctr">
-              <a:defRPr sz="900" b="1">
-                <a:solidFill>
-                  <a:srgbClr val="FFFFFF"/>
-                </a:solidFill>
-                <a:latin typeface="Calibri"/>
-              </a:defRPr>
-            </a:pPr>
-            <a:r>
-              <a:t>Download CSV export</a:t>
-            </a:r>
-          </a:p>
-        </p:txBody>
-      </p:sp>
-      <p:sp>
-        <p:nvSpPr>
-          <p:cNvPr id="14" name="Rounded Rectangle 13"/>
+              <a:defRPr sz="2000" b="0">
+                <a:solidFill>
+                  <a:srgbClr val="1A1A2E"/>
+                </a:solidFill>
+                <a:latin typeface="Calibri"/>
+              </a:defRPr>
+            </a:pPr>
+            <a:r>
+              <a:t>🚀</a:t>
+            </a:r>
+          </a:p>
+        </p:txBody>
+      </p:sp>
+      <p:sp>
+        <p:nvSpPr>
+          <p:cNvPr id="20" name="TextBox 19"/>
+          <p:cNvSpPr txBox="1"/>
+          <p:nvPr/>
+        </p:nvSpPr>
+        <p:spPr>
+          <a:xfrm>
+            <a:off x="6857999" y="3108960"/>
+            <a:ext cx="4572000" cy="320040"/>
+          </a:xfrm>
+          <a:prstGeom prst="rect">
+            <a:avLst/>
+          </a:prstGeom>
+          <a:noFill/>
+        </p:spPr>
+        <p:txBody>
+          <a:bodyPr wrap="square">
+            <a:spAutoFit/>
+          </a:bodyPr>
+          <a:lstStyle/>
+          <a:p>
+            <a:pPr algn="l">
+              <a:defRPr sz="1500" b="1">
+                <a:solidFill>
+                  <a:srgbClr val="1A1A2E"/>
+                </a:solidFill>
+                <a:latin typeface="Calibri"/>
+              </a:defRPr>
+            </a:pPr>
+            <a:r>
+              <a:t>CI/CD Ready</a:t>
+            </a:r>
+          </a:p>
+        </p:txBody>
+      </p:sp>
+      <p:sp>
+        <p:nvSpPr>
+          <p:cNvPr id="21" name="TextBox 20"/>
+          <p:cNvSpPr txBox="1"/>
+          <p:nvPr/>
+        </p:nvSpPr>
+        <p:spPr>
+          <a:xfrm>
+            <a:off x="6857999" y="3429000"/>
+            <a:ext cx="4572000" cy="777240"/>
+          </a:xfrm>
+          <a:prstGeom prst="rect">
+            <a:avLst/>
+          </a:prstGeom>
+          <a:noFill/>
+        </p:spPr>
+        <p:txBody>
+          <a:bodyPr wrap="square">
+            <a:spAutoFit/>
+          </a:bodyPr>
+          <a:lstStyle/>
+          <a:p>
+            <a:pPr algn="l">
+              <a:defRPr sz="1100" b="0">
+                <a:solidFill>
+                  <a:srgbClr val="1A1A2E"/>
+                </a:solidFill>
+                <a:latin typeface="Calibri"/>
+              </a:defRPr>
+            </a:pPr>
+            <a:r>
+              <a:t>pyproject.toml with dependencies. Conventional commits (13 total). Tests run in &lt;5s (unit) + ~71s (integration pipeline). Git-clean repo.</a:t>
+            </a:r>
+          </a:p>
+        </p:txBody>
+      </p:sp>
+      <p:sp>
+        <p:nvSpPr>
+          <p:cNvPr id="22" name="Rounded Rectangle 21"/>
           <p:cNvSpPr/>
           <p:nvPr/>
         </p:nvSpPr>
         <p:spPr>
           <a:xfrm>
-            <a:off x="5394960" y="6035040"/>
-            <a:ext cx="1463040" cy="365760"/>
+            <a:off x="548640" y="4572000"/>
+            <a:ext cx="5394960" cy="1280160"/>
           </a:xfrm>
           <a:prstGeom prst="roundRect">
             <a:avLst>
-              <a:gd name="adj" fmla="val 10000"/>
+              <a:gd name="adj" fmla="val 3000"/>
             </a:avLst>
           </a:prstGeom>
           <a:solidFill>
-            <a:srgbClr val="00C3F7"/>
+            <a:srgbClr val="F5F5FA"/>
           </a:solidFill>
           <a:ln>
             <a:noFill/>
@@ -4998,14 +5382,14 @@
       </p:sp>
       <p:sp>
         <p:nvSpPr>
-          <p:cNvPr id="15" name="TextBox 14"/>
-          <p:cNvSpPr txBox="1"/>
-          <p:nvPr/>
-        </p:nvSpPr>
-        <p:spPr>
-          <a:xfrm>
-            <a:off x="5394960" y="6053328"/>
-            <a:ext cx="1463040" cy="320040"/>
+          <p:cNvPr id="23" name="TextBox 22"/>
+          <p:cNvSpPr txBox="1"/>
+          <p:nvPr/>
+        </p:nvSpPr>
+        <p:spPr>
+          <a:xfrm>
+            <a:off x="731520" y="4663440"/>
+            <a:ext cx="457200" cy="365760"/>
           </a:xfrm>
           <a:prstGeom prst="rect">
             <a:avLst/>
@@ -5019,37 +5403,109 @@
           <a:lstStyle/>
           <a:p>
             <a:pPr algn="ctr">
-              <a:defRPr sz="900" b="1">
-                <a:solidFill>
-                  <a:srgbClr val="FFFFFF"/>
-                </a:solidFill>
-                <a:latin typeface="Calibri"/>
-              </a:defRPr>
-            </a:pPr>
-            <a:r>
-              <a:t>Real-time constraint validation</a:t>
-            </a:r>
-          </a:p>
-        </p:txBody>
-      </p:sp>
-      <p:sp>
-        <p:nvSpPr>
-          <p:cNvPr id="16" name="Rounded Rectangle 15"/>
+              <a:defRPr sz="2000" b="0">
+                <a:solidFill>
+                  <a:srgbClr val="1A1A2E"/>
+                </a:solidFill>
+                <a:latin typeface="Calibri"/>
+              </a:defRPr>
+            </a:pPr>
+            <a:r>
+              <a:t>🛡️</a:t>
+            </a:r>
+          </a:p>
+        </p:txBody>
+      </p:sp>
+      <p:sp>
+        <p:nvSpPr>
+          <p:cNvPr id="24" name="TextBox 23"/>
+          <p:cNvSpPr txBox="1"/>
+          <p:nvPr/>
+        </p:nvSpPr>
+        <p:spPr>
+          <a:xfrm>
+            <a:off x="1097280" y="4663440"/>
+            <a:ext cx="4572000" cy="320040"/>
+          </a:xfrm>
+          <a:prstGeom prst="rect">
+            <a:avLst/>
+          </a:prstGeom>
+          <a:noFill/>
+        </p:spPr>
+        <p:txBody>
+          <a:bodyPr wrap="square">
+            <a:spAutoFit/>
+          </a:bodyPr>
+          <a:lstStyle/>
+          <a:p>
+            <a:pPr algn="l">
+              <a:defRPr sz="1500" b="1">
+                <a:solidFill>
+                  <a:srgbClr val="1A1A2E"/>
+                </a:solidFill>
+                <a:latin typeface="Calibri"/>
+              </a:defRPr>
+            </a:pPr>
+            <a:r>
+              <a:t>Defensive Engineering</a:t>
+            </a:r>
+          </a:p>
+        </p:txBody>
+      </p:sp>
+      <p:sp>
+        <p:nvSpPr>
+          <p:cNvPr id="25" name="TextBox 24"/>
+          <p:cNvSpPr txBox="1"/>
+          <p:nvPr/>
+        </p:nvSpPr>
+        <p:spPr>
+          <a:xfrm>
+            <a:off x="1097280" y="4983480"/>
+            <a:ext cx="4572000" cy="777240"/>
+          </a:xfrm>
+          <a:prstGeom prst="rect">
+            <a:avLst/>
+          </a:prstGeom>
+          <a:noFill/>
+        </p:spPr>
+        <p:txBody>
+          <a:bodyPr wrap="square">
+            <a:spAutoFit/>
+          </a:bodyPr>
+          <a:lstStyle/>
+          <a:p>
+            <a:pPr algn="l">
+              <a:defRPr sz="1100" b="0">
+                <a:solidFill>
+                  <a:srgbClr val="1A1A2E"/>
+                </a:solidFill>
+                <a:latin typeface="Calibri"/>
+              </a:defRPr>
+            </a:pPr>
+            <a:r>
+              <a:t>Historical floors prevent model extrapolation. Feasibility caps for scarce agents. Windows encoding fix for cross-platform. Graceful degradation on solver timeout.</a:t>
+            </a:r>
+          </a:p>
+        </p:txBody>
+      </p:sp>
+      <p:sp>
+        <p:nvSpPr>
+          <p:cNvPr id="26" name="Rounded Rectangle 25"/>
           <p:cNvSpPr/>
           <p:nvPr/>
         </p:nvSpPr>
         <p:spPr>
           <a:xfrm>
-            <a:off x="7040880" y="6035040"/>
-            <a:ext cx="1463040" cy="365760"/>
+            <a:off x="6309359" y="4572000"/>
+            <a:ext cx="5394960" cy="1280160"/>
           </a:xfrm>
           <a:prstGeom prst="roundRect">
             <a:avLst>
-              <a:gd name="adj" fmla="val 10000"/>
+              <a:gd name="adj" fmla="val 3000"/>
             </a:avLst>
           </a:prstGeom>
           <a:solidFill>
-            <a:srgbClr val="00C3F7"/>
+            <a:srgbClr val="F5F5FA"/>
           </a:solidFill>
           <a:ln>
             <a:noFill/>
@@ -5080,14 +5536,14 @@
       </p:sp>
       <p:sp>
         <p:nvSpPr>
-          <p:cNvPr id="17" name="TextBox 16"/>
-          <p:cNvSpPr txBox="1"/>
-          <p:nvPr/>
-        </p:nvSpPr>
-        <p:spPr>
-          <a:xfrm>
-            <a:off x="7040880" y="6053328"/>
-            <a:ext cx="1463040" cy="320040"/>
+          <p:cNvPr id="27" name="TextBox 26"/>
+          <p:cNvSpPr txBox="1"/>
+          <p:nvPr/>
+        </p:nvSpPr>
+        <p:spPr>
+          <a:xfrm>
+            <a:off x="6492239" y="4663440"/>
+            <a:ext cx="457200" cy="365760"/>
           </a:xfrm>
           <a:prstGeom prst="rect">
             <a:avLst/>
@@ -5101,179 +5557,87 @@
           <a:lstStyle/>
           <a:p>
             <a:pPr algn="ctr">
-              <a:defRPr sz="900" b="1">
-                <a:solidFill>
-                  <a:srgbClr val="FFFFFF"/>
-                </a:solidFill>
-                <a:latin typeface="Calibri"/>
-              </a:defRPr>
-            </a:pPr>
-            <a:r>
-              <a:t>Preference heatmap</a:t>
-            </a:r>
-          </a:p>
-        </p:txBody>
-      </p:sp>
-      <p:sp>
-        <p:nvSpPr>
-          <p:cNvPr id="18" name="Rounded Rectangle 17"/>
-          <p:cNvSpPr/>
-          <p:nvPr/>
-        </p:nvSpPr>
-        <p:spPr>
-          <a:xfrm>
-            <a:off x="8686800" y="6035040"/>
-            <a:ext cx="1463040" cy="365760"/>
-          </a:xfrm>
-          <a:prstGeom prst="roundRect">
-            <a:avLst>
-              <a:gd name="adj" fmla="val 10000"/>
-            </a:avLst>
-          </a:prstGeom>
-          <a:solidFill>
-            <a:srgbClr val="00C3F7"/>
-          </a:solidFill>
-          <a:ln>
-            <a:noFill/>
-          </a:ln>
-        </p:spPr>
-        <p:style>
-          <a:lnRef idx="1">
-            <a:schemeClr val="accent1"/>
-          </a:lnRef>
-          <a:fillRef idx="3">
-            <a:schemeClr val="accent1"/>
-          </a:fillRef>
-          <a:effectRef idx="2">
-            <a:schemeClr val="accent1"/>
-          </a:effectRef>
-          <a:fontRef idx="minor">
-            <a:schemeClr val="lt1"/>
-          </a:fontRef>
-        </p:style>
-        <p:txBody>
-          <a:bodyPr rtlCol="0" anchor="ctr"/>
-          <a:lstStyle/>
-          <a:p>
-            <a:pPr algn="ctr"/>
-            <a:endParaRPr/>
-          </a:p>
-        </p:txBody>
-      </p:sp>
-      <p:sp>
-        <p:nvSpPr>
-          <p:cNvPr id="19" name="TextBox 18"/>
-          <p:cNvSpPr txBox="1"/>
-          <p:nvPr/>
-        </p:nvSpPr>
-        <p:spPr>
-          <a:xfrm>
-            <a:off x="8686800" y="6053328"/>
-            <a:ext cx="1463040" cy="320040"/>
-          </a:xfrm>
-          <a:prstGeom prst="rect">
-            <a:avLst/>
-          </a:prstGeom>
-          <a:noFill/>
-        </p:spPr>
-        <p:txBody>
-          <a:bodyPr wrap="square">
-            <a:spAutoFit/>
-          </a:bodyPr>
-          <a:lstStyle/>
-          <a:p>
-            <a:pPr algn="ctr">
-              <a:defRPr sz="900" b="1">
-                <a:solidFill>
-                  <a:srgbClr val="FFFFFF"/>
-                </a:solidFill>
-                <a:latin typeface="Calibri"/>
-              </a:defRPr>
-            </a:pPr>
-            <a:r>
-              <a:t>Fairness grade &amp; Gini</a:t>
-            </a:r>
-          </a:p>
-        </p:txBody>
-      </p:sp>
-      <p:sp>
-        <p:nvSpPr>
-          <p:cNvPr id="20" name="Rounded Rectangle 19"/>
-          <p:cNvSpPr/>
-          <p:nvPr/>
-        </p:nvSpPr>
-        <p:spPr>
-          <a:xfrm>
-            <a:off x="10332720" y="6035040"/>
-            <a:ext cx="1463040" cy="365760"/>
-          </a:xfrm>
-          <a:prstGeom prst="roundRect">
-            <a:avLst>
-              <a:gd name="adj" fmla="val 10000"/>
-            </a:avLst>
-          </a:prstGeom>
-          <a:solidFill>
-            <a:srgbClr val="00C3F7"/>
-          </a:solidFill>
-          <a:ln>
-            <a:noFill/>
-          </a:ln>
-        </p:spPr>
-        <p:style>
-          <a:lnRef idx="1">
-            <a:schemeClr val="accent1"/>
-          </a:lnRef>
-          <a:fillRef idx="3">
-            <a:schemeClr val="accent1"/>
-          </a:fillRef>
-          <a:effectRef idx="2">
-            <a:schemeClr val="accent1"/>
-          </a:effectRef>
-          <a:fontRef idx="minor">
-            <a:schemeClr val="lt1"/>
-          </a:fontRef>
-        </p:style>
-        <p:txBody>
-          <a:bodyPr rtlCol="0" anchor="ctr"/>
-          <a:lstStyle/>
-          <a:p>
-            <a:pPr algn="ctr"/>
-            <a:endParaRPr/>
-          </a:p>
-        </p:txBody>
-      </p:sp>
-      <p:sp>
-        <p:nvSpPr>
-          <p:cNvPr id="21" name="TextBox 20"/>
-          <p:cNvSpPr txBox="1"/>
-          <p:nvPr/>
-        </p:nvSpPr>
-        <p:spPr>
-          <a:xfrm>
-            <a:off x="10332720" y="6053328"/>
-            <a:ext cx="1463040" cy="320040"/>
-          </a:xfrm>
-          <a:prstGeom prst="rect">
-            <a:avLst/>
-          </a:prstGeom>
-          <a:noFill/>
-        </p:spPr>
-        <p:txBody>
-          <a:bodyPr wrap="square">
-            <a:spAutoFit/>
-          </a:bodyPr>
-          <a:lstStyle/>
-          <a:p>
-            <a:pPr algn="ctr">
-              <a:defRPr sz="900" b="1">
-                <a:solidFill>
-                  <a:srgbClr val="FFFFFF"/>
-                </a:solidFill>
-                <a:latin typeface="Calibri"/>
-              </a:defRPr>
-            </a:pPr>
-            <a:r>
-              <a:t>Remediation suggestions</a:t>
+              <a:defRPr sz="2000" b="0">
+                <a:solidFill>
+                  <a:srgbClr val="1A1A2E"/>
+                </a:solidFill>
+                <a:latin typeface="Calibri"/>
+              </a:defRPr>
+            </a:pPr>
+            <a:r>
+              <a:t>📊</a:t>
+            </a:r>
+          </a:p>
+        </p:txBody>
+      </p:sp>
+      <p:sp>
+        <p:nvSpPr>
+          <p:cNvPr id="28" name="TextBox 27"/>
+          <p:cNvSpPr txBox="1"/>
+          <p:nvPr/>
+        </p:nvSpPr>
+        <p:spPr>
+          <a:xfrm>
+            <a:off x="6857999" y="4663440"/>
+            <a:ext cx="4572000" cy="320040"/>
+          </a:xfrm>
+          <a:prstGeom prst="rect">
+            <a:avLst/>
+          </a:prstGeom>
+          <a:noFill/>
+        </p:spPr>
+        <p:txBody>
+          <a:bodyPr wrap="square">
+            <a:spAutoFit/>
+          </a:bodyPr>
+          <a:lstStyle/>
+          <a:p>
+            <a:pPr algn="l">
+              <a:defRPr sz="1500" b="1">
+                <a:solidFill>
+                  <a:srgbClr val="1A1A2E"/>
+                </a:solidFill>
+                <a:latin typeface="Calibri"/>
+              </a:defRPr>
+            </a:pPr>
+            <a:r>
+              <a:t>Interactive Dashboard</a:t>
+            </a:r>
+          </a:p>
+        </p:txBody>
+      </p:sp>
+      <p:sp>
+        <p:nvSpPr>
+          <p:cNvPr id="29" name="TextBox 28"/>
+          <p:cNvSpPr txBox="1"/>
+          <p:nvPr/>
+        </p:nvSpPr>
+        <p:spPr>
+          <a:xfrm>
+            <a:off x="6857999" y="4983480"/>
+            <a:ext cx="4572000" cy="777240"/>
+          </a:xfrm>
+          <a:prstGeom prst="rect">
+            <a:avLst/>
+          </a:prstGeom>
+          <a:noFill/>
+        </p:spPr>
+        <p:txBody>
+          <a:bodyPr wrap="square">
+            <a:spAutoFit/>
+          </a:bodyPr>
+          <a:lstStyle/>
+          <a:p>
+            <a:pPr algn="l">
+              <a:defRPr sz="1100" b="0">
+                <a:solidFill>
+                  <a:srgbClr val="1A1A2E"/>
+                </a:solidFill>
+                <a:latin typeface="Calibri"/>
+              </a:defRPr>
+            </a:pPr>
+            <a:r>
+              <a:t>7-tab Streamlit app: managers adjust parameters, see results, download CSV. Cached pipeline results for responsive interaction. No code changes needed.</a:t>
             </a:r>
           </a:p>
         </p:txBody>
@@ -5283,6 +5647,18 @@
   <p:clrMapOvr>
     <a:masterClrMapping/>
   </p:clrMapOvr>
+  <mc:AlternateContent xmlns:mc="http://schemas.openxmlformats.org/markup-compatibility/2006" xmlns:p14="http://schemas.microsoft.com/office/powerpoint/2010/main">
+    <mc:Choice Requires="p14">
+      <p:transition spd="med" p14:dur="700">
+        <p:fade/>
+      </p:transition>
+    </mc:Choice>
+    <mc:Fallback xmlns="">
+      <p:transition spd="med">
+        <p:fade/>
+      </p:transition>
+    </mc:Fallback>
+  </mc:AlternateContent>
 </p:sld>
 </file>
 
@@ -5386,7 +5762,7 @@
               </a:defRPr>
             </a:pPr>
             <a:r>
-              <a:t>Challenges Solved</a:t>
+              <a:t>Interactive Dashboard</a:t>
             </a:r>
           </a:p>
         </p:txBody>
@@ -5422,7 +5798,7 @@
               </a:defRPr>
             </a:pPr>
             <a:r>
-              <a:t>Real engineering problems encountered and resolved</a:t>
+              <a:t>7 tabs: Forecast · Schedule · Summary · Constraints · Agents · Fairness · Preferences</a:t>
             </a:r>
           </a:p>
         </p:txBody>
@@ -5472,12 +5848,12 @@
         </p:nvSpPr>
         <p:spPr>
           <a:xfrm>
-            <a:off x="548640" y="1463040"/>
-            <a:ext cx="5394960" cy="2103120"/>
+            <a:off x="731520" y="1371600"/>
+            <a:ext cx="10698480" cy="4572000"/>
           </a:xfrm>
           <a:prstGeom prst="roundRect">
             <a:avLst>
-              <a:gd name="adj" fmla="val 3000"/>
+              <a:gd name="adj" fmla="val 2000"/>
             </a:avLst>
           </a:prstGeom>
           <a:solidFill>
@@ -5518,124 +5894,56 @@
         </p:nvSpPr>
         <p:spPr>
           <a:xfrm>
-            <a:off x="731520" y="1554480"/>
-            <a:ext cx="5029200" cy="320040"/>
-          </a:xfrm>
-          <a:prstGeom prst="rect">
-            <a:avLst/>
-          </a:prstGeom>
-          <a:noFill/>
-        </p:spPr>
-        <p:txBody>
-          <a:bodyPr wrap="square">
-            <a:spAutoFit/>
-          </a:bodyPr>
-          <a:lstStyle/>
-          <a:p>
-            <a:pPr algn="l">
-              <a:defRPr sz="1500" b="1">
-                <a:solidFill>
-                  <a:srgbClr val="1A1A2E"/>
-                </a:solidFill>
-                <a:latin typeface="Calibri"/>
-              </a:defRPr>
-            </a:pPr>
-            <a:r>
-              <a:t>Unrealistic Staffing Predictions</a:t>
-            </a:r>
-          </a:p>
-        </p:txBody>
-      </p:sp>
-      <p:sp>
-        <p:nvSpPr>
-          <p:cNvPr id="8" name="TextBox 7"/>
-          <p:cNvSpPr txBox="1"/>
-          <p:nvPr/>
-        </p:nvSpPr>
-        <p:spPr>
-          <a:xfrm>
-            <a:off x="731520" y="1920240"/>
-            <a:ext cx="5029200" cy="502920"/>
-          </a:xfrm>
-          <a:prstGeom prst="rect">
-            <a:avLst/>
-          </a:prstGeom>
-          <a:noFill/>
-        </p:spPr>
-        <p:txBody>
-          <a:bodyPr wrap="square">
-            <a:spAutoFit/>
-          </a:bodyPr>
-          <a:lstStyle/>
-          <a:p>
-            <a:pPr algn="l">
-              <a:defRPr sz="1100" b="0">
-                <a:solidFill>
-                  <a:srgbClr val="FF6B6B"/>
-                </a:solidFill>
-                <a:latin typeface="Calibri"/>
-              </a:defRPr>
-            </a:pPr>
-            <a:r>
-              <a:t>Problem: Model extrapolated: predicted 4-5 agents when historical data showed 14+</a:t>
-            </a:r>
-          </a:p>
-        </p:txBody>
-      </p:sp>
-      <p:sp>
-        <p:nvSpPr>
-          <p:cNvPr id="9" name="TextBox 8"/>
-          <p:cNvSpPr txBox="1"/>
-          <p:nvPr/>
-        </p:nvSpPr>
-        <p:spPr>
-          <a:xfrm>
-            <a:off x="731520" y="2514600"/>
-            <a:ext cx="5029200" cy="868680"/>
-          </a:xfrm>
-          <a:prstGeom prst="rect">
-            <a:avLst/>
-          </a:prstGeom>
-          <a:noFill/>
-        </p:spPr>
-        <p:txBody>
-          <a:bodyPr wrap="square">
-            <a:spAutoFit/>
-          </a:bodyPr>
-          <a:lstStyle/>
-          <a:p>
-            <a:pPr algn="l">
-              <a:defRPr sz="1100" b="0">
-                <a:solidFill>
-                  <a:srgbClr val="1A1A2E"/>
-                </a:solidFill>
-                <a:latin typeface="Calibri"/>
-              </a:defRPr>
-            </a:pPr>
-            <a:r>
-              <a:t>Solution: Added historical staffing floors (10th percentile of quality-meeting shifts) as lower bounds. Prevents model from predicting below observed reality.</a:t>
-            </a:r>
-          </a:p>
-        </p:txBody>
-      </p:sp>
-      <p:sp>
-        <p:nvSpPr>
-          <p:cNvPr id="10" name="Rounded Rectangle 9"/>
+            <a:off x="731520" y="3200400"/>
+            <a:ext cx="10698480" cy="731520"/>
+          </a:xfrm>
+          <a:prstGeom prst="rect">
+            <a:avLst/>
+          </a:prstGeom>
+          <a:noFill/>
+        </p:spPr>
+        <p:txBody>
+          <a:bodyPr wrap="square">
+            <a:spAutoFit/>
+          </a:bodyPr>
+          <a:lstStyle/>
+          <a:p>
+            <a:pPr algn="ctr">
+              <a:defRPr sz="2000" b="0">
+                <a:solidFill>
+                  <a:srgbClr val="8E8EA3"/>
+                </a:solidFill>
+                <a:latin typeface="Calibri"/>
+              </a:defRPr>
+            </a:pPr>
+            <a:r>
+              <a:t>[Insert Dashboard Screenshots Here]</a:t>
+            </a:r>
+            <a:br/>
+            <a:r>
+              <a:t>Run:  streamlit run app.py</a:t>
+            </a:r>
+          </a:p>
+        </p:txBody>
+      </p:sp>
+      <p:sp>
+        <p:nvSpPr>
+          <p:cNvPr id="8" name="Rounded Rectangle 7"/>
           <p:cNvSpPr/>
           <p:nvPr/>
         </p:nvSpPr>
         <p:spPr>
           <a:xfrm>
-            <a:off x="6309359" y="1463040"/>
-            <a:ext cx="5394960" cy="2103120"/>
+            <a:off x="457200" y="6035040"/>
+            <a:ext cx="1463040" cy="365760"/>
           </a:xfrm>
           <a:prstGeom prst="roundRect">
             <a:avLst>
-              <a:gd name="adj" fmla="val 3000"/>
+              <a:gd name="adj" fmla="val 10000"/>
             </a:avLst>
           </a:prstGeom>
           <a:solidFill>
-            <a:srgbClr val="F5F5FA"/>
+            <a:srgbClr val="00C3F7"/>
           </a:solidFill>
           <a:ln>
             <a:noFill/>
@@ -5666,130 +5974,58 @@
       </p:sp>
       <p:sp>
         <p:nvSpPr>
-          <p:cNvPr id="11" name="TextBox 10"/>
-          <p:cNvSpPr txBox="1"/>
-          <p:nvPr/>
-        </p:nvSpPr>
-        <p:spPr>
-          <a:xfrm>
-            <a:off x="6492239" y="1554480"/>
-            <a:ext cx="5029200" cy="320040"/>
-          </a:xfrm>
-          <a:prstGeom prst="rect">
-            <a:avLst/>
-          </a:prstGeom>
-          <a:noFill/>
-        </p:spPr>
-        <p:txBody>
-          <a:bodyPr wrap="square">
-            <a:spAutoFit/>
-          </a:bodyPr>
-          <a:lstStyle/>
-          <a:p>
-            <a:pPr algn="l">
-              <a:defRPr sz="1500" b="1">
-                <a:solidFill>
-                  <a:srgbClr val="1A1A2E"/>
-                </a:solidFill>
-                <a:latin typeface="Calibri"/>
-              </a:defRPr>
-            </a:pPr>
-            <a:r>
-              <a:t>English Agent Scarcity</a:t>
-            </a:r>
-          </a:p>
-        </p:txBody>
-      </p:sp>
-      <p:sp>
-        <p:nvSpPr>
-          <p:cNvPr id="12" name="TextBox 11"/>
-          <p:cNvSpPr txBox="1"/>
-          <p:nvPr/>
-        </p:nvSpPr>
-        <p:spPr>
-          <a:xfrm>
-            <a:off x="6492239" y="1920240"/>
-            <a:ext cx="5029200" cy="502920"/>
-          </a:xfrm>
-          <a:prstGeom prst="rect">
-            <a:avLst/>
-          </a:prstGeom>
-          <a:noFill/>
-        </p:spPr>
-        <p:txBody>
-          <a:bodyPr wrap="square">
-            <a:spAutoFit/>
-          </a:bodyPr>
-          <a:lstStyle/>
-          <a:p>
-            <a:pPr algn="l">
-              <a:defRPr sz="1100" b="0">
-                <a:solidFill>
-                  <a:srgbClr val="FF6B6B"/>
-                </a:solidFill>
-                <a:latin typeface="Calibri"/>
-              </a:defRPr>
-            </a:pPr>
-            <a:r>
-              <a:t>Problem: 8 English agents total, optimizer demanded 8/day — impossible with 6 leave days</a:t>
-            </a:r>
-          </a:p>
-        </p:txBody>
-      </p:sp>
-      <p:sp>
-        <p:nvSpPr>
-          <p:cNvPr id="13" name="TextBox 12"/>
-          <p:cNvSpPr txBox="1"/>
-          <p:nvPr/>
-        </p:nvSpPr>
-        <p:spPr>
-          <a:xfrm>
-            <a:off x="6492239" y="2514600"/>
-            <a:ext cx="5029200" cy="868680"/>
-          </a:xfrm>
-          <a:prstGeom prst="rect">
-            <a:avLst/>
-          </a:prstGeom>
-          <a:noFill/>
-        </p:spPr>
-        <p:txBody>
-          <a:bodyPr wrap="square">
-            <a:spAutoFit/>
-          </a:bodyPr>
-          <a:lstStyle/>
-          <a:p>
-            <a:pPr algn="l">
-              <a:defRPr sz="1100" b="0">
-                <a:solidFill>
-                  <a:srgbClr val="1A1A2E"/>
-                </a:solidFill>
-                <a:latin typeface="Calibri"/>
-              </a:defRPr>
-            </a:pPr>
-            <a:r>
-              <a:t>Solution: Added feasibility caps: available_english = max(1, int(8 × 0.8) - 1) = 5. Prevents infeasible staffing requirements that would block the scheduler.</a:t>
-            </a:r>
-          </a:p>
-        </p:txBody>
-      </p:sp>
-      <p:sp>
-        <p:nvSpPr>
-          <p:cNvPr id="14" name="Rounded Rectangle 13"/>
+          <p:cNvPr id="9" name="TextBox 8"/>
+          <p:cNvSpPr txBox="1"/>
+          <p:nvPr/>
+        </p:nvSpPr>
+        <p:spPr>
+          <a:xfrm>
+            <a:off x="457200" y="6053328"/>
+            <a:ext cx="1463040" cy="320040"/>
+          </a:xfrm>
+          <a:prstGeom prst="rect">
+            <a:avLst/>
+          </a:prstGeom>
+          <a:noFill/>
+        </p:spPr>
+        <p:txBody>
+          <a:bodyPr wrap="square">
+            <a:spAutoFit/>
+          </a:bodyPr>
+          <a:lstStyle/>
+          <a:p>
+            <a:pPr algn="ctr">
+              <a:defRPr sz="900" b="1">
+                <a:solidFill>
+                  <a:srgbClr val="FFFFFF"/>
+                </a:solidFill>
+                <a:latin typeface="Calibri"/>
+              </a:defRPr>
+            </a:pPr>
+            <a:r>
+              <a:t>Adjustable CSAT/wait targets</a:t>
+            </a:r>
+          </a:p>
+        </p:txBody>
+      </p:sp>
+      <p:sp>
+        <p:nvSpPr>
+          <p:cNvPr id="10" name="Rounded Rectangle 9"/>
           <p:cNvSpPr/>
           <p:nvPr/>
         </p:nvSpPr>
         <p:spPr>
           <a:xfrm>
-            <a:off x="548640" y="3931920"/>
-            <a:ext cx="5394960" cy="2103120"/>
+            <a:off x="2103120" y="6035040"/>
+            <a:ext cx="1463040" cy="365760"/>
           </a:xfrm>
           <a:prstGeom prst="roundRect">
             <a:avLst>
-              <a:gd name="adj" fmla="val 3000"/>
+              <a:gd name="adj" fmla="val 10000"/>
             </a:avLst>
           </a:prstGeom>
           <a:solidFill>
-            <a:srgbClr val="F5F5FA"/>
+            <a:srgbClr val="00C3F7"/>
           </a:solidFill>
           <a:ln>
             <a:noFill/>
@@ -5820,130 +6056,58 @@
       </p:sp>
       <p:sp>
         <p:nvSpPr>
-          <p:cNvPr id="15" name="TextBox 14"/>
-          <p:cNvSpPr txBox="1"/>
-          <p:nvPr/>
-        </p:nvSpPr>
-        <p:spPr>
-          <a:xfrm>
-            <a:off x="731520" y="4023360"/>
-            <a:ext cx="5029200" cy="320040"/>
-          </a:xfrm>
-          <a:prstGeom prst="rect">
-            <a:avLst/>
-          </a:prstGeom>
-          <a:noFill/>
-        </p:spPr>
-        <p:txBody>
-          <a:bodyPr wrap="square">
-            <a:spAutoFit/>
-          </a:bodyPr>
-          <a:lstStyle/>
-          <a:p>
-            <a:pPr algn="l">
-              <a:defRPr sz="1500" b="1">
-                <a:solidFill>
-                  <a:srgbClr val="1A1A2E"/>
-                </a:solidFill>
-                <a:latin typeface="Calibri"/>
-              </a:defRPr>
-            </a:pPr>
-            <a:r>
-              <a:t>Preference vs. Fairness Tension</a:t>
-            </a:r>
-          </a:p>
-        </p:txBody>
-      </p:sp>
-      <p:sp>
-        <p:nvSpPr>
-          <p:cNvPr id="16" name="TextBox 15"/>
-          <p:cNvSpPr txBox="1"/>
-          <p:nvPr/>
-        </p:nvSpPr>
-        <p:spPr>
-          <a:xfrm>
-            <a:off x="731520" y="4389120"/>
-            <a:ext cx="5029200" cy="502920"/>
-          </a:xfrm>
-          <a:prstGeom prst="rect">
-            <a:avLst/>
-          </a:prstGeom>
-          <a:noFill/>
-        </p:spPr>
-        <p:txBody>
-          <a:bodyPr wrap="square">
-            <a:spAutoFit/>
-          </a:bodyPr>
-          <a:lstStyle/>
-          <a:p>
-            <a:pPr algn="l">
-              <a:defRPr sz="1100" b="0">
-                <a:solidFill>
-                  <a:srgbClr val="F39C12"/>
-                </a:solidFill>
-                <a:latin typeface="Calibri"/>
-              </a:defRPr>
-            </a:pPr>
-            <a:r>
-              <a:t>Problem: Adding preference soft constraint → solver trade-offs night shift equity</a:t>
-            </a:r>
-          </a:p>
-        </p:txBody>
-      </p:sp>
-      <p:sp>
-        <p:nvSpPr>
-          <p:cNvPr id="17" name="TextBox 16"/>
-          <p:cNvSpPr txBox="1"/>
-          <p:nvPr/>
-        </p:nvSpPr>
-        <p:spPr>
-          <a:xfrm>
-            <a:off x="731520" y="4983480"/>
-            <a:ext cx="5029200" cy="868680"/>
-          </a:xfrm>
-          <a:prstGeom prst="rect">
-            <a:avLst/>
-          </a:prstGeom>
-          <a:noFill/>
-        </p:spPr>
-        <p:txBody>
-          <a:bodyPr wrap="square">
-            <a:spAutoFit/>
-          </a:bodyPr>
-          <a:lstStyle/>
-          <a:p>
-            <a:pPr algn="l">
-              <a:defRPr sz="1100" b="0">
-                <a:solidFill>
-                  <a:srgbClr val="1A1A2E"/>
-                </a:solidFill>
-                <a:latin typeface="Calibri"/>
-              </a:defRPr>
-            </a:pPr>
-            <a:r>
-              <a:t>Solution: Sparsity-adjusted Gini scoring (only ~80 night slots for 50 agents), tunable weight balance. Accept mathematical limits of sparse distributions.</a:t>
-            </a:r>
-          </a:p>
-        </p:txBody>
-      </p:sp>
-      <p:sp>
-        <p:nvSpPr>
-          <p:cNvPr id="18" name="Rounded Rectangle 17"/>
+          <p:cNvPr id="11" name="TextBox 10"/>
+          <p:cNvSpPr txBox="1"/>
+          <p:nvPr/>
+        </p:nvSpPr>
+        <p:spPr>
+          <a:xfrm>
+            <a:off x="2103120" y="6053328"/>
+            <a:ext cx="1463040" cy="320040"/>
+          </a:xfrm>
+          <a:prstGeom prst="rect">
+            <a:avLst/>
+          </a:prstGeom>
+          <a:noFill/>
+        </p:spPr>
+        <p:txBody>
+          <a:bodyPr wrap="square">
+            <a:spAutoFit/>
+          </a:bodyPr>
+          <a:lstStyle/>
+          <a:p>
+            <a:pPr algn="ctr">
+              <a:defRPr sz="900" b="1">
+                <a:solidFill>
+                  <a:srgbClr val="FFFFFF"/>
+                </a:solidFill>
+                <a:latin typeface="Calibri"/>
+              </a:defRPr>
+            </a:pPr>
+            <a:r>
+              <a:t>Calendar schedule view</a:t>
+            </a:r>
+          </a:p>
+        </p:txBody>
+      </p:sp>
+      <p:sp>
+        <p:nvSpPr>
+          <p:cNvPr id="12" name="Rounded Rectangle 11"/>
           <p:cNvSpPr/>
           <p:nvPr/>
         </p:nvSpPr>
         <p:spPr>
           <a:xfrm>
-            <a:off x="6309359" y="3931920"/>
-            <a:ext cx="5394960" cy="2103120"/>
+            <a:off x="3749039" y="6035040"/>
+            <a:ext cx="1463040" cy="365760"/>
           </a:xfrm>
           <a:prstGeom prst="roundRect">
             <a:avLst>
-              <a:gd name="adj" fmla="val 3000"/>
+              <a:gd name="adj" fmla="val 10000"/>
             </a:avLst>
           </a:prstGeom>
           <a:solidFill>
-            <a:srgbClr val="F5F5FA"/>
+            <a:srgbClr val="00C3F7"/>
           </a:solidFill>
           <a:ln>
             <a:noFill/>
@@ -5974,73 +6138,329 @@
       </p:sp>
       <p:sp>
         <p:nvSpPr>
+          <p:cNvPr id="13" name="TextBox 12"/>
+          <p:cNvSpPr txBox="1"/>
+          <p:nvPr/>
+        </p:nvSpPr>
+        <p:spPr>
+          <a:xfrm>
+            <a:off x="3749039" y="6053328"/>
+            <a:ext cx="1463040" cy="320040"/>
+          </a:xfrm>
+          <a:prstGeom prst="rect">
+            <a:avLst/>
+          </a:prstGeom>
+          <a:noFill/>
+        </p:spPr>
+        <p:txBody>
+          <a:bodyPr wrap="square">
+            <a:spAutoFit/>
+          </a:bodyPr>
+          <a:lstStyle/>
+          <a:p>
+            <a:pPr algn="ctr">
+              <a:defRPr sz="900" b="1">
+                <a:solidFill>
+                  <a:srgbClr val="FFFFFF"/>
+                </a:solidFill>
+                <a:latin typeface="Calibri"/>
+              </a:defRPr>
+            </a:pPr>
+            <a:r>
+              <a:t>Download CSV export</a:t>
+            </a:r>
+          </a:p>
+        </p:txBody>
+      </p:sp>
+      <p:sp>
+        <p:nvSpPr>
+          <p:cNvPr id="14" name="Rounded Rectangle 13"/>
+          <p:cNvSpPr/>
+          <p:nvPr/>
+        </p:nvSpPr>
+        <p:spPr>
+          <a:xfrm>
+            <a:off x="5394960" y="6035040"/>
+            <a:ext cx="1463040" cy="365760"/>
+          </a:xfrm>
+          <a:prstGeom prst="roundRect">
+            <a:avLst>
+              <a:gd name="adj" fmla="val 10000"/>
+            </a:avLst>
+          </a:prstGeom>
+          <a:solidFill>
+            <a:srgbClr val="00C3F7"/>
+          </a:solidFill>
+          <a:ln>
+            <a:noFill/>
+          </a:ln>
+        </p:spPr>
+        <p:style>
+          <a:lnRef idx="1">
+            <a:schemeClr val="accent1"/>
+          </a:lnRef>
+          <a:fillRef idx="3">
+            <a:schemeClr val="accent1"/>
+          </a:fillRef>
+          <a:effectRef idx="2">
+            <a:schemeClr val="accent1"/>
+          </a:effectRef>
+          <a:fontRef idx="minor">
+            <a:schemeClr val="lt1"/>
+          </a:fontRef>
+        </p:style>
+        <p:txBody>
+          <a:bodyPr rtlCol="0" anchor="ctr"/>
+          <a:lstStyle/>
+          <a:p>
+            <a:pPr algn="ctr"/>
+            <a:endParaRPr/>
+          </a:p>
+        </p:txBody>
+      </p:sp>
+      <p:sp>
+        <p:nvSpPr>
+          <p:cNvPr id="15" name="TextBox 14"/>
+          <p:cNvSpPr txBox="1"/>
+          <p:nvPr/>
+        </p:nvSpPr>
+        <p:spPr>
+          <a:xfrm>
+            <a:off x="5394960" y="6053328"/>
+            <a:ext cx="1463040" cy="320040"/>
+          </a:xfrm>
+          <a:prstGeom prst="rect">
+            <a:avLst/>
+          </a:prstGeom>
+          <a:noFill/>
+        </p:spPr>
+        <p:txBody>
+          <a:bodyPr wrap="square">
+            <a:spAutoFit/>
+          </a:bodyPr>
+          <a:lstStyle/>
+          <a:p>
+            <a:pPr algn="ctr">
+              <a:defRPr sz="900" b="1">
+                <a:solidFill>
+                  <a:srgbClr val="FFFFFF"/>
+                </a:solidFill>
+                <a:latin typeface="Calibri"/>
+              </a:defRPr>
+            </a:pPr>
+            <a:r>
+              <a:t>Real-time constraint validation</a:t>
+            </a:r>
+          </a:p>
+        </p:txBody>
+      </p:sp>
+      <p:sp>
+        <p:nvSpPr>
+          <p:cNvPr id="16" name="Rounded Rectangle 15"/>
+          <p:cNvSpPr/>
+          <p:nvPr/>
+        </p:nvSpPr>
+        <p:spPr>
+          <a:xfrm>
+            <a:off x="7040880" y="6035040"/>
+            <a:ext cx="1463040" cy="365760"/>
+          </a:xfrm>
+          <a:prstGeom prst="roundRect">
+            <a:avLst>
+              <a:gd name="adj" fmla="val 10000"/>
+            </a:avLst>
+          </a:prstGeom>
+          <a:solidFill>
+            <a:srgbClr val="00C3F7"/>
+          </a:solidFill>
+          <a:ln>
+            <a:noFill/>
+          </a:ln>
+        </p:spPr>
+        <p:style>
+          <a:lnRef idx="1">
+            <a:schemeClr val="accent1"/>
+          </a:lnRef>
+          <a:fillRef idx="3">
+            <a:schemeClr val="accent1"/>
+          </a:fillRef>
+          <a:effectRef idx="2">
+            <a:schemeClr val="accent1"/>
+          </a:effectRef>
+          <a:fontRef idx="minor">
+            <a:schemeClr val="lt1"/>
+          </a:fontRef>
+        </p:style>
+        <p:txBody>
+          <a:bodyPr rtlCol="0" anchor="ctr"/>
+          <a:lstStyle/>
+          <a:p>
+            <a:pPr algn="ctr"/>
+            <a:endParaRPr/>
+          </a:p>
+        </p:txBody>
+      </p:sp>
+      <p:sp>
+        <p:nvSpPr>
+          <p:cNvPr id="17" name="TextBox 16"/>
+          <p:cNvSpPr txBox="1"/>
+          <p:nvPr/>
+        </p:nvSpPr>
+        <p:spPr>
+          <a:xfrm>
+            <a:off x="7040880" y="6053328"/>
+            <a:ext cx="1463040" cy="320040"/>
+          </a:xfrm>
+          <a:prstGeom prst="rect">
+            <a:avLst/>
+          </a:prstGeom>
+          <a:noFill/>
+        </p:spPr>
+        <p:txBody>
+          <a:bodyPr wrap="square">
+            <a:spAutoFit/>
+          </a:bodyPr>
+          <a:lstStyle/>
+          <a:p>
+            <a:pPr algn="ctr">
+              <a:defRPr sz="900" b="1">
+                <a:solidFill>
+                  <a:srgbClr val="FFFFFF"/>
+                </a:solidFill>
+                <a:latin typeface="Calibri"/>
+              </a:defRPr>
+            </a:pPr>
+            <a:r>
+              <a:t>Preference heatmap</a:t>
+            </a:r>
+          </a:p>
+        </p:txBody>
+      </p:sp>
+      <p:sp>
+        <p:nvSpPr>
+          <p:cNvPr id="18" name="Rounded Rectangle 17"/>
+          <p:cNvSpPr/>
+          <p:nvPr/>
+        </p:nvSpPr>
+        <p:spPr>
+          <a:xfrm>
+            <a:off x="8686800" y="6035040"/>
+            <a:ext cx="1463040" cy="365760"/>
+          </a:xfrm>
+          <a:prstGeom prst="roundRect">
+            <a:avLst>
+              <a:gd name="adj" fmla="val 10000"/>
+            </a:avLst>
+          </a:prstGeom>
+          <a:solidFill>
+            <a:srgbClr val="00C3F7"/>
+          </a:solidFill>
+          <a:ln>
+            <a:noFill/>
+          </a:ln>
+        </p:spPr>
+        <p:style>
+          <a:lnRef idx="1">
+            <a:schemeClr val="accent1"/>
+          </a:lnRef>
+          <a:fillRef idx="3">
+            <a:schemeClr val="accent1"/>
+          </a:fillRef>
+          <a:effectRef idx="2">
+            <a:schemeClr val="accent1"/>
+          </a:effectRef>
+          <a:fontRef idx="minor">
+            <a:schemeClr val="lt1"/>
+          </a:fontRef>
+        </p:style>
+        <p:txBody>
+          <a:bodyPr rtlCol="0" anchor="ctr"/>
+          <a:lstStyle/>
+          <a:p>
+            <a:pPr algn="ctr"/>
+            <a:endParaRPr/>
+          </a:p>
+        </p:txBody>
+      </p:sp>
+      <p:sp>
+        <p:nvSpPr>
           <p:cNvPr id="19" name="TextBox 18"/>
           <p:cNvSpPr txBox="1"/>
           <p:nvPr/>
         </p:nvSpPr>
         <p:spPr>
           <a:xfrm>
-            <a:off x="6492239" y="4023360"/>
-            <a:ext cx="5029200" cy="320040"/>
-          </a:xfrm>
-          <a:prstGeom prst="rect">
-            <a:avLst/>
-          </a:prstGeom>
-          <a:noFill/>
-        </p:spPr>
-        <p:txBody>
-          <a:bodyPr wrap="square">
-            <a:spAutoFit/>
-          </a:bodyPr>
-          <a:lstStyle/>
-          <a:p>
-            <a:pPr algn="l">
-              <a:defRPr sz="1500" b="1">
-                <a:solidFill>
-                  <a:srgbClr val="1A1A2E"/>
-                </a:solidFill>
-                <a:latin typeface="Calibri"/>
-              </a:defRPr>
-            </a:pPr>
-            <a:r>
-              <a:t>Windows Encoding</a:t>
-            </a:r>
-          </a:p>
-        </p:txBody>
-      </p:sp>
-      <p:sp>
-        <p:nvSpPr>
-          <p:cNvPr id="20" name="TextBox 19"/>
-          <p:cNvSpPr txBox="1"/>
-          <p:nvPr/>
-        </p:nvSpPr>
-        <p:spPr>
-          <a:xfrm>
-            <a:off x="6492239" y="4389120"/>
-            <a:ext cx="5029200" cy="502920"/>
-          </a:xfrm>
-          <a:prstGeom prst="rect">
-            <a:avLst/>
-          </a:prstGeom>
-          <a:noFill/>
-        </p:spPr>
-        <p:txBody>
-          <a:bodyPr wrap="square">
-            <a:spAutoFit/>
-          </a:bodyPr>
-          <a:lstStyle/>
-          <a:p>
-            <a:pPr algn="l">
-              <a:defRPr sz="1100" b="0">
-                <a:solidFill>
-                  <a:srgbClr val="F39C12"/>
-                </a:solidFill>
-                <a:latin typeface="Calibri"/>
-              </a:defRPr>
-            </a:pPr>
-            <a:r>
-              <a:t>Problem: Emoji in CLI output crashed on Windows cp1252 console encoding</a:t>
-            </a:r>
+            <a:off x="8686800" y="6053328"/>
+            <a:ext cx="1463040" cy="320040"/>
+          </a:xfrm>
+          <a:prstGeom prst="rect">
+            <a:avLst/>
+          </a:prstGeom>
+          <a:noFill/>
+        </p:spPr>
+        <p:txBody>
+          <a:bodyPr wrap="square">
+            <a:spAutoFit/>
+          </a:bodyPr>
+          <a:lstStyle/>
+          <a:p>
+            <a:pPr algn="ctr">
+              <a:defRPr sz="900" b="1">
+                <a:solidFill>
+                  <a:srgbClr val="FFFFFF"/>
+                </a:solidFill>
+                <a:latin typeface="Calibri"/>
+              </a:defRPr>
+            </a:pPr>
+            <a:r>
+              <a:t>Fairness grade &amp; Gini</a:t>
+            </a:r>
+          </a:p>
+        </p:txBody>
+      </p:sp>
+      <p:sp>
+        <p:nvSpPr>
+          <p:cNvPr id="20" name="Rounded Rectangle 19"/>
+          <p:cNvSpPr/>
+          <p:nvPr/>
+        </p:nvSpPr>
+        <p:spPr>
+          <a:xfrm>
+            <a:off x="10332720" y="6035040"/>
+            <a:ext cx="1463040" cy="365760"/>
+          </a:xfrm>
+          <a:prstGeom prst="roundRect">
+            <a:avLst>
+              <a:gd name="adj" fmla="val 10000"/>
+            </a:avLst>
+          </a:prstGeom>
+          <a:solidFill>
+            <a:srgbClr val="00C3F7"/>
+          </a:solidFill>
+          <a:ln>
+            <a:noFill/>
+          </a:ln>
+        </p:spPr>
+        <p:style>
+          <a:lnRef idx="1">
+            <a:schemeClr val="accent1"/>
+          </a:lnRef>
+          <a:fillRef idx="3">
+            <a:schemeClr val="accent1"/>
+          </a:fillRef>
+          <a:effectRef idx="2">
+            <a:schemeClr val="accent1"/>
+          </a:effectRef>
+          <a:fontRef idx="minor">
+            <a:schemeClr val="lt1"/>
+          </a:fontRef>
+        </p:style>
+        <p:txBody>
+          <a:bodyPr rtlCol="0" anchor="ctr"/>
+          <a:lstStyle/>
+          <a:p>
+            <a:pPr algn="ctr"/>
+            <a:endParaRPr/>
           </a:p>
         </p:txBody>
       </p:sp>
@@ -6052,43 +6472,344 @@
         </p:nvSpPr>
         <p:spPr>
           <a:xfrm>
-            <a:off x="6492239" y="4983480"/>
-            <a:ext cx="5029200" cy="868680"/>
-          </a:xfrm>
-          <a:prstGeom prst="rect">
-            <a:avLst/>
-          </a:prstGeom>
-          <a:noFill/>
-        </p:spPr>
-        <p:txBody>
-          <a:bodyPr wrap="square">
-            <a:spAutoFit/>
-          </a:bodyPr>
-          <a:lstStyle/>
-          <a:p>
-            <a:pPr algn="l">
-              <a:defRPr sz="1100" b="0">
-                <a:solidFill>
-                  <a:srgbClr val="1A1A2E"/>
-                </a:solidFill>
-                <a:latin typeface="Calibri"/>
-              </a:defRPr>
-            </a:pPr>
-            <a:r>
-              <a:t>Solution: Wrapped stdout with io.TextIOWrapper(encoding='utf-8', errors='replace'). Cross-platform compatible.</a:t>
-            </a:r>
-          </a:p>
-        </p:txBody>
-      </p:sp>
+            <a:off x="10332720" y="6053328"/>
+            <a:ext cx="1463040" cy="320040"/>
+          </a:xfrm>
+          <a:prstGeom prst="rect">
+            <a:avLst/>
+          </a:prstGeom>
+          <a:noFill/>
+        </p:spPr>
+        <p:txBody>
+          <a:bodyPr wrap="square">
+            <a:spAutoFit/>
+          </a:bodyPr>
+          <a:lstStyle/>
+          <a:p>
+            <a:pPr algn="ctr">
+              <a:defRPr sz="900" b="1">
+                <a:solidFill>
+                  <a:srgbClr val="FFFFFF"/>
+                </a:solidFill>
+                <a:latin typeface="Calibri"/>
+              </a:defRPr>
+            </a:pPr>
+            <a:r>
+              <a:t>Remediation suggestions</a:t>
+            </a:r>
+          </a:p>
+        </p:txBody>
+      </p:sp>
+      <p:pic>
+        <p:nvPicPr>
+          <p:cNvPr id="23" name="Picture 22">
+            <a:extLst>
+              <a:ext uri="{FF2B5EF4-FFF2-40B4-BE49-F238E27FC236}">
+                <a16:creationId xmlns:a16="http://schemas.microsoft.com/office/drawing/2014/main" id="{6CE7CEFC-229B-7268-AE6B-5D8BA967D436}"/>
+              </a:ext>
+            </a:extLst>
+          </p:cNvPr>
+          <p:cNvPicPr>
+            <a:picLocks noChangeAspect="1"/>
+          </p:cNvPicPr>
+          <p:nvPr/>
+        </p:nvPicPr>
+        <p:blipFill>
+          <a:blip r:embed="rId2"/>
+          <a:stretch>
+            <a:fillRect/>
+          </a:stretch>
+        </p:blipFill>
+        <p:spPr>
+          <a:xfrm>
+            <a:off x="1005840" y="1388943"/>
+            <a:ext cx="10149840" cy="4564236"/>
+          </a:xfrm>
+          <a:prstGeom prst="rect">
+            <a:avLst/>
+          </a:prstGeom>
+        </p:spPr>
+      </p:pic>
     </p:spTree>
   </p:cSld>
   <p:clrMapOvr>
     <a:masterClrMapping/>
   </p:clrMapOvr>
+  <mc:AlternateContent xmlns:mc="http://schemas.openxmlformats.org/markup-compatibility/2006" xmlns:p14="http://schemas.microsoft.com/office/powerpoint/2010/main">
+    <mc:Choice Requires="p14">
+      <p:transition spd="med" p14:dur="700">
+        <p:fade/>
+      </p:transition>
+    </mc:Choice>
+    <mc:Fallback xmlns="">
+      <p:transition spd="med">
+        <p:fade/>
+      </p:transition>
+    </mc:Fallback>
+  </mc:AlternateContent>
 </p:sld>
 </file>
 
 <file path=ppt/slides/slide13.xml><?xml version="1.0" encoding="utf-8"?>
+<p:sld xmlns:a="http://schemas.openxmlformats.org/drawingml/2006/main" xmlns:r="http://schemas.openxmlformats.org/officeDocument/2006/relationships" xmlns:p="http://schemas.openxmlformats.org/presentationml/2006/main">
+  <p:cSld>
+    <p:spTree>
+      <p:nvGrpSpPr>
+        <p:cNvPr id="1" name="">
+          <a:extLst>
+            <a:ext uri="{FF2B5EF4-FFF2-40B4-BE49-F238E27FC236}">
+              <a16:creationId xmlns:a16="http://schemas.microsoft.com/office/drawing/2014/main" id="{6A38C360-7848-07EC-EFE7-70C1F82EC679}"/>
+            </a:ext>
+          </a:extLst>
+        </p:cNvPr>
+        <p:cNvGrpSpPr/>
+        <p:nvPr/>
+      </p:nvGrpSpPr>
+      <p:grpSpPr>
+        <a:xfrm>
+          <a:off x="0" y="0"/>
+          <a:ext cx="0" cy="0"/>
+          <a:chOff x="0" y="0"/>
+          <a:chExt cx="0" cy="0"/>
+        </a:xfrm>
+      </p:grpSpPr>
+      <p:sp>
+        <p:nvSpPr>
+          <p:cNvPr id="2" name="Rectangle 1">
+            <a:extLst>
+              <a:ext uri="{FF2B5EF4-FFF2-40B4-BE49-F238E27FC236}">
+                <a16:creationId xmlns:a16="http://schemas.microsoft.com/office/drawing/2014/main" id="{A0459033-9A16-2322-0E5C-B2B152E1FAEA}"/>
+              </a:ext>
+            </a:extLst>
+          </p:cNvPr>
+          <p:cNvSpPr/>
+          <p:nvPr/>
+        </p:nvSpPr>
+        <p:spPr>
+          <a:xfrm>
+            <a:off x="0" y="0"/>
+            <a:ext cx="12191695" cy="54864"/>
+          </a:xfrm>
+          <a:prstGeom prst="rect">
+            <a:avLst/>
+          </a:prstGeom>
+          <a:solidFill>
+            <a:srgbClr val="00C3F7"/>
+          </a:solidFill>
+          <a:ln>
+            <a:noFill/>
+          </a:ln>
+        </p:spPr>
+        <p:style>
+          <a:lnRef idx="1">
+            <a:schemeClr val="accent1"/>
+          </a:lnRef>
+          <a:fillRef idx="3">
+            <a:schemeClr val="accent1"/>
+          </a:fillRef>
+          <a:effectRef idx="2">
+            <a:schemeClr val="accent1"/>
+          </a:effectRef>
+          <a:fontRef idx="minor">
+            <a:schemeClr val="lt1"/>
+          </a:fontRef>
+        </p:style>
+        <p:txBody>
+          <a:bodyPr rtlCol="0" anchor="ctr"/>
+          <a:lstStyle/>
+          <a:p>
+            <a:pPr algn="ctr"/>
+            <a:endParaRPr/>
+          </a:p>
+        </p:txBody>
+      </p:sp>
+      <p:sp>
+        <p:nvSpPr>
+          <p:cNvPr id="3" name="TextBox 2">
+            <a:extLst>
+              <a:ext uri="{FF2B5EF4-FFF2-40B4-BE49-F238E27FC236}">
+                <a16:creationId xmlns:a16="http://schemas.microsoft.com/office/drawing/2014/main" id="{48DF22B0-1870-26B9-EADE-159A49757F51}"/>
+              </a:ext>
+            </a:extLst>
+          </p:cNvPr>
+          <p:cNvSpPr txBox="1"/>
+          <p:nvPr/>
+        </p:nvSpPr>
+        <p:spPr>
+          <a:xfrm>
+            <a:off x="731520" y="365760"/>
+            <a:ext cx="10058400" cy="640080"/>
+          </a:xfrm>
+          <a:prstGeom prst="rect">
+            <a:avLst/>
+          </a:prstGeom>
+          <a:noFill/>
+        </p:spPr>
+        <p:txBody>
+          <a:bodyPr wrap="square">
+            <a:spAutoFit/>
+          </a:bodyPr>
+          <a:lstStyle/>
+          <a:p>
+            <a:pPr algn="l">
+              <a:defRPr sz="3200" b="1">
+                <a:solidFill>
+                  <a:srgbClr val="1A1A2E"/>
+                </a:solidFill>
+                <a:latin typeface="Calibri"/>
+              </a:defRPr>
+            </a:pPr>
+            <a:r>
+              <a:t>Interactive Dashboard</a:t>
+            </a:r>
+          </a:p>
+        </p:txBody>
+      </p:sp>
+      <p:sp>
+        <p:nvSpPr>
+          <p:cNvPr id="5" name="TextBox 4">
+            <a:extLst>
+              <a:ext uri="{FF2B5EF4-FFF2-40B4-BE49-F238E27FC236}">
+                <a16:creationId xmlns:a16="http://schemas.microsoft.com/office/drawing/2014/main" id="{3921A3F0-4766-796E-9A66-0E22548E8530}"/>
+              </a:ext>
+            </a:extLst>
+          </p:cNvPr>
+          <p:cNvSpPr txBox="1"/>
+          <p:nvPr/>
+        </p:nvSpPr>
+        <p:spPr>
+          <a:xfrm>
+            <a:off x="457200" y="6400800"/>
+            <a:ext cx="10972800" cy="230832"/>
+          </a:xfrm>
+          <a:prstGeom prst="rect">
+            <a:avLst/>
+          </a:prstGeom>
+          <a:noFill/>
+        </p:spPr>
+        <p:txBody>
+          <a:bodyPr wrap="square">
+            <a:spAutoFit/>
+          </a:bodyPr>
+          <a:lstStyle/>
+          <a:p>
+            <a:pPr algn="ctr">
+              <a:defRPr sz="900" b="0">
+                <a:solidFill>
+                  <a:srgbClr val="8E8EA3"/>
+                </a:solidFill>
+                <a:latin typeface="Calibri"/>
+              </a:defRPr>
+            </a:pPr>
+            <a:r>
+              <a:rPr lang="en-US" dirty="0"/>
+              <a:t>ARWN |  CS Demand Forecasting &amp; Shift Scheduling</a:t>
+            </a:r>
+          </a:p>
+        </p:txBody>
+      </p:sp>
+      <p:sp>
+        <p:nvSpPr>
+          <p:cNvPr id="7" name="TextBox 6">
+            <a:extLst>
+              <a:ext uri="{FF2B5EF4-FFF2-40B4-BE49-F238E27FC236}">
+                <a16:creationId xmlns:a16="http://schemas.microsoft.com/office/drawing/2014/main" id="{54A071F7-214C-D2E6-9AFA-923B60929D01}"/>
+              </a:ext>
+            </a:extLst>
+          </p:cNvPr>
+          <p:cNvSpPr txBox="1"/>
+          <p:nvPr/>
+        </p:nvSpPr>
+        <p:spPr>
+          <a:xfrm>
+            <a:off x="731520" y="3200400"/>
+            <a:ext cx="10698480" cy="731520"/>
+          </a:xfrm>
+          <a:prstGeom prst="rect">
+            <a:avLst/>
+          </a:prstGeom>
+          <a:noFill/>
+        </p:spPr>
+        <p:txBody>
+          <a:bodyPr wrap="square">
+            <a:spAutoFit/>
+          </a:bodyPr>
+          <a:lstStyle/>
+          <a:p>
+            <a:pPr algn="ctr">
+              <a:defRPr sz="2000" b="0">
+                <a:solidFill>
+                  <a:srgbClr val="8E8EA3"/>
+                </a:solidFill>
+                <a:latin typeface="Calibri"/>
+              </a:defRPr>
+            </a:pPr>
+            <a:r>
+              <a:t>[Insert Dashboard Screenshots Here]</a:t>
+            </a:r>
+            <a:br/>
+            <a:r>
+              <a:t>Run:  streamlit run app.py</a:t>
+            </a:r>
+          </a:p>
+        </p:txBody>
+      </p:sp>
+      <p:pic>
+        <p:nvPicPr>
+          <p:cNvPr id="23" name="Picture 22">
+            <a:extLst>
+              <a:ext uri="{FF2B5EF4-FFF2-40B4-BE49-F238E27FC236}">
+                <a16:creationId xmlns:a16="http://schemas.microsoft.com/office/drawing/2014/main" id="{2D1F8070-1DF1-0EB6-0A61-7CB42DBF9DDA}"/>
+              </a:ext>
+            </a:extLst>
+          </p:cNvPr>
+          <p:cNvPicPr>
+            <a:picLocks noChangeAspect="1"/>
+          </p:cNvPicPr>
+          <p:nvPr/>
+        </p:nvPicPr>
+        <p:blipFill>
+          <a:blip r:embed="rId2"/>
+          <a:stretch>
+            <a:fillRect/>
+          </a:stretch>
+        </p:blipFill>
+        <p:spPr>
+          <a:xfrm>
+            <a:off x="228599" y="1011030"/>
+            <a:ext cx="11734800" cy="5276970"/>
+          </a:xfrm>
+          <a:prstGeom prst="rect">
+            <a:avLst/>
+          </a:prstGeom>
+        </p:spPr>
+      </p:pic>
+    </p:spTree>
+    <p:extLst>
+      <p:ext uri="{BB962C8B-B14F-4D97-AF65-F5344CB8AC3E}">
+        <p14:creationId xmlns:p14="http://schemas.microsoft.com/office/powerpoint/2010/main" val="448674335"/>
+      </p:ext>
+    </p:extLst>
+  </p:cSld>
+  <p:clrMapOvr>
+    <a:masterClrMapping/>
+  </p:clrMapOvr>
+  <mc:AlternateContent xmlns:mc="http://schemas.openxmlformats.org/markup-compatibility/2006" xmlns:p14="http://schemas.microsoft.com/office/powerpoint/2010/main">
+    <mc:Choice Requires="p14">
+      <p:transition spd="med" p14:dur="700">
+        <p:fade/>
+      </p:transition>
+    </mc:Choice>
+    <mc:Fallback xmlns="">
+      <p:transition spd="med">
+        <p:fade/>
+      </p:transition>
+    </mc:Fallback>
+  </mc:AlternateContent>
+</p:sld>
+</file>
+
+<file path=ppt/slides/slide14.xml><?xml version="1.0" encoding="utf-8"?>
 <p:sld xmlns:a="http://schemas.openxmlformats.org/drawingml/2006/main" xmlns:r="http://schemas.openxmlformats.org/officeDocument/2006/relationships" xmlns:p="http://schemas.openxmlformats.org/presentationml/2006/main">
   <p:cSld>
     <p:bg>
@@ -6188,7 +6909,7 @@
               </a:defRPr>
             </a:pPr>
             <a:r>
-              <a:t>What's Next</a:t>
+              <a:t>Challenges Solved</a:t>
             </a:r>
           </a:p>
         </p:txBody>
@@ -6224,7 +6945,7 @@
               </a:defRPr>
             </a:pPr>
             <a:r>
-              <a:t>Production roadmap if this goes to production</a:t>
+              <a:t>Real engineering problems encountered and resolved</a:t>
             </a:r>
           </a:p>
         </p:txBody>
@@ -6260,16 +6981,8 @@
               </a:defRPr>
             </a:pPr>
             <a:r>
-              <a:rPr dirty="0"/>
-              <a:t>A</a:t>
-            </a:r>
-            <a:r>
               <a:rPr lang="en-US" dirty="0"/>
-              <a:t>RWN </a:t>
-            </a:r>
-            <a:r>
-              <a:rPr dirty="0"/>
-              <a:t>|  CS Demand Forecasting &amp; Shift Scheduling</a:t>
+              <a:t>ARWN |  CS Demand Forecasting &amp; Shift Scheduling</a:t>
             </a:r>
           </a:p>
         </p:txBody>
@@ -6283,12 +6996,671 @@
         <p:spPr>
           <a:xfrm>
             <a:off x="548640" y="1463040"/>
-            <a:ext cx="3474720" cy="457200"/>
+            <a:ext cx="5394960" cy="2103120"/>
           </a:xfrm>
           <a:prstGeom prst="roundRect">
             <a:avLst>
-              <a:gd name="adj" fmla="val 5000"/>
+              <a:gd name="adj" fmla="val 3000"/>
             </a:avLst>
+          </a:prstGeom>
+          <a:solidFill>
+            <a:srgbClr val="F5F5FA"/>
+          </a:solidFill>
+          <a:ln>
+            <a:noFill/>
+          </a:ln>
+        </p:spPr>
+        <p:style>
+          <a:lnRef idx="1">
+            <a:schemeClr val="accent1"/>
+          </a:lnRef>
+          <a:fillRef idx="3">
+            <a:schemeClr val="accent1"/>
+          </a:fillRef>
+          <a:effectRef idx="2">
+            <a:schemeClr val="accent1"/>
+          </a:effectRef>
+          <a:fontRef idx="minor">
+            <a:schemeClr val="lt1"/>
+          </a:fontRef>
+        </p:style>
+        <p:txBody>
+          <a:bodyPr rtlCol="0" anchor="ctr"/>
+          <a:lstStyle/>
+          <a:p>
+            <a:pPr algn="ctr"/>
+            <a:endParaRPr/>
+          </a:p>
+        </p:txBody>
+      </p:sp>
+      <p:sp>
+        <p:nvSpPr>
+          <p:cNvPr id="7" name="TextBox 6"/>
+          <p:cNvSpPr txBox="1"/>
+          <p:nvPr/>
+        </p:nvSpPr>
+        <p:spPr>
+          <a:xfrm>
+            <a:off x="731520" y="1554480"/>
+            <a:ext cx="5029200" cy="320040"/>
+          </a:xfrm>
+          <a:prstGeom prst="rect">
+            <a:avLst/>
+          </a:prstGeom>
+          <a:noFill/>
+        </p:spPr>
+        <p:txBody>
+          <a:bodyPr wrap="square">
+            <a:spAutoFit/>
+          </a:bodyPr>
+          <a:lstStyle/>
+          <a:p>
+            <a:pPr algn="l">
+              <a:defRPr sz="1500" b="1">
+                <a:solidFill>
+                  <a:srgbClr val="1A1A2E"/>
+                </a:solidFill>
+                <a:latin typeface="Calibri"/>
+              </a:defRPr>
+            </a:pPr>
+            <a:r>
+              <a:t>Unrealistic Staffing Predictions</a:t>
+            </a:r>
+          </a:p>
+        </p:txBody>
+      </p:sp>
+      <p:sp>
+        <p:nvSpPr>
+          <p:cNvPr id="8" name="TextBox 7"/>
+          <p:cNvSpPr txBox="1"/>
+          <p:nvPr/>
+        </p:nvSpPr>
+        <p:spPr>
+          <a:xfrm>
+            <a:off x="731520" y="1920240"/>
+            <a:ext cx="5029200" cy="502920"/>
+          </a:xfrm>
+          <a:prstGeom prst="rect">
+            <a:avLst/>
+          </a:prstGeom>
+          <a:noFill/>
+        </p:spPr>
+        <p:txBody>
+          <a:bodyPr wrap="square">
+            <a:spAutoFit/>
+          </a:bodyPr>
+          <a:lstStyle/>
+          <a:p>
+            <a:pPr algn="l">
+              <a:defRPr sz="1100" b="0">
+                <a:solidFill>
+                  <a:srgbClr val="FF6B6B"/>
+                </a:solidFill>
+                <a:latin typeface="Calibri"/>
+              </a:defRPr>
+            </a:pPr>
+            <a:r>
+              <a:t>Problem: Model extrapolated: predicted 4-5 agents when historical data showed 14+</a:t>
+            </a:r>
+          </a:p>
+        </p:txBody>
+      </p:sp>
+      <p:sp>
+        <p:nvSpPr>
+          <p:cNvPr id="9" name="TextBox 8"/>
+          <p:cNvSpPr txBox="1"/>
+          <p:nvPr/>
+        </p:nvSpPr>
+        <p:spPr>
+          <a:xfrm>
+            <a:off x="731520" y="2514600"/>
+            <a:ext cx="5029200" cy="868680"/>
+          </a:xfrm>
+          <a:prstGeom prst="rect">
+            <a:avLst/>
+          </a:prstGeom>
+          <a:noFill/>
+        </p:spPr>
+        <p:txBody>
+          <a:bodyPr wrap="square">
+            <a:spAutoFit/>
+          </a:bodyPr>
+          <a:lstStyle/>
+          <a:p>
+            <a:pPr algn="l">
+              <a:defRPr sz="1100" b="0">
+                <a:solidFill>
+                  <a:srgbClr val="1A1A2E"/>
+                </a:solidFill>
+                <a:latin typeface="Calibri"/>
+              </a:defRPr>
+            </a:pPr>
+            <a:r>
+              <a:t>Solution: Added historical staffing floors (10th percentile of quality-meeting shifts) as lower bounds. Prevents model from predicting below observed reality.</a:t>
+            </a:r>
+          </a:p>
+        </p:txBody>
+      </p:sp>
+      <p:sp>
+        <p:nvSpPr>
+          <p:cNvPr id="10" name="Rounded Rectangle 9"/>
+          <p:cNvSpPr/>
+          <p:nvPr/>
+        </p:nvSpPr>
+        <p:spPr>
+          <a:xfrm>
+            <a:off x="6309359" y="1463040"/>
+            <a:ext cx="5394960" cy="2103120"/>
+          </a:xfrm>
+          <a:prstGeom prst="roundRect">
+            <a:avLst>
+              <a:gd name="adj" fmla="val 3000"/>
+            </a:avLst>
+          </a:prstGeom>
+          <a:solidFill>
+            <a:srgbClr val="F5F5FA"/>
+          </a:solidFill>
+          <a:ln>
+            <a:noFill/>
+          </a:ln>
+        </p:spPr>
+        <p:style>
+          <a:lnRef idx="1">
+            <a:schemeClr val="accent1"/>
+          </a:lnRef>
+          <a:fillRef idx="3">
+            <a:schemeClr val="accent1"/>
+          </a:fillRef>
+          <a:effectRef idx="2">
+            <a:schemeClr val="accent1"/>
+          </a:effectRef>
+          <a:fontRef idx="minor">
+            <a:schemeClr val="lt1"/>
+          </a:fontRef>
+        </p:style>
+        <p:txBody>
+          <a:bodyPr rtlCol="0" anchor="ctr"/>
+          <a:lstStyle/>
+          <a:p>
+            <a:pPr algn="ctr"/>
+            <a:endParaRPr/>
+          </a:p>
+        </p:txBody>
+      </p:sp>
+      <p:sp>
+        <p:nvSpPr>
+          <p:cNvPr id="11" name="TextBox 10"/>
+          <p:cNvSpPr txBox="1"/>
+          <p:nvPr/>
+        </p:nvSpPr>
+        <p:spPr>
+          <a:xfrm>
+            <a:off x="6492239" y="1554480"/>
+            <a:ext cx="5029200" cy="320040"/>
+          </a:xfrm>
+          <a:prstGeom prst="rect">
+            <a:avLst/>
+          </a:prstGeom>
+          <a:noFill/>
+        </p:spPr>
+        <p:txBody>
+          <a:bodyPr wrap="square">
+            <a:spAutoFit/>
+          </a:bodyPr>
+          <a:lstStyle/>
+          <a:p>
+            <a:pPr algn="l">
+              <a:defRPr sz="1500" b="1">
+                <a:solidFill>
+                  <a:srgbClr val="1A1A2E"/>
+                </a:solidFill>
+                <a:latin typeface="Calibri"/>
+              </a:defRPr>
+            </a:pPr>
+            <a:r>
+              <a:t>English Agent Scarcity</a:t>
+            </a:r>
+          </a:p>
+        </p:txBody>
+      </p:sp>
+      <p:sp>
+        <p:nvSpPr>
+          <p:cNvPr id="12" name="TextBox 11"/>
+          <p:cNvSpPr txBox="1"/>
+          <p:nvPr/>
+        </p:nvSpPr>
+        <p:spPr>
+          <a:xfrm>
+            <a:off x="6492239" y="1920240"/>
+            <a:ext cx="5029200" cy="502920"/>
+          </a:xfrm>
+          <a:prstGeom prst="rect">
+            <a:avLst/>
+          </a:prstGeom>
+          <a:noFill/>
+        </p:spPr>
+        <p:txBody>
+          <a:bodyPr wrap="square">
+            <a:spAutoFit/>
+          </a:bodyPr>
+          <a:lstStyle/>
+          <a:p>
+            <a:pPr algn="l">
+              <a:defRPr sz="1100" b="0">
+                <a:solidFill>
+                  <a:srgbClr val="FF6B6B"/>
+                </a:solidFill>
+                <a:latin typeface="Calibri"/>
+              </a:defRPr>
+            </a:pPr>
+            <a:r>
+              <a:t>Problem: 8 English agents total, optimizer demanded 8/day — impossible with 6 leave days</a:t>
+            </a:r>
+          </a:p>
+        </p:txBody>
+      </p:sp>
+      <p:sp>
+        <p:nvSpPr>
+          <p:cNvPr id="13" name="TextBox 12"/>
+          <p:cNvSpPr txBox="1"/>
+          <p:nvPr/>
+        </p:nvSpPr>
+        <p:spPr>
+          <a:xfrm>
+            <a:off x="6492239" y="2514600"/>
+            <a:ext cx="5029200" cy="868680"/>
+          </a:xfrm>
+          <a:prstGeom prst="rect">
+            <a:avLst/>
+          </a:prstGeom>
+          <a:noFill/>
+        </p:spPr>
+        <p:txBody>
+          <a:bodyPr wrap="square">
+            <a:spAutoFit/>
+          </a:bodyPr>
+          <a:lstStyle/>
+          <a:p>
+            <a:pPr algn="l">
+              <a:defRPr sz="1100" b="0">
+                <a:solidFill>
+                  <a:srgbClr val="1A1A2E"/>
+                </a:solidFill>
+                <a:latin typeface="Calibri"/>
+              </a:defRPr>
+            </a:pPr>
+            <a:r>
+              <a:t>Solution: Added feasibility caps: available_english = max(1, int(8 × 0.8) - 1) = 5. Prevents infeasible staffing requirements that would block the scheduler.</a:t>
+            </a:r>
+          </a:p>
+        </p:txBody>
+      </p:sp>
+      <p:sp>
+        <p:nvSpPr>
+          <p:cNvPr id="14" name="Rounded Rectangle 13"/>
+          <p:cNvSpPr/>
+          <p:nvPr/>
+        </p:nvSpPr>
+        <p:spPr>
+          <a:xfrm>
+            <a:off x="548640" y="3931920"/>
+            <a:ext cx="5394960" cy="2103120"/>
+          </a:xfrm>
+          <a:prstGeom prst="roundRect">
+            <a:avLst>
+              <a:gd name="adj" fmla="val 3000"/>
+            </a:avLst>
+          </a:prstGeom>
+          <a:solidFill>
+            <a:srgbClr val="F5F5FA"/>
+          </a:solidFill>
+          <a:ln>
+            <a:noFill/>
+          </a:ln>
+        </p:spPr>
+        <p:style>
+          <a:lnRef idx="1">
+            <a:schemeClr val="accent1"/>
+          </a:lnRef>
+          <a:fillRef idx="3">
+            <a:schemeClr val="accent1"/>
+          </a:fillRef>
+          <a:effectRef idx="2">
+            <a:schemeClr val="accent1"/>
+          </a:effectRef>
+          <a:fontRef idx="minor">
+            <a:schemeClr val="lt1"/>
+          </a:fontRef>
+        </p:style>
+        <p:txBody>
+          <a:bodyPr rtlCol="0" anchor="ctr"/>
+          <a:lstStyle/>
+          <a:p>
+            <a:pPr algn="ctr"/>
+            <a:endParaRPr/>
+          </a:p>
+        </p:txBody>
+      </p:sp>
+      <p:sp>
+        <p:nvSpPr>
+          <p:cNvPr id="15" name="TextBox 14"/>
+          <p:cNvSpPr txBox="1"/>
+          <p:nvPr/>
+        </p:nvSpPr>
+        <p:spPr>
+          <a:xfrm>
+            <a:off x="731520" y="4023360"/>
+            <a:ext cx="5029200" cy="320040"/>
+          </a:xfrm>
+          <a:prstGeom prst="rect">
+            <a:avLst/>
+          </a:prstGeom>
+          <a:noFill/>
+        </p:spPr>
+        <p:txBody>
+          <a:bodyPr wrap="square">
+            <a:spAutoFit/>
+          </a:bodyPr>
+          <a:lstStyle/>
+          <a:p>
+            <a:pPr algn="l">
+              <a:defRPr sz="1500" b="1">
+                <a:solidFill>
+                  <a:srgbClr val="1A1A2E"/>
+                </a:solidFill>
+                <a:latin typeface="Calibri"/>
+              </a:defRPr>
+            </a:pPr>
+            <a:r>
+              <a:t>Preference vs. Fairness Tension</a:t>
+            </a:r>
+          </a:p>
+        </p:txBody>
+      </p:sp>
+      <p:sp>
+        <p:nvSpPr>
+          <p:cNvPr id="16" name="TextBox 15"/>
+          <p:cNvSpPr txBox="1"/>
+          <p:nvPr/>
+        </p:nvSpPr>
+        <p:spPr>
+          <a:xfrm>
+            <a:off x="731520" y="4389120"/>
+            <a:ext cx="5029200" cy="502920"/>
+          </a:xfrm>
+          <a:prstGeom prst="rect">
+            <a:avLst/>
+          </a:prstGeom>
+          <a:noFill/>
+        </p:spPr>
+        <p:txBody>
+          <a:bodyPr wrap="square">
+            <a:spAutoFit/>
+          </a:bodyPr>
+          <a:lstStyle/>
+          <a:p>
+            <a:pPr algn="l">
+              <a:defRPr sz="1100" b="0">
+                <a:solidFill>
+                  <a:srgbClr val="F39C12"/>
+                </a:solidFill>
+                <a:latin typeface="Calibri"/>
+              </a:defRPr>
+            </a:pPr>
+            <a:r>
+              <a:t>Problem: Adding preference soft constraint → solver trade-offs night shift equity</a:t>
+            </a:r>
+          </a:p>
+        </p:txBody>
+      </p:sp>
+      <p:sp>
+        <p:nvSpPr>
+          <p:cNvPr id="17" name="TextBox 16"/>
+          <p:cNvSpPr txBox="1"/>
+          <p:nvPr/>
+        </p:nvSpPr>
+        <p:spPr>
+          <a:xfrm>
+            <a:off x="731520" y="4983480"/>
+            <a:ext cx="5029200" cy="868680"/>
+          </a:xfrm>
+          <a:prstGeom prst="rect">
+            <a:avLst/>
+          </a:prstGeom>
+          <a:noFill/>
+        </p:spPr>
+        <p:txBody>
+          <a:bodyPr wrap="square">
+            <a:spAutoFit/>
+          </a:bodyPr>
+          <a:lstStyle/>
+          <a:p>
+            <a:pPr algn="l">
+              <a:defRPr sz="1100" b="0">
+                <a:solidFill>
+                  <a:srgbClr val="1A1A2E"/>
+                </a:solidFill>
+                <a:latin typeface="Calibri"/>
+              </a:defRPr>
+            </a:pPr>
+            <a:r>
+              <a:t>Solution: Sparsity-adjusted Gini scoring (only ~80 night slots for 50 agents), tunable weight balance. Accept mathematical limits of sparse distributions.</a:t>
+            </a:r>
+          </a:p>
+        </p:txBody>
+      </p:sp>
+      <p:sp>
+        <p:nvSpPr>
+          <p:cNvPr id="18" name="Rounded Rectangle 17"/>
+          <p:cNvSpPr/>
+          <p:nvPr/>
+        </p:nvSpPr>
+        <p:spPr>
+          <a:xfrm>
+            <a:off x="6309359" y="3931920"/>
+            <a:ext cx="5394960" cy="2103120"/>
+          </a:xfrm>
+          <a:prstGeom prst="roundRect">
+            <a:avLst>
+              <a:gd name="adj" fmla="val 3000"/>
+            </a:avLst>
+          </a:prstGeom>
+          <a:solidFill>
+            <a:srgbClr val="F5F5FA"/>
+          </a:solidFill>
+          <a:ln>
+            <a:noFill/>
+          </a:ln>
+        </p:spPr>
+        <p:style>
+          <a:lnRef idx="1">
+            <a:schemeClr val="accent1"/>
+          </a:lnRef>
+          <a:fillRef idx="3">
+            <a:schemeClr val="accent1"/>
+          </a:fillRef>
+          <a:effectRef idx="2">
+            <a:schemeClr val="accent1"/>
+          </a:effectRef>
+          <a:fontRef idx="minor">
+            <a:schemeClr val="lt1"/>
+          </a:fontRef>
+        </p:style>
+        <p:txBody>
+          <a:bodyPr rtlCol="0" anchor="ctr"/>
+          <a:lstStyle/>
+          <a:p>
+            <a:pPr algn="ctr"/>
+            <a:endParaRPr/>
+          </a:p>
+        </p:txBody>
+      </p:sp>
+      <p:sp>
+        <p:nvSpPr>
+          <p:cNvPr id="19" name="TextBox 18"/>
+          <p:cNvSpPr txBox="1"/>
+          <p:nvPr/>
+        </p:nvSpPr>
+        <p:spPr>
+          <a:xfrm>
+            <a:off x="6492239" y="4023360"/>
+            <a:ext cx="5029200" cy="320040"/>
+          </a:xfrm>
+          <a:prstGeom prst="rect">
+            <a:avLst/>
+          </a:prstGeom>
+          <a:noFill/>
+        </p:spPr>
+        <p:txBody>
+          <a:bodyPr wrap="square">
+            <a:spAutoFit/>
+          </a:bodyPr>
+          <a:lstStyle/>
+          <a:p>
+            <a:pPr algn="l">
+              <a:defRPr sz="1500" b="1">
+                <a:solidFill>
+                  <a:srgbClr val="1A1A2E"/>
+                </a:solidFill>
+                <a:latin typeface="Calibri"/>
+              </a:defRPr>
+            </a:pPr>
+            <a:r>
+              <a:t>Windows Encoding</a:t>
+            </a:r>
+          </a:p>
+        </p:txBody>
+      </p:sp>
+      <p:sp>
+        <p:nvSpPr>
+          <p:cNvPr id="20" name="TextBox 19"/>
+          <p:cNvSpPr txBox="1"/>
+          <p:nvPr/>
+        </p:nvSpPr>
+        <p:spPr>
+          <a:xfrm>
+            <a:off x="6492239" y="4389120"/>
+            <a:ext cx="5029200" cy="502920"/>
+          </a:xfrm>
+          <a:prstGeom prst="rect">
+            <a:avLst/>
+          </a:prstGeom>
+          <a:noFill/>
+        </p:spPr>
+        <p:txBody>
+          <a:bodyPr wrap="square">
+            <a:spAutoFit/>
+          </a:bodyPr>
+          <a:lstStyle/>
+          <a:p>
+            <a:pPr algn="l">
+              <a:defRPr sz="1100" b="0">
+                <a:solidFill>
+                  <a:srgbClr val="F39C12"/>
+                </a:solidFill>
+                <a:latin typeface="Calibri"/>
+              </a:defRPr>
+            </a:pPr>
+            <a:r>
+              <a:t>Problem: Emoji in CLI output crashed on Windows cp1252 console encoding</a:t>
+            </a:r>
+          </a:p>
+        </p:txBody>
+      </p:sp>
+      <p:sp>
+        <p:nvSpPr>
+          <p:cNvPr id="21" name="TextBox 20"/>
+          <p:cNvSpPr txBox="1"/>
+          <p:nvPr/>
+        </p:nvSpPr>
+        <p:spPr>
+          <a:xfrm>
+            <a:off x="6492239" y="4983480"/>
+            <a:ext cx="5029200" cy="868680"/>
+          </a:xfrm>
+          <a:prstGeom prst="rect">
+            <a:avLst/>
+          </a:prstGeom>
+          <a:noFill/>
+        </p:spPr>
+        <p:txBody>
+          <a:bodyPr wrap="square">
+            <a:spAutoFit/>
+          </a:bodyPr>
+          <a:lstStyle/>
+          <a:p>
+            <a:pPr algn="l">
+              <a:defRPr sz="1100" b="0">
+                <a:solidFill>
+                  <a:srgbClr val="1A1A2E"/>
+                </a:solidFill>
+                <a:latin typeface="Calibri"/>
+              </a:defRPr>
+            </a:pPr>
+            <a:r>
+              <a:t>Solution: Wrapped stdout with io.TextIOWrapper(encoding='utf-8', errors='replace'). Cross-platform compatible.</a:t>
+            </a:r>
+          </a:p>
+        </p:txBody>
+      </p:sp>
+    </p:spTree>
+  </p:cSld>
+  <p:clrMapOvr>
+    <a:masterClrMapping/>
+  </p:clrMapOvr>
+  <mc:AlternateContent xmlns:mc="http://schemas.openxmlformats.org/markup-compatibility/2006" xmlns:p14="http://schemas.microsoft.com/office/powerpoint/2010/main">
+    <mc:Choice Requires="p14">
+      <p:transition spd="med" p14:dur="700">
+        <p:fade/>
+      </p:transition>
+    </mc:Choice>
+    <mc:Fallback xmlns="">
+      <p:transition spd="med">
+        <p:fade/>
+      </p:transition>
+    </mc:Fallback>
+  </mc:AlternateContent>
+</p:sld>
+</file>
+
+<file path=ppt/slides/slide15.xml><?xml version="1.0" encoding="utf-8"?>
+<p:sld xmlns:a="http://schemas.openxmlformats.org/drawingml/2006/main" xmlns:r="http://schemas.openxmlformats.org/officeDocument/2006/relationships" xmlns:p="http://schemas.openxmlformats.org/presentationml/2006/main">
+  <p:cSld>
+    <p:bg>
+      <p:bgPr>
+        <a:solidFill>
+          <a:srgbClr val="FFFFFF"/>
+        </a:solidFill>
+        <a:effectLst/>
+      </p:bgPr>
+    </p:bg>
+    <p:spTree>
+      <p:nvGrpSpPr>
+        <p:cNvPr id="1" name=""/>
+        <p:cNvGrpSpPr/>
+        <p:nvPr/>
+      </p:nvGrpSpPr>
+      <p:grpSpPr>
+        <a:xfrm>
+          <a:off x="0" y="0"/>
+          <a:ext cx="0" cy="0"/>
+          <a:chOff x="0" y="0"/>
+          <a:chExt cx="0" cy="0"/>
+        </a:xfrm>
+      </p:grpSpPr>
+      <p:sp>
+        <p:nvSpPr>
+          <p:cNvPr id="2" name="Rectangle 1"/>
+          <p:cNvSpPr/>
+          <p:nvPr/>
+        </p:nvSpPr>
+        <p:spPr>
+          <a:xfrm>
+            <a:off x="0" y="0"/>
+            <a:ext cx="12191695" cy="54864"/>
+          </a:xfrm>
+          <a:prstGeom prst="rect">
+            <a:avLst/>
           </a:prstGeom>
           <a:solidFill>
             <a:srgbClr val="00C3F7"/>
@@ -6322,6 +7694,169 @@
       </p:sp>
       <p:sp>
         <p:nvSpPr>
+          <p:cNvPr id="3" name="TextBox 2"/>
+          <p:cNvSpPr txBox="1"/>
+          <p:nvPr/>
+        </p:nvSpPr>
+        <p:spPr>
+          <a:xfrm>
+            <a:off x="731520" y="365760"/>
+            <a:ext cx="10058400" cy="640080"/>
+          </a:xfrm>
+          <a:prstGeom prst="rect">
+            <a:avLst/>
+          </a:prstGeom>
+          <a:noFill/>
+        </p:spPr>
+        <p:txBody>
+          <a:bodyPr wrap="square">
+            <a:spAutoFit/>
+          </a:bodyPr>
+          <a:lstStyle/>
+          <a:p>
+            <a:pPr algn="l">
+              <a:defRPr sz="3200" b="1">
+                <a:solidFill>
+                  <a:srgbClr val="1A1A2E"/>
+                </a:solidFill>
+                <a:latin typeface="Calibri"/>
+              </a:defRPr>
+            </a:pPr>
+            <a:r>
+              <a:t>What's Next</a:t>
+            </a:r>
+          </a:p>
+        </p:txBody>
+      </p:sp>
+      <p:sp>
+        <p:nvSpPr>
+          <p:cNvPr id="4" name="TextBox 3"/>
+          <p:cNvSpPr txBox="1"/>
+          <p:nvPr/>
+        </p:nvSpPr>
+        <p:spPr>
+          <a:xfrm>
+            <a:off x="731520" y="914400"/>
+            <a:ext cx="10058400" cy="457200"/>
+          </a:xfrm>
+          <a:prstGeom prst="rect">
+            <a:avLst/>
+          </a:prstGeom>
+          <a:noFill/>
+        </p:spPr>
+        <p:txBody>
+          <a:bodyPr wrap="square">
+            <a:spAutoFit/>
+          </a:bodyPr>
+          <a:lstStyle/>
+          <a:p>
+            <a:pPr algn="l">
+              <a:defRPr sz="1600" b="0">
+                <a:solidFill>
+                  <a:srgbClr val="8E8EA3"/>
+                </a:solidFill>
+                <a:latin typeface="Calibri"/>
+              </a:defRPr>
+            </a:pPr>
+            <a:r>
+              <a:t>Production roadmap if this goes to production</a:t>
+            </a:r>
+          </a:p>
+        </p:txBody>
+      </p:sp>
+      <p:sp>
+        <p:nvSpPr>
+          <p:cNvPr id="5" name="TextBox 4"/>
+          <p:cNvSpPr txBox="1"/>
+          <p:nvPr/>
+        </p:nvSpPr>
+        <p:spPr>
+          <a:xfrm>
+            <a:off x="457200" y="6400800"/>
+            <a:ext cx="10972800" cy="230832"/>
+          </a:xfrm>
+          <a:prstGeom prst="rect">
+            <a:avLst/>
+          </a:prstGeom>
+          <a:noFill/>
+        </p:spPr>
+        <p:txBody>
+          <a:bodyPr wrap="square">
+            <a:spAutoFit/>
+          </a:bodyPr>
+          <a:lstStyle/>
+          <a:p>
+            <a:pPr algn="ctr">
+              <a:defRPr sz="900" b="0">
+                <a:solidFill>
+                  <a:srgbClr val="8E8EA3"/>
+                </a:solidFill>
+                <a:latin typeface="Calibri"/>
+              </a:defRPr>
+            </a:pPr>
+            <a:r>
+              <a:rPr dirty="0"/>
+              <a:t>A</a:t>
+            </a:r>
+            <a:r>
+              <a:rPr lang="en-US" dirty="0"/>
+              <a:t>RWN </a:t>
+            </a:r>
+            <a:r>
+              <a:rPr dirty="0"/>
+              <a:t>|  CS Demand Forecasting &amp; Shift Scheduling</a:t>
+            </a:r>
+          </a:p>
+        </p:txBody>
+      </p:sp>
+      <p:sp>
+        <p:nvSpPr>
+          <p:cNvPr id="6" name="Rounded Rectangle 5"/>
+          <p:cNvSpPr/>
+          <p:nvPr/>
+        </p:nvSpPr>
+        <p:spPr>
+          <a:xfrm>
+            <a:off x="548640" y="1463040"/>
+            <a:ext cx="3474720" cy="457200"/>
+          </a:xfrm>
+          <a:prstGeom prst="roundRect">
+            <a:avLst>
+              <a:gd name="adj" fmla="val 5000"/>
+            </a:avLst>
+          </a:prstGeom>
+          <a:solidFill>
+            <a:srgbClr val="00C3F7"/>
+          </a:solidFill>
+          <a:ln>
+            <a:noFill/>
+          </a:ln>
+        </p:spPr>
+        <p:style>
+          <a:lnRef idx="1">
+            <a:schemeClr val="accent1"/>
+          </a:lnRef>
+          <a:fillRef idx="3">
+            <a:schemeClr val="accent1"/>
+          </a:fillRef>
+          <a:effectRef idx="2">
+            <a:schemeClr val="accent1"/>
+          </a:effectRef>
+          <a:fontRef idx="minor">
+            <a:schemeClr val="lt1"/>
+          </a:fontRef>
+        </p:style>
+        <p:txBody>
+          <a:bodyPr rtlCol="0" anchor="ctr"/>
+          <a:lstStyle/>
+          <a:p>
+            <a:pPr algn="ctr"/>
+            <a:endParaRPr/>
+          </a:p>
+        </p:txBody>
+      </p:sp>
+      <p:sp>
+        <p:nvSpPr>
           <p:cNvPr id="7" name="TextBox 6"/>
           <p:cNvSpPr txBox="1"/>
           <p:nvPr/>
@@ -6786,10 +8321,22 @@
   <p:clrMapOvr>
     <a:masterClrMapping/>
   </p:clrMapOvr>
+  <mc:AlternateContent xmlns:mc="http://schemas.openxmlformats.org/markup-compatibility/2006" xmlns:p14="http://schemas.microsoft.com/office/powerpoint/2010/main">
+    <mc:Choice Requires="p14">
+      <p:transition spd="med" p14:dur="700">
+        <p:fade/>
+      </p:transition>
+    </mc:Choice>
+    <mc:Fallback xmlns="">
+      <p:transition spd="med">
+        <p:fade/>
+      </p:transition>
+    </mc:Fallback>
+  </mc:AlternateContent>
 </p:sld>
 </file>
 
-<file path=ppt/slides/slide14.xml><?xml version="1.0" encoding="utf-8"?>
+<file path=ppt/slides/slide16.xml><?xml version="1.0" encoding="utf-8"?>
 <p:sld xmlns:a="http://schemas.openxmlformats.org/drawingml/2006/main" xmlns:r="http://schemas.openxmlformats.org/officeDocument/2006/relationships" xmlns:p="http://schemas.openxmlformats.org/presentationml/2006/main">
   <p:cSld>
     <p:bg>
@@ -6939,7 +8486,7 @@
         <p:spPr>
           <a:xfrm>
             <a:off x="914400" y="4114800"/>
-            <a:ext cx="10058400" cy="365760"/>
+            <a:ext cx="10058400" cy="246221"/>
           </a:xfrm>
           <a:prstGeom prst="rect">
             <a:avLst/>
@@ -6961,22 +8508,22 @@
               </a:defRPr>
             </a:pPr>
             <a:r>
-              <a:rPr dirty="0"/>
+              <a:rPr sz="1000" dirty="0"/>
               <a:t>github.com/</a:t>
             </a:r>
             <a:r>
-              <a:rPr dirty="0" err="1"/>
+              <a:rPr sz="1000" dirty="0" err="1"/>
               <a:t>ougrid</a:t>
             </a:r>
             <a:r>
-              <a:rPr dirty="0"/>
+              <a:rPr sz="1000" dirty="0"/>
               <a:t>/</a:t>
             </a:r>
             <a:r>
-              <a:rPr dirty="0" err="1"/>
+              <a:rPr sz="1000" dirty="0" err="1"/>
               <a:t>arwn-aifse</a:t>
             </a:r>
-            <a:endParaRPr dirty="0"/>
+            <a:endParaRPr sz="1000" dirty="0"/>
           </a:p>
         </p:txBody>
       </p:sp>
@@ -6989,7 +8536,7 @@
         <p:spPr>
           <a:xfrm>
             <a:off x="914400" y="4754880"/>
-            <a:ext cx="10058400" cy="365760"/>
+            <a:ext cx="10058400" cy="338554"/>
           </a:xfrm>
           <a:prstGeom prst="rect">
             <a:avLst/>
@@ -7011,6 +8558,7 @@
               </a:defRPr>
             </a:pPr>
             <a:r>
+              <a:rPr sz="1600"/>
               <a:t>Python 3.11  ·  scikit-learn  ·  OR-Tools  ·  Streamlit  ·  55+ Tests  ·  13 Commits</a:t>
             </a:r>
           </a:p>
@@ -7059,6 +8607,18 @@
   <p:clrMapOvr>
     <a:masterClrMapping/>
   </p:clrMapOvr>
+  <mc:AlternateContent xmlns:mc="http://schemas.openxmlformats.org/markup-compatibility/2006" xmlns:p14="http://schemas.microsoft.com/office/powerpoint/2010/main">
+    <mc:Choice Requires="p14">
+      <p:transition spd="med" p14:dur="700">
+        <p:fade/>
+      </p:transition>
+    </mc:Choice>
+    <mc:Fallback xmlns="">
+      <p:transition spd="med">
+        <p:fade/>
+      </p:transition>
+    </mc:Fallback>
+  </mc:AlternateContent>
 </p:sld>
 </file>
 
@@ -7846,6 +9406,18 @@
   <p:clrMapOvr>
     <a:masterClrMapping/>
   </p:clrMapOvr>
+  <mc:AlternateContent xmlns:mc="http://schemas.openxmlformats.org/markup-compatibility/2006" xmlns:p14="http://schemas.microsoft.com/office/powerpoint/2010/main">
+    <mc:Choice Requires="p14">
+      <p:transition spd="med" p14:dur="700">
+        <p:fade/>
+      </p:transition>
+    </mc:Choice>
+    <mc:Fallback xmlns="">
+      <p:transition spd="med">
+        <p:fade/>
+      </p:transition>
+    </mc:Fallback>
+  </mc:AlternateContent>
 </p:sld>
 </file>
 
@@ -9158,6 +10730,18 @@
   <p:clrMapOvr>
     <a:masterClrMapping/>
   </p:clrMapOvr>
+  <mc:AlternateContent xmlns:mc="http://schemas.openxmlformats.org/markup-compatibility/2006" xmlns:p14="http://schemas.microsoft.com/office/powerpoint/2010/main">
+    <mc:Choice Requires="p14">
+      <p:transition spd="med" p14:dur="700">
+        <p:fade/>
+      </p:transition>
+    </mc:Choice>
+    <mc:Fallback xmlns="">
+      <p:transition spd="med">
+        <p:fade/>
+      </p:transition>
+    </mc:Fallback>
+  </mc:AlternateContent>
 </p:sld>
 </file>
 
@@ -9391,8 +10975,10 @@
               </a:defRPr>
             </a:pPr>
             <a:r>
+              <a:rPr dirty="0" err="1"/>
               <a:t>GradientBoostingRegressor</a:t>
             </a:r>
+            <a:endParaRPr dirty="0"/>
           </a:p>
         </p:txBody>
       </p:sp>
@@ -9430,6 +11016,7 @@
               </a:defRPr>
             </a:pPr>
             <a:r>
+              <a:rPr dirty="0"/>
               <a:t>Trained on 6 months of historical shift data (728 records)</a:t>
             </a:r>
           </a:p>
@@ -9446,8 +11033,30 @@
               </a:defRPr>
             </a:pPr>
             <a:r>
-              <a:t>Features: day_of_week, is_weekend, cyclical month, shift ID, day_of_month</a:t>
-            </a:r>
+              <a:rPr dirty="0"/>
+              <a:t>Features: </a:t>
+            </a:r>
+            <a:r>
+              <a:rPr dirty="0" err="1"/>
+              <a:t>day_of_week</a:t>
+            </a:r>
+            <a:r>
+              <a:rPr dirty="0"/>
+              <a:t>, </a:t>
+            </a:r>
+            <a:r>
+              <a:rPr dirty="0" err="1"/>
+              <a:t>is_weekend</a:t>
+            </a:r>
+            <a:r>
+              <a:rPr dirty="0"/>
+              <a:t>, cyclical month, shift ID, </a:t>
+            </a:r>
+            <a:r>
+              <a:rPr dirty="0" err="1"/>
+              <a:t>day_of_month</a:t>
+            </a:r>
+            <a:endParaRPr dirty="0"/>
           </a:p>
           <a:p>
             <a:pPr>
@@ -9462,6 +11071,7 @@
               </a:defRPr>
             </a:pPr>
             <a:r>
+              <a:rPr dirty="0"/>
               <a:t>Time-based validation split (last month held out)</a:t>
             </a:r>
           </a:p>
@@ -9478,6 +11088,7 @@
               </a:defRPr>
             </a:pPr>
             <a:r>
+              <a:rPr dirty="0"/>
               <a:t>Predicts ticket volume per shift per day for April 2026</a:t>
             </a:r>
           </a:p>
@@ -9847,7 +11458,16 @@
               </a:defRPr>
             </a:pPr>
             <a:r>
-              <a:t>CSAT Regression: volume + senior + junior + english → CSAT score</a:t>
+              <a:rPr dirty="0"/>
+              <a:t>CSAT Regression: volume + senior + junior + </a:t>
+            </a:r>
+            <a:r>
+              <a:rPr dirty="0" err="1"/>
+              <a:t>english</a:t>
+            </a:r>
+            <a:r>
+              <a:rPr dirty="0"/>
+              <a:t> → CSAT score</a:t>
             </a:r>
           </a:p>
           <a:p>
@@ -9863,6 +11483,7 @@
               </a:defRPr>
             </a:pPr>
             <a:r>
+              <a:rPr dirty="0"/>
               <a:t>Wait Time Regression: same features → avg wait seconds</a:t>
             </a:r>
           </a:p>
@@ -9879,6 +11500,7 @@
               </a:defRPr>
             </a:pPr>
             <a:r>
+              <a:rPr dirty="0"/>
               <a:t>Vectorized grid search: find minimum staff meeting both targets</a:t>
             </a:r>
           </a:p>
@@ -9895,6 +11517,7 @@
               </a:defRPr>
             </a:pPr>
             <a:r>
+              <a:rPr dirty="0"/>
               <a:t>Historical floors (p10) prevent model extrapolation errors</a:t>
             </a:r>
           </a:p>
@@ -9911,6 +11534,7 @@
               </a:defRPr>
             </a:pPr>
             <a:r>
+              <a:rPr dirty="0"/>
               <a:t>Feasibility caps for scarce pools (8 English agents, ~6.4 avail/day)</a:t>
             </a:r>
           </a:p>
@@ -10286,6 +11910,18 @@
   <p:clrMapOvr>
     <a:masterClrMapping/>
   </p:clrMapOvr>
+  <mc:AlternateContent xmlns:mc="http://schemas.openxmlformats.org/markup-compatibility/2006" xmlns:p14="http://schemas.microsoft.com/office/powerpoint/2010/main">
+    <mc:Choice Requires="p14">
+      <p:transition spd="med" p14:dur="700">
+        <p:fade/>
+      </p:transition>
+    </mc:Choice>
+    <mc:Fallback xmlns="">
+      <p:transition spd="med">
+        <p:fade/>
+      </p:transition>
+    </mc:Fallback>
+  </mc:AlternateContent>
 </p:sld>
 </file>
 
@@ -11029,6 +12665,18 @@
   <p:clrMapOvr>
     <a:masterClrMapping/>
   </p:clrMapOvr>
+  <mc:AlternateContent xmlns:mc="http://schemas.openxmlformats.org/markup-compatibility/2006" xmlns:p14="http://schemas.microsoft.com/office/powerpoint/2010/main">
+    <mc:Choice Requires="p14">
+      <p:transition spd="med" p14:dur="700">
+        <p:fade/>
+      </p:transition>
+    </mc:Choice>
+    <mc:Fallback xmlns="">
+      <p:transition spd="med">
+        <p:fade/>
+      </p:transition>
+    </mc:Fallback>
+  </mc:AlternateContent>
 </p:sld>
 </file>
 
@@ -13501,6 +15149,18 @@
   <p:clrMapOvr>
     <a:masterClrMapping/>
   </p:clrMapOvr>
+  <mc:AlternateContent xmlns:mc="http://schemas.openxmlformats.org/markup-compatibility/2006" xmlns:p14="http://schemas.microsoft.com/office/powerpoint/2010/main">
+    <mc:Choice Requires="p14">
+      <p:transition spd="med" p14:dur="700">
+        <p:fade/>
+      </p:transition>
+    </mc:Choice>
+    <mc:Fallback xmlns="">
+      <p:transition spd="med">
+        <p:fade/>
+      </p:transition>
+    </mc:Fallback>
+  </mc:AlternateContent>
 </p:sld>
 </file>
 
@@ -14381,6 +16041,7 @@
               </a:defRPr>
             </a:pPr>
             <a:r>
+              <a:rPr dirty="0"/>
               <a:t>All business rules in SchedulingConfig dataclass — weights, thresholds, solver params. Zero magic numbers in logic. Managers can tune via dashboard sliders without code changes.</a:t>
             </a:r>
           </a:p>
@@ -14391,6 +16052,18 @@
   <p:clrMapOvr>
     <a:masterClrMapping/>
   </p:clrMapOvr>
+  <mc:AlternateContent xmlns:mc="http://schemas.openxmlformats.org/markup-compatibility/2006" xmlns:p14="http://schemas.microsoft.com/office/powerpoint/2010/main">
+    <mc:Choice Requires="p14">
+      <p:transition spd="med" p14:dur="700">
+        <p:fade/>
+      </p:transition>
+    </mc:Choice>
+    <mc:Fallback xmlns="">
+      <p:transition spd="med">
+        <p:fade/>
+      </p:transition>
+    </mc:Fallback>
+  </mc:AlternateContent>
 </p:sld>
 </file>
 
@@ -14919,8 +16592,8 @@
         </p:nvSpPr>
         <p:spPr>
           <a:xfrm>
-            <a:off x="9144000" y="2148840"/>
-            <a:ext cx="1920240" cy="548640"/>
+            <a:off x="8961120" y="2148840"/>
+            <a:ext cx="2286000" cy="523220"/>
           </a:xfrm>
           <a:prstGeom prst="rect">
             <a:avLst/>
@@ -14942,6 +16615,7 @@
               </a:defRPr>
             </a:pPr>
             <a:r>
+              <a:rPr dirty="0"/>
               <a:t>1,083/1,200</a:t>
             </a:r>
           </a:p>
@@ -15114,7 +16788,7 @@
         </p:nvSpPr>
         <p:spPr>
           <a:xfrm>
-            <a:off x="731520" y="4389120"/>
+            <a:off x="731520" y="4334691"/>
             <a:ext cx="5029200" cy="1828800"/>
           </a:xfrm>
           <a:prstGeom prst="roundRect">
@@ -15188,28 +16862,68 @@
           </a:p>
         </p:txBody>
       </p:sp>
+      <p:pic>
+        <p:nvPicPr>
+          <p:cNvPr id="20" name="Picture 19">
+            <a:extLst>
+              <a:ext uri="{FF2B5EF4-FFF2-40B4-BE49-F238E27FC236}">
+                <a16:creationId xmlns:a16="http://schemas.microsoft.com/office/drawing/2014/main" id="{5F8BE10C-7A2E-3A0B-4203-33CC48C3A957}"/>
+              </a:ext>
+            </a:extLst>
+          </p:cNvPr>
+          <p:cNvPicPr>
+            <a:picLocks noChangeAspect="1"/>
+          </p:cNvPicPr>
+          <p:nvPr/>
+        </p:nvPicPr>
+        <p:blipFill>
+          <a:blip r:embed="rId2"/>
+          <a:stretch>
+            <a:fillRect/>
+          </a:stretch>
+        </p:blipFill>
+        <p:spPr>
+          <a:xfrm>
+            <a:off x="968568" y="4130339"/>
+            <a:ext cx="4555103" cy="2250570"/>
+          </a:xfrm>
+          <a:prstGeom prst="rect">
+            <a:avLst/>
+          </a:prstGeom>
+        </p:spPr>
+      </p:pic>
     </p:spTree>
   </p:cSld>
   <p:clrMapOvr>
     <a:masterClrMapping/>
   </p:clrMapOvr>
+  <mc:AlternateContent xmlns:mc="http://schemas.openxmlformats.org/markup-compatibility/2006" xmlns:p14="http://schemas.microsoft.com/office/powerpoint/2010/main">
+    <mc:Choice Requires="p14">
+      <p:transition spd="med" p14:dur="700">
+        <p:fade/>
+      </p:transition>
+    </mc:Choice>
+    <mc:Fallback xmlns="">
+      <p:transition spd="med">
+        <p:fade/>
+      </p:transition>
+    </mc:Fallback>
+  </mc:AlternateContent>
 </p:sld>
 </file>
 
 <file path=ppt/slides/slide9.xml><?xml version="1.0" encoding="utf-8"?>
 <p:sld xmlns:a="http://schemas.openxmlformats.org/drawingml/2006/main" xmlns:r="http://schemas.openxmlformats.org/officeDocument/2006/relationships" xmlns:p="http://schemas.openxmlformats.org/presentationml/2006/main">
   <p:cSld>
-    <p:bg>
-      <p:bgPr>
-        <a:solidFill>
-          <a:srgbClr val="FFFFFF"/>
-        </a:solidFill>
-        <a:effectLst/>
-      </p:bgPr>
-    </p:bg>
     <p:spTree>
       <p:nvGrpSpPr>
-        <p:cNvPr id="1" name=""/>
+        <p:cNvPr id="1" name="">
+          <a:extLst>
+            <a:ext uri="{FF2B5EF4-FFF2-40B4-BE49-F238E27FC236}">
+              <a16:creationId xmlns:a16="http://schemas.microsoft.com/office/drawing/2014/main" id="{9B2BA86C-69D4-2391-4F6B-FD9A0C4A10DC}"/>
+            </a:ext>
+          </a:extLst>
+        </p:cNvPr>
         <p:cNvGrpSpPr/>
         <p:nvPr/>
       </p:nvGrpSpPr>
@@ -15223,7 +16937,13 @@
       </p:grpSpPr>
       <p:sp>
         <p:nvSpPr>
-          <p:cNvPr id="2" name="Rectangle 1"/>
+          <p:cNvPr id="2" name="Rectangle 1">
+            <a:extLst>
+              <a:ext uri="{FF2B5EF4-FFF2-40B4-BE49-F238E27FC236}">
+                <a16:creationId xmlns:a16="http://schemas.microsoft.com/office/drawing/2014/main" id="{D86E3A0E-5928-CA09-1749-5C0D4A3DB3D9}"/>
+              </a:ext>
+            </a:extLst>
+          </p:cNvPr>
           <p:cNvSpPr/>
           <p:nvPr/>
         </p:nvSpPr>
@@ -15267,7 +16987,13 @@
       </p:sp>
       <p:sp>
         <p:nvSpPr>
-          <p:cNvPr id="3" name="TextBox 2"/>
+          <p:cNvPr id="3" name="TextBox 2">
+            <a:extLst>
+              <a:ext uri="{FF2B5EF4-FFF2-40B4-BE49-F238E27FC236}">
+                <a16:creationId xmlns:a16="http://schemas.microsoft.com/office/drawing/2014/main" id="{65617593-1FF3-F833-BEB6-9E151C25BB9D}"/>
+              </a:ext>
+            </a:extLst>
+          </p:cNvPr>
           <p:cNvSpPr txBox="1"/>
           <p:nvPr/>
         </p:nvSpPr>
@@ -15296,50 +17022,20 @@
               </a:defRPr>
             </a:pPr>
             <a:r>
-              <a:t>Bonus: Fairness Metrics &amp; Remediation</a:t>
-            </a:r>
-          </a:p>
-        </p:txBody>
-      </p:sp>
-      <p:sp>
-        <p:nvSpPr>
-          <p:cNvPr id="4" name="TextBox 3"/>
-          <p:cNvSpPr txBox="1"/>
-          <p:nvPr/>
-        </p:nvSpPr>
-        <p:spPr>
-          <a:xfrm>
-            <a:off x="731520" y="914400"/>
-            <a:ext cx="10058400" cy="457200"/>
-          </a:xfrm>
-          <a:prstGeom prst="rect">
-            <a:avLst/>
-          </a:prstGeom>
-          <a:noFill/>
-        </p:spPr>
-        <p:txBody>
-          <a:bodyPr wrap="square">
-            <a:spAutoFit/>
-          </a:bodyPr>
-          <a:lstStyle/>
-          <a:p>
-            <a:pPr algn="l">
-              <a:defRPr sz="1600" b="0">
-                <a:solidFill>
-                  <a:srgbClr val="8E8EA3"/>
-                </a:solidFill>
-                <a:latin typeface="Calibri"/>
-              </a:defRPr>
-            </a:pPr>
-            <a:r>
-              <a:t>Quantitative equity measurement + actionable suggestions</a:t>
-            </a:r>
-          </a:p>
-        </p:txBody>
-      </p:sp>
-      <p:sp>
-        <p:nvSpPr>
-          <p:cNvPr id="5" name="TextBox 4"/>
+              <a:t>Bonus: Agent Shift Preferences</a:t>
+            </a:r>
+          </a:p>
+        </p:txBody>
+      </p:sp>
+      <p:sp>
+        <p:nvSpPr>
+          <p:cNvPr id="5" name="TextBox 4">
+            <a:extLst>
+              <a:ext uri="{FF2B5EF4-FFF2-40B4-BE49-F238E27FC236}">
+                <a16:creationId xmlns:a16="http://schemas.microsoft.com/office/drawing/2014/main" id="{628EA162-0E50-9BA1-3AA6-6402FE6C1B5F}"/>
+              </a:ext>
+            </a:extLst>
+          </p:cNvPr>
           <p:cNvSpPr txBox="1"/>
           <p:nvPr/>
         </p:nvSpPr>
@@ -15374,407 +17070,58 @@
           </a:p>
         </p:txBody>
       </p:sp>
-      <p:sp>
-        <p:nvSpPr>
-          <p:cNvPr id="6" name="TextBox 5"/>
-          <p:cNvSpPr txBox="1"/>
-          <p:nvPr/>
-        </p:nvSpPr>
-        <p:spPr>
-          <a:xfrm>
-            <a:off x="731520" y="1463040"/>
-            <a:ext cx="5029200" cy="365760"/>
-          </a:xfrm>
-          <a:prstGeom prst="rect">
-            <a:avLst/>
-          </a:prstGeom>
-          <a:noFill/>
-        </p:spPr>
-        <p:txBody>
-          <a:bodyPr wrap="square">
-            <a:spAutoFit/>
-          </a:bodyPr>
-          <a:lstStyle/>
-          <a:p>
-            <a:pPr algn="l">
-              <a:defRPr sz="2000" b="1">
-                <a:solidFill>
-                  <a:srgbClr val="1A1A2E"/>
-                </a:solidFill>
-                <a:latin typeface="Calibri"/>
-              </a:defRPr>
-            </a:pPr>
-            <a:r>
-              <a:t>Fairness Scoring</a:t>
-            </a:r>
-          </a:p>
-        </p:txBody>
-      </p:sp>
-      <p:sp>
-        <p:nvSpPr>
-          <p:cNvPr id="7" name="TextBox 6"/>
-          <p:cNvSpPr txBox="1"/>
-          <p:nvPr/>
-        </p:nvSpPr>
-        <p:spPr>
-          <a:xfrm>
-            <a:off x="731520" y="1920240"/>
-            <a:ext cx="5029200" cy="2743200"/>
-          </a:xfrm>
-          <a:prstGeom prst="rect">
-            <a:avLst/>
-          </a:prstGeom>
-          <a:noFill/>
-        </p:spPr>
-        <p:txBody>
-          <a:bodyPr wrap="square">
-            <a:spAutoFit/>
-          </a:bodyPr>
-          <a:lstStyle/>
-          <a:p>
-            <a:pPr>
-              <a:spcAft>
-                <a:spcPts val="650"/>
-              </a:spcAft>
-              <a:defRPr sz="1300">
-                <a:solidFill>
-                  <a:srgbClr val="1A1A2E"/>
-                </a:solidFill>
-                <a:latin typeface="Calibri"/>
-              </a:defRPr>
-            </a:pPr>
-            <a:r>
-              <a:t>Gini coefficient: 0 = everyone equal, 1 = one person gets all</a:t>
-            </a:r>
-          </a:p>
-          <a:p>
-            <a:pPr>
-              <a:spcAft>
-                <a:spcPts val="650"/>
-              </a:spcAft>
-              <a:defRPr sz="1300">
-                <a:solidFill>
-                  <a:srgbClr val="1A1A2E"/>
-                </a:solidFill>
-                <a:latin typeface="Calibri"/>
-              </a:defRPr>
-            </a:pPr>
-            <a:r>
-              <a:t>Night shift Gini: measures equity in unpopular shift distribution</a:t>
-            </a:r>
-          </a:p>
-          <a:p>
-            <a:pPr>
-              <a:spcAft>
-                <a:spcPts val="650"/>
-              </a:spcAft>
-              <a:defRPr sz="1300">
-                <a:solidFill>
-                  <a:srgbClr val="1A1A2E"/>
-                </a:solidFill>
-                <a:latin typeface="Calibri"/>
-              </a:defRPr>
-            </a:pPr>
-            <a:r>
-              <a:t>Workload Gini: measures equity in total working days</a:t>
-            </a:r>
-          </a:p>
-          <a:p>
-            <a:pPr>
-              <a:spcAft>
-                <a:spcPts val="650"/>
-              </a:spcAft>
-              <a:defRPr sz="1300">
-                <a:solidFill>
-                  <a:srgbClr val="1A1A2E"/>
-                </a:solidFill>
-                <a:latin typeface="Calibri"/>
-              </a:defRPr>
-            </a:pPr>
-            <a:r>
-              <a:t>Shift entropy (Shannon): diversity of shift assignments per agent</a:t>
-            </a:r>
-          </a:p>
-          <a:p>
-            <a:pPr>
-              <a:spcAft>
-                <a:spcPts val="650"/>
-              </a:spcAft>
-              <a:defRPr sz="1300">
-                <a:solidFill>
-                  <a:srgbClr val="1A1A2E"/>
-                </a:solidFill>
-                <a:latin typeface="Calibri"/>
-              </a:defRPr>
-            </a:pPr>
-            <a:r>
-              <a:t>Composite score (0-100): 40% night + 30% workload + 30% variety</a:t>
-            </a:r>
-          </a:p>
-          <a:p>
-            <a:pPr>
-              <a:spcAft>
-                <a:spcPts val="650"/>
-              </a:spcAft>
-              <a:defRPr sz="1300">
-                <a:solidFill>
-                  <a:srgbClr val="1A1A2E"/>
-                </a:solidFill>
-                <a:latin typeface="Calibri"/>
-              </a:defRPr>
-            </a:pPr>
-            <a:r>
-              <a:t>Letter grade: A (≥90) → F (&lt;60); sparsity-adjusted for realism</a:t>
-            </a:r>
-          </a:p>
-        </p:txBody>
-      </p:sp>
-      <p:sp>
-        <p:nvSpPr>
-          <p:cNvPr id="8" name="TextBox 7"/>
-          <p:cNvSpPr txBox="1"/>
-          <p:nvPr/>
-        </p:nvSpPr>
-        <p:spPr>
-          <a:xfrm>
-            <a:off x="6400800" y="1463040"/>
-            <a:ext cx="5029200" cy="365760"/>
-          </a:xfrm>
-          <a:prstGeom prst="rect">
-            <a:avLst/>
-          </a:prstGeom>
-          <a:noFill/>
-        </p:spPr>
-        <p:txBody>
-          <a:bodyPr wrap="square">
-            <a:spAutoFit/>
-          </a:bodyPr>
-          <a:lstStyle/>
-          <a:p>
-            <a:pPr algn="l">
-              <a:defRPr sz="2000" b="1">
-                <a:solidFill>
-                  <a:srgbClr val="1A1A2E"/>
-                </a:solidFill>
-                <a:latin typeface="Calibri"/>
-              </a:defRPr>
-            </a:pPr>
-            <a:r>
-              <a:t>Constraint Remediation</a:t>
-            </a:r>
-          </a:p>
-        </p:txBody>
-      </p:sp>
-      <p:sp>
-        <p:nvSpPr>
-          <p:cNvPr id="9" name="TextBox 8"/>
-          <p:cNvSpPr txBox="1"/>
-          <p:nvPr/>
-        </p:nvSpPr>
-        <p:spPr>
-          <a:xfrm>
-            <a:off x="6400800" y="1920240"/>
-            <a:ext cx="5029200" cy="2743200"/>
-          </a:xfrm>
-          <a:prstGeom prst="rect">
-            <a:avLst/>
-          </a:prstGeom>
-          <a:noFill/>
-        </p:spPr>
-        <p:txBody>
-          <a:bodyPr wrap="square">
-            <a:spAutoFit/>
-          </a:bodyPr>
-          <a:lstStyle/>
-          <a:p>
-            <a:pPr>
-              <a:spcAft>
-                <a:spcPts val="650"/>
-              </a:spcAft>
-              <a:defRPr sz="1300">
-                <a:solidFill>
-                  <a:srgbClr val="1A1A2E"/>
-                </a:solidFill>
-                <a:latin typeface="Calibri"/>
-              </a:defRPr>
-            </a:pPr>
-            <a:r>
-              <a:t>Each violation type → specific, actionable suggestion</a:t>
-            </a:r>
-          </a:p>
-          <a:p>
-            <a:pPr>
-              <a:spcAft>
-                <a:spcPts val="650"/>
-              </a:spcAft>
-              <a:defRPr sz="1300">
-                <a:solidFill>
-                  <a:srgbClr val="1A1A2E"/>
-                </a:solidFill>
-                <a:latin typeface="Calibri"/>
-              </a:defRPr>
-            </a:pPr>
-            <a:r>
-              <a:t>Grouped by category with affected days listed</a:t>
-            </a:r>
-          </a:p>
-          <a:p>
-            <a:pPr>
-              <a:spcAft>
-                <a:spcPts val="650"/>
-              </a:spcAft>
-              <a:defRPr sz="1300">
-                <a:solidFill>
-                  <a:srgbClr val="1A1A2E"/>
-                </a:solidFill>
-                <a:latin typeface="Calibri"/>
-              </a:defRPr>
-            </a:pPr>
-            <a:r>
-              <a:t>e.g. "Move a senior from lower-demand shift" for staffing gaps</a:t>
-            </a:r>
-          </a:p>
-          <a:p>
-            <a:pPr>
-              <a:spcAft>
-                <a:spcPts val="650"/>
-              </a:spcAft>
-              <a:defRPr sz="1300">
-                <a:solidFill>
-                  <a:srgbClr val="1A1A2E"/>
-                </a:solidFill>
-                <a:latin typeface="Calibri"/>
-              </a:defRPr>
-            </a:pPr>
-            <a:r>
-              <a:t>e.g. "Swap with agent having complementary pattern" for continuity</a:t>
-            </a:r>
-          </a:p>
-          <a:p>
-            <a:pPr>
-              <a:spcAft>
-                <a:spcPts val="650"/>
-              </a:spcAft>
-              <a:defRPr sz="1300">
-                <a:solidFill>
-                  <a:srgbClr val="1A1A2E"/>
-                </a:solidFill>
-                <a:latin typeface="Calibri"/>
-              </a:defRPr>
-            </a:pPr>
-            <a:r>
-              <a:t>Dashboard shows expandable remediation per violation group</a:t>
-            </a:r>
-          </a:p>
-          <a:p>
-            <a:pPr>
-              <a:spcAft>
-                <a:spcPts val="650"/>
-              </a:spcAft>
-              <a:defRPr sz="1300">
-                <a:solidFill>
-                  <a:srgbClr val="1A1A2E"/>
-                </a:solidFill>
-                <a:latin typeface="Calibri"/>
-              </a:defRPr>
-            </a:pPr>
-            <a:r>
-              <a:t>Enables managers to make informed manual adjustments</a:t>
-            </a:r>
-          </a:p>
-        </p:txBody>
-      </p:sp>
-      <p:sp>
-        <p:nvSpPr>
-          <p:cNvPr id="10" name="Rounded Rectangle 9"/>
-          <p:cNvSpPr/>
-          <p:nvPr/>
-        </p:nvSpPr>
-        <p:spPr>
-          <a:xfrm>
-            <a:off x="548640" y="4937760"/>
-            <a:ext cx="10972800" cy="1097280"/>
-          </a:xfrm>
-          <a:prstGeom prst="roundRect">
-            <a:avLst>
-              <a:gd name="adj" fmla="val 3000"/>
-            </a:avLst>
-          </a:prstGeom>
-          <a:solidFill>
-            <a:srgbClr val="00C3F7"/>
-          </a:solidFill>
-          <a:ln>
-            <a:noFill/>
-          </a:ln>
-        </p:spPr>
-        <p:style>
-          <a:lnRef idx="1">
-            <a:schemeClr val="accent1"/>
-          </a:lnRef>
-          <a:fillRef idx="3">
-            <a:schemeClr val="accent1"/>
-          </a:fillRef>
-          <a:effectRef idx="2">
-            <a:schemeClr val="accent1"/>
-          </a:effectRef>
-          <a:fontRef idx="minor">
-            <a:schemeClr val="lt1"/>
-          </a:fontRef>
-        </p:style>
-        <p:txBody>
-          <a:bodyPr rtlCol="0" anchor="ctr"/>
-          <a:lstStyle/>
-          <a:p>
-            <a:pPr algn="ctr"/>
-            <a:endParaRPr/>
-          </a:p>
-        </p:txBody>
-      </p:sp>
-      <p:sp>
-        <p:nvSpPr>
-          <p:cNvPr id="11" name="TextBox 10"/>
-          <p:cNvSpPr txBox="1"/>
-          <p:nvPr/>
-        </p:nvSpPr>
-        <p:spPr>
-          <a:xfrm>
-            <a:off x="731520" y="5029200"/>
-            <a:ext cx="10607040" cy="914400"/>
-          </a:xfrm>
-          <a:prstGeom prst="rect">
-            <a:avLst/>
-          </a:prstGeom>
-          <a:noFill/>
-        </p:spPr>
-        <p:txBody>
-          <a:bodyPr wrap="square">
-            <a:spAutoFit/>
-          </a:bodyPr>
-          <a:lstStyle/>
-          <a:p>
-            <a:pPr algn="l">
-              <a:defRPr sz="1300" b="0">
-                <a:solidFill>
-                  <a:srgbClr val="FFFFFF"/>
-                </a:solidFill>
-                <a:latin typeface="Calibri"/>
-              </a:defRPr>
-            </a:pPr>
-            <a:r>
-              <a:t>Why This Matters for Production</a:t>
-            </a:r>
-            <a:br/>
-            <a:r>
-              <a:t>→ Fairness metrics give managers visibility into equity issues before agent complaints. Remediation transforms a 'failed constraint' alert into a concrete action plan. Together, they close the feedback loop between automated scheduling and human oversight.</a:t>
-            </a:r>
-          </a:p>
-        </p:txBody>
-      </p:sp>
+      <p:pic>
+        <p:nvPicPr>
+          <p:cNvPr id="20" name="Picture 19">
+            <a:extLst>
+              <a:ext uri="{FF2B5EF4-FFF2-40B4-BE49-F238E27FC236}">
+                <a16:creationId xmlns:a16="http://schemas.microsoft.com/office/drawing/2014/main" id="{7CB53008-1459-9E2B-7B6A-92668934259E}"/>
+              </a:ext>
+            </a:extLst>
+          </p:cNvPr>
+          <p:cNvPicPr>
+            <a:picLocks noChangeAspect="1"/>
+          </p:cNvPicPr>
+          <p:nvPr/>
+        </p:nvPicPr>
+        <p:blipFill>
+          <a:blip r:embed="rId2"/>
+          <a:stretch>
+            <a:fillRect/>
+          </a:stretch>
+        </p:blipFill>
+        <p:spPr>
+          <a:xfrm>
+            <a:off x="968568" y="1082042"/>
+            <a:ext cx="10287261" cy="5082695"/>
+          </a:xfrm>
+          <a:prstGeom prst="rect">
+            <a:avLst/>
+          </a:prstGeom>
+        </p:spPr>
+      </p:pic>
     </p:spTree>
+    <p:extLst>
+      <p:ext uri="{BB962C8B-B14F-4D97-AF65-F5344CB8AC3E}">
+        <p14:creationId xmlns:p14="http://schemas.microsoft.com/office/powerpoint/2010/main" val="4001799219"/>
+      </p:ext>
+    </p:extLst>
   </p:cSld>
   <p:clrMapOvr>
     <a:masterClrMapping/>
   </p:clrMapOvr>
+  <mc:AlternateContent xmlns:mc="http://schemas.openxmlformats.org/markup-compatibility/2006" xmlns:p14="http://schemas.microsoft.com/office/powerpoint/2010/main">
+    <mc:Choice Requires="p14">
+      <p:transition spd="med" p14:dur="700">
+        <p:fade/>
+      </p:transition>
+    </mc:Choice>
+    <mc:Fallback xmlns="">
+      <p:transition spd="med">
+        <p:fade/>
+      </p:transition>
+    </mc:Fallback>
+  </mc:AlternateContent>
 </p:sld>
 </file>
 
@@ -16096,4 +17443,319 @@
   </a:objectDefaults>
   <a:extraClrSchemeLst/>
 </a:theme>
+</file>
+
+<file path=ppt/theme/theme2.xml><?xml version="1.0" encoding="utf-8"?>
+<a:theme xmlns:a="http://schemas.openxmlformats.org/drawingml/2006/main" name="Office Theme">
+  <a:themeElements>
+    <a:clrScheme name="Office">
+      <a:dk1>
+        <a:sysClr val="windowText" lastClr="000000"/>
+      </a:dk1>
+      <a:lt1>
+        <a:sysClr val="window" lastClr="FFFFFF"/>
+      </a:lt1>
+      <a:dk2>
+        <a:srgbClr val="0E2841"/>
+      </a:dk2>
+      <a:lt2>
+        <a:srgbClr val="E8E8E8"/>
+      </a:lt2>
+      <a:accent1>
+        <a:srgbClr val="156082"/>
+      </a:accent1>
+      <a:accent2>
+        <a:srgbClr val="E97132"/>
+      </a:accent2>
+      <a:accent3>
+        <a:srgbClr val="196B24"/>
+      </a:accent3>
+      <a:accent4>
+        <a:srgbClr val="0F9ED5"/>
+      </a:accent4>
+      <a:accent5>
+        <a:srgbClr val="A02B93"/>
+      </a:accent5>
+      <a:accent6>
+        <a:srgbClr val="4EA72E"/>
+      </a:accent6>
+      <a:hlink>
+        <a:srgbClr val="467886"/>
+      </a:hlink>
+      <a:folHlink>
+        <a:srgbClr val="96607D"/>
+      </a:folHlink>
+    </a:clrScheme>
+    <a:fontScheme name="Office">
+      <a:majorFont>
+        <a:latin typeface="Aptos Display" panose="02110004020202020204"/>
+        <a:ea typeface=""/>
+        <a:cs typeface=""/>
+        <a:font script="Jpan" typeface="游ゴシック Light"/>
+        <a:font script="Hang" typeface="맑은 고딕"/>
+        <a:font script="Hans" typeface="等线 Light"/>
+        <a:font script="Hant" typeface="新細明體"/>
+        <a:font script="Arab" typeface="Times New Roman"/>
+        <a:font script="Hebr" typeface="Times New Roman"/>
+        <a:font script="Thai" typeface="Angsana New"/>
+        <a:font script="Ethi" typeface="Nyala"/>
+        <a:font script="Beng" typeface="Vrinda"/>
+        <a:font script="Gujr" typeface="Shruti"/>
+        <a:font script="Khmr" typeface="MoolBoran"/>
+        <a:font script="Knda" typeface="Tunga"/>
+        <a:font script="Guru" typeface="Raavi"/>
+        <a:font script="Cans" typeface="Euphemia"/>
+        <a:font script="Cher" typeface="Plantagenet Cherokee"/>
+        <a:font script="Yiii" typeface="Microsoft Yi Baiti"/>
+        <a:font script="Tibt" typeface="Microsoft Himalaya"/>
+        <a:font script="Thaa" typeface="MV Boli"/>
+        <a:font script="Deva" typeface="Mangal"/>
+        <a:font script="Telu" typeface="Gautami"/>
+        <a:font script="Taml" typeface="Latha"/>
+        <a:font script="Syrc" typeface="Estrangelo Edessa"/>
+        <a:font script="Orya" typeface="Kalinga"/>
+        <a:font script="Mlym" typeface="Kartika"/>
+        <a:font script="Laoo" typeface="DokChampa"/>
+        <a:font script="Sinh" typeface="Iskoola Pota"/>
+        <a:font script="Mong" typeface="Mongolian Baiti"/>
+        <a:font script="Viet" typeface="Times New Roman"/>
+        <a:font script="Uigh" typeface="Microsoft Uighur"/>
+        <a:font script="Geor" typeface="Sylfaen"/>
+        <a:font script="Armn" typeface="Arial"/>
+        <a:font script="Bugi" typeface="Leelawadee UI"/>
+        <a:font script="Bopo" typeface="Microsoft JhengHei"/>
+        <a:font script="Java" typeface="Javanese Text"/>
+        <a:font script="Lisu" typeface="Segoe UI"/>
+        <a:font script="Mymr" typeface="Myanmar Text"/>
+        <a:font script="Nkoo" typeface="Ebrima"/>
+        <a:font script="Olck" typeface="Nirmala UI"/>
+        <a:font script="Osma" typeface="Ebrima"/>
+        <a:font script="Phag" typeface="Phagspa"/>
+        <a:font script="Syrn" typeface="Estrangelo Edessa"/>
+        <a:font script="Syrj" typeface="Estrangelo Edessa"/>
+        <a:font script="Syre" typeface="Estrangelo Edessa"/>
+        <a:font script="Sora" typeface="Nirmala UI"/>
+        <a:font script="Tale" typeface="Microsoft Tai Le"/>
+        <a:font script="Talu" typeface="Microsoft New Tai Lue"/>
+        <a:font script="Tfng" typeface="Ebrima"/>
+      </a:majorFont>
+      <a:minorFont>
+        <a:latin typeface="Aptos" panose="02110004020202020204"/>
+        <a:ea typeface=""/>
+        <a:cs typeface=""/>
+        <a:font script="Jpan" typeface="游ゴシック"/>
+        <a:font script="Hang" typeface="맑은 고딕"/>
+        <a:font script="Hans" typeface="等线"/>
+        <a:font script="Hant" typeface="新細明體"/>
+        <a:font script="Arab" typeface="Arial"/>
+        <a:font script="Hebr" typeface="Arial"/>
+        <a:font script="Thai" typeface="Cordia New"/>
+        <a:font script="Ethi" typeface="Nyala"/>
+        <a:font script="Beng" typeface="Vrinda"/>
+        <a:font script="Gujr" typeface="Shruti"/>
+        <a:font script="Khmr" typeface="DaunPenh"/>
+        <a:font script="Knda" typeface="Tunga"/>
+        <a:font script="Guru" typeface="Raavi"/>
+        <a:font script="Cans" typeface="Euphemia"/>
+        <a:font script="Cher" typeface="Plantagenet Cherokee"/>
+        <a:font script="Yiii" typeface="Microsoft Yi Baiti"/>
+        <a:font script="Tibt" typeface="Microsoft Himalaya"/>
+        <a:font script="Thaa" typeface="MV Boli"/>
+        <a:font script="Deva" typeface="Mangal"/>
+        <a:font script="Telu" typeface="Gautami"/>
+        <a:font script="Taml" typeface="Latha"/>
+        <a:font script="Syrc" typeface="Estrangelo Edessa"/>
+        <a:font script="Orya" typeface="Kalinga"/>
+        <a:font script="Mlym" typeface="Kartika"/>
+        <a:font script="Laoo" typeface="DokChampa"/>
+        <a:font script="Sinh" typeface="Iskoola Pota"/>
+        <a:font script="Mong" typeface="Mongolian Baiti"/>
+        <a:font script="Viet" typeface="Arial"/>
+        <a:font script="Uigh" typeface="Microsoft Uighur"/>
+        <a:font script="Geor" typeface="Sylfaen"/>
+        <a:font script="Armn" typeface="Arial"/>
+        <a:font script="Bugi" typeface="Leelawadee UI"/>
+        <a:font script="Bopo" typeface="Microsoft JhengHei"/>
+        <a:font script="Java" typeface="Javanese Text"/>
+        <a:font script="Lisu" typeface="Segoe UI"/>
+        <a:font script="Mymr" typeface="Myanmar Text"/>
+        <a:font script="Nkoo" typeface="Ebrima"/>
+        <a:font script="Olck" typeface="Nirmala UI"/>
+        <a:font script="Osma" typeface="Ebrima"/>
+        <a:font script="Phag" typeface="Phagspa"/>
+        <a:font script="Syrn" typeface="Estrangelo Edessa"/>
+        <a:font script="Syrj" typeface="Estrangelo Edessa"/>
+        <a:font script="Syre" typeface="Estrangelo Edessa"/>
+        <a:font script="Sora" typeface="Nirmala UI"/>
+        <a:font script="Tale" typeface="Microsoft Tai Le"/>
+        <a:font script="Talu" typeface="Microsoft New Tai Lue"/>
+        <a:font script="Tfng" typeface="Ebrima"/>
+      </a:minorFont>
+    </a:fontScheme>
+    <a:fmtScheme name="Office">
+      <a:fillStyleLst>
+        <a:solidFill>
+          <a:schemeClr val="phClr"/>
+        </a:solidFill>
+        <a:gradFill rotWithShape="1">
+          <a:gsLst>
+            <a:gs pos="0">
+              <a:schemeClr val="phClr">
+                <a:lumMod val="110000"/>
+                <a:satMod val="105000"/>
+                <a:tint val="67000"/>
+              </a:schemeClr>
+            </a:gs>
+            <a:gs pos="50000">
+              <a:schemeClr val="phClr">
+                <a:lumMod val="105000"/>
+                <a:satMod val="103000"/>
+                <a:tint val="73000"/>
+              </a:schemeClr>
+            </a:gs>
+            <a:gs pos="100000">
+              <a:schemeClr val="phClr">
+                <a:lumMod val="105000"/>
+                <a:satMod val="109000"/>
+                <a:tint val="81000"/>
+              </a:schemeClr>
+            </a:gs>
+          </a:gsLst>
+          <a:lin ang="5400000" scaled="0"/>
+        </a:gradFill>
+        <a:gradFill rotWithShape="1">
+          <a:gsLst>
+            <a:gs pos="0">
+              <a:schemeClr val="phClr">
+                <a:satMod val="103000"/>
+                <a:lumMod val="102000"/>
+                <a:tint val="94000"/>
+              </a:schemeClr>
+            </a:gs>
+            <a:gs pos="50000">
+              <a:schemeClr val="phClr">
+                <a:satMod val="110000"/>
+                <a:lumMod val="100000"/>
+                <a:shade val="100000"/>
+              </a:schemeClr>
+            </a:gs>
+            <a:gs pos="100000">
+              <a:schemeClr val="phClr">
+                <a:lumMod val="99000"/>
+                <a:satMod val="120000"/>
+                <a:shade val="78000"/>
+              </a:schemeClr>
+            </a:gs>
+          </a:gsLst>
+          <a:lin ang="5400000" scaled="0"/>
+        </a:gradFill>
+      </a:fillStyleLst>
+      <a:lnStyleLst>
+        <a:ln w="12700" cap="flat" cmpd="sng" algn="ctr">
+          <a:solidFill>
+            <a:schemeClr val="phClr"/>
+          </a:solidFill>
+          <a:prstDash val="solid"/>
+          <a:miter lim="800000"/>
+        </a:ln>
+        <a:ln w="19050" cap="flat" cmpd="sng" algn="ctr">
+          <a:solidFill>
+            <a:schemeClr val="phClr"/>
+          </a:solidFill>
+          <a:prstDash val="solid"/>
+          <a:miter lim="800000"/>
+        </a:ln>
+        <a:ln w="25400" cap="flat" cmpd="sng" algn="ctr">
+          <a:solidFill>
+            <a:schemeClr val="phClr"/>
+          </a:solidFill>
+          <a:prstDash val="solid"/>
+          <a:miter lim="800000"/>
+        </a:ln>
+      </a:lnStyleLst>
+      <a:effectStyleLst>
+        <a:effectStyle>
+          <a:effectLst/>
+        </a:effectStyle>
+        <a:effectStyle>
+          <a:effectLst/>
+        </a:effectStyle>
+        <a:effectStyle>
+          <a:effectLst>
+            <a:outerShdw blurRad="57150" dist="19050" dir="5400000" algn="ctr" rotWithShape="0">
+              <a:srgbClr val="000000">
+                <a:alpha val="63000"/>
+              </a:srgbClr>
+            </a:outerShdw>
+          </a:effectLst>
+        </a:effectStyle>
+      </a:effectStyleLst>
+      <a:bgFillStyleLst>
+        <a:solidFill>
+          <a:schemeClr val="phClr"/>
+        </a:solidFill>
+        <a:solidFill>
+          <a:schemeClr val="phClr">
+            <a:tint val="95000"/>
+            <a:satMod val="170000"/>
+          </a:schemeClr>
+        </a:solidFill>
+        <a:gradFill rotWithShape="1">
+          <a:gsLst>
+            <a:gs pos="0">
+              <a:schemeClr val="phClr">
+                <a:tint val="93000"/>
+                <a:satMod val="150000"/>
+                <a:shade val="98000"/>
+                <a:lumMod val="102000"/>
+              </a:schemeClr>
+            </a:gs>
+            <a:gs pos="50000">
+              <a:schemeClr val="phClr">
+                <a:tint val="98000"/>
+                <a:satMod val="130000"/>
+                <a:shade val="90000"/>
+                <a:lumMod val="103000"/>
+              </a:schemeClr>
+            </a:gs>
+            <a:gs pos="100000">
+              <a:schemeClr val="phClr">
+                <a:shade val="63000"/>
+                <a:satMod val="120000"/>
+              </a:schemeClr>
+            </a:gs>
+          </a:gsLst>
+          <a:lin ang="5400000" scaled="0"/>
+        </a:gradFill>
+      </a:bgFillStyleLst>
+    </a:fmtScheme>
+  </a:themeElements>
+  <a:objectDefaults>
+    <a:lnDef>
+      <a:spPr/>
+      <a:bodyPr/>
+      <a:lstStyle/>
+      <a:style>
+        <a:lnRef idx="2">
+          <a:schemeClr val="accent1"/>
+        </a:lnRef>
+        <a:fillRef idx="0">
+          <a:schemeClr val="accent1"/>
+        </a:fillRef>
+        <a:effectRef idx="1">
+          <a:schemeClr val="accent1"/>
+        </a:effectRef>
+        <a:fontRef idx="minor">
+          <a:schemeClr val="tx1"/>
+        </a:fontRef>
+      </a:style>
+    </a:lnDef>
+  </a:objectDefaults>
+  <a:extraClrSchemeLst/>
+  <a:extLst>
+    <a:ext uri="{05A4C25C-085E-4340-85A3-A5531E510DB2}">
+      <thm15:themeFamily xmlns:thm15="http://schemas.microsoft.com/office/thememl/2012/main" name="Office Theme" id="{2E142A2C-CD16-42D6-873A-C26D2A0506FA}" vid="{1BDDFF52-6CD6-40A5-AB3C-68EB2F1E4D0A}"/>
+    </a:ext>
+  </a:extLst>
+</a:theme>
 </file>